--- a/reports/presentation.pptx
+++ b/reports/presentation.pptx
@@ -25,9 +25,10 @@
     <p:sldId id="273" r:id="rId19"/>
     <p:sldId id="274" r:id="rId20"/>
     <p:sldId id="275" r:id="rId21"/>
+    <p:sldId id="276" r:id="rId22"/>
   </p:sldIdLst>
   <p:notesMasterIdLst>
-    <p:notesMasterId r:id="rId22"/>
+    <p:notesMasterId r:id="rId23"/>
   </p:notesMasterIdLst>
   <p:sldSz cx="12191695" cy="6858000"/>
   <p:notesSz cx="6858000" cy="12191695"/>
@@ -2430,6 +2431,94 @@
             <a:fld id="{F7021451-1387-4CA6-816F-3879F97B5CBC}" type="slidenum">
               <a:rPr lang="en-US"/>
               <a:t>20</a:t>
+            </a:fld>
+            <a:endParaRPr lang="en-US"/>
+          </a:p>
+        </p:txBody>
+      </p:sp>
+    </p:spTree>
+    <p:extLst>
+      <p:ext uri="{BB962C8B-B14F-4D97-AF65-F5344CB8AC3E}">
+        <p14:creationId xmlns:p14="http://schemas.microsoft.com/office/powerpoint/2010/main" val="1024086991"/>
+      </p:ext>
+    </p:extLst>
+  </p:cSld>
+  <p:clrMapOvr>
+    <a:masterClrMapping/>
+  </p:clrMapOvr>
+</p:notes>
+</file>
+
+<file path=ppt/notesSlides/notesSlide21.xml><?xml version="1.0" encoding="utf-8"?>
+<p:notes xmlns:a="http://schemas.openxmlformats.org/drawingml/2006/main" xmlns:r="http://schemas.openxmlformats.org/officeDocument/2006/relationships" xmlns:p="http://schemas.openxmlformats.org/presentationml/2006/main">
+  <p:cSld>
+    <p:spTree>
+      <p:nvGrpSpPr>
+        <p:cNvPr id="1" name=""/>
+        <p:cNvGrpSpPr/>
+        <p:nvPr/>
+      </p:nvGrpSpPr>
+      <p:grpSpPr>
+        <a:xfrm>
+          <a:off x="0" y="0"/>
+          <a:ext cx="0" cy="0"/>
+          <a:chOff x="0" y="0"/>
+          <a:chExt cx="0" cy="0"/>
+        </a:xfrm>
+      </p:grpSpPr>
+      <p:sp>
+        <p:nvSpPr>
+          <p:cNvPr id="2" name="Slide Image Placeholder 1"/>
+          <p:cNvSpPr>
+            <a:spLocks noGrp="1" noRot="1" noChangeAspect="1"/>
+          </p:cNvSpPr>
+          <p:nvPr>
+            <p:ph type="sldImg"/>
+          </p:nvPr>
+        </p:nvSpPr>
+        <p:spPr/>
+      </p:sp>
+      <p:sp>
+        <p:nvSpPr>
+          <p:cNvPr id="3" name="Notes Placeholder 2"/>
+          <p:cNvSpPr>
+            <a:spLocks noGrp="1"/>
+          </p:cNvSpPr>
+          <p:nvPr>
+            <p:ph type="body" idx="1"/>
+          </p:nvPr>
+        </p:nvSpPr>
+        <p:spPr/>
+        <p:txBody>
+          <a:bodyPr/>
+          <a:lstStyle/>
+          <a:p>
+            <a:r>
+              <a:rPr lang="en-US" dirty="0"/>
+              <a:t/>
+            </a:r>
+            <a:endParaRPr lang="en-US" dirty="0"/>
+          </a:p>
+        </p:txBody>
+      </p:sp>
+      <p:sp>
+        <p:nvSpPr>
+          <p:cNvPr id="4" name="Slide Number Placeholder 3"/>
+          <p:cNvSpPr>
+            <a:spLocks noGrp="1"/>
+          </p:cNvSpPr>
+          <p:nvPr>
+            <p:ph type="sldNum" sz="quarter" idx="10"/>
+          </p:nvPr>
+        </p:nvSpPr>
+        <p:spPr/>
+        <p:txBody>
+          <a:bodyPr/>
+          <a:lstStyle/>
+          <a:p>
+            <a:fld id="{F7021451-1387-4CA6-816F-3879F97B5CBC}" type="slidenum">
+              <a:rPr lang="en-US"/>
+              <a:t>21</a:t>
             </a:fld>
             <a:endParaRPr lang="en-US"/>
           </a:p>
@@ -3884,7 +3973,7 @@
                 <a:ea typeface="Calibri" pitchFamily="34" charset="-122"/>
                 <a:cs typeface="Calibri" pitchFamily="34" charset="-120"/>
               </a:rPr>
-              <a:t>איך משלבים ומודדים</a:t>
+              <a:t>מבט מקרוב</a:t>
             </a:r>
             <a:endParaRPr lang="en-US" sz="1200" dirty="0"/>
           </a:p>
@@ -3923,7 +4012,7 @@
                 <a:ea typeface="Cambria" pitchFamily="34" charset="-122"/>
                 <a:cs typeface="Cambria" pitchFamily="34" charset="-120"/>
               </a:rPr>
-              <a:t>שילוב היברידי והמדדים</a:t>
+              <a:t>שאילתה אחת, שלושה מודלים</a:t>
             </a:r>
             <a:endParaRPr lang="en-US" sz="3000" dirty="0"/>
           </a:p>
@@ -3976,12 +4065,418 @@
         </p:nvSpPr>
         <p:spPr>
           <a:xfrm>
-            <a:off x="578815" y="1737360"/>
-            <a:ext cx="5486400" cy="4206240"/>
+            <a:off x="578815" y="1554480"/>
+            <a:ext cx="11064240" cy="1051560"/>
           </a:xfrm>
           <a:prstGeom prst="roundRect">
             <a:avLst>
-              <a:gd name="adj" fmla="val 1739"/>
+              <a:gd name="adj" fmla="val 6957"/>
+            </a:avLst>
+          </a:prstGeom>
+          <a:solidFill>
+            <a:srgbClr val="0B3B45"/>
+          </a:solidFill>
+          <a:ln w="12700">
+            <a:solidFill>
+              <a:srgbClr val="DDE8E8"/>
+            </a:solidFill>
+            <a:prstDash val="solid"/>
+          </a:ln>
+          <a:effectLst>
+            <a:outerShdw sx="100000" sy="100000" kx="0" ky="0" algn="bl" rotWithShape="0" blurRad="76200" dist="25400" dir="5400000">
+              <a:srgbClr val="000000">
+                <a:alpha val="12000"/>
+              </a:srgbClr>
+            </a:outerShdw>
+          </a:effectLst>
+        </p:spPr>
+      </p:sp>
+      <p:sp>
+        <p:nvSpPr>
+          <p:cNvPr id="8" name="Text 6"/>
+          <p:cNvSpPr/>
+          <p:nvPr/>
+        </p:nvSpPr>
+        <p:spPr>
+          <a:xfrm>
+            <a:off x="761695" y="1664208"/>
+            <a:ext cx="10881360" cy="457200"/>
+          </a:xfrm>
+          <a:prstGeom prst="rect">
+            <a:avLst/>
+          </a:prstGeom>
+          <a:noFill/>
+          <a:ln/>
+        </p:spPr>
+        <p:txBody>
+          <a:bodyPr wrap="square" lIns="3175" tIns="3175" rIns="3175" bIns="3175" rtlCol="0" anchor="ctr"/>
+          <a:lstStyle/>
+          <a:p>
+            <a:pPr algn="r" indent="0" marL="0">
+              <a:buNone/>
+            </a:pPr>
+            <a:r>
+              <a:rPr lang="en-US" sz="1900" b="1" dirty="0">
+                <a:solidFill>
+                  <a:srgbClr val="5FBDB6"/>
+                </a:solidFill>
+                <a:latin typeface="Cambria" pitchFamily="34" charset="0"/>
+                <a:ea typeface="Cambria" pitchFamily="34" charset="-122"/>
+                <a:cs typeface="Cambria" pitchFamily="34" charset="-120"/>
+              </a:rPr>
+              <a:t>השאילתה:  </a:t>
+            </a:r>
+            <a:pPr algn="r" indent="0" marL="0">
+              <a:buNone/>
+            </a:pPr>
+            <a:r>
+              <a:rPr lang="en-US" sz="1900" b="1" dirty="0">
+                <a:solidFill>
+                  <a:srgbClr val="FFFFFF"/>
+                </a:solidFill>
+                <a:latin typeface="Cambria" pitchFamily="34" charset="0"/>
+                <a:ea typeface="Cambria" pitchFamily="34" charset="-122"/>
+                <a:cs typeface="Cambria" pitchFamily="34" charset="-120"/>
+              </a:rPr>
+              <a:t>”פיטרו אותי מהעבודה, מה מגיע לי?“</a:t>
+            </a:r>
+            <a:endParaRPr lang="en-US" sz="1900" dirty="0"/>
+          </a:p>
+        </p:txBody>
+      </p:sp>
+      <p:sp>
+        <p:nvSpPr>
+          <p:cNvPr id="9" name="Text 7"/>
+          <p:cNvSpPr/>
+          <p:nvPr/>
+        </p:nvSpPr>
+        <p:spPr>
+          <a:xfrm>
+            <a:off x="761695" y="2139696"/>
+            <a:ext cx="10881360" cy="365760"/>
+          </a:xfrm>
+          <a:prstGeom prst="rect">
+            <a:avLst/>
+          </a:prstGeom>
+          <a:noFill/>
+          <a:ln/>
+        </p:spPr>
+        <p:txBody>
+          <a:bodyPr wrap="square" lIns="3175" tIns="3175" rIns="3175" bIns="3175" rtlCol="0" anchor="ctr"/>
+          <a:lstStyle/>
+          <a:p>
+            <a:pPr rtl="1" algn="r" indent="0" marL="0">
+              <a:buNone/>
+            </a:pPr>
+            <a:r>
+              <a:rPr lang="en-US" sz="1300" i="1" dirty="0">
+                <a:solidFill>
+                  <a:srgbClr val="CFE6E4"/>
+                </a:solidFill>
+                <a:latin typeface="Calibri" pitchFamily="34" charset="0"/>
+                <a:ea typeface="Calibri" pitchFamily="34" charset="-122"/>
+                <a:cs typeface="Calibri" pitchFamily="34" charset="-120"/>
+              </a:rPr>
+              <a:t>מסמך הזהב: ”דמי אבטלה“ · ”זכאות לדמי אבטלה“</a:t>
+            </a:r>
+            <a:endParaRPr lang="en-US" sz="1300" dirty="0"/>
+          </a:p>
+        </p:txBody>
+      </p:sp>
+      <p:sp>
+        <p:nvSpPr>
+          <p:cNvPr id="10" name="Shape 8"/>
+          <p:cNvSpPr/>
+          <p:nvPr/>
+        </p:nvSpPr>
+        <p:spPr>
+          <a:xfrm>
+            <a:off x="578815" y="2788920"/>
+            <a:ext cx="5257800" cy="2377440"/>
+          </a:xfrm>
+          <a:prstGeom prst="roundRect">
+            <a:avLst>
+              <a:gd name="adj" fmla="val 3077"/>
+            </a:avLst>
+          </a:prstGeom>
+          <a:solidFill>
+            <a:srgbClr val="F4F9F9"/>
+          </a:solidFill>
+          <a:ln w="12700">
+            <a:solidFill>
+              <a:srgbClr val="DDE8E8"/>
+            </a:solidFill>
+            <a:prstDash val="solid"/>
+          </a:ln>
+          <a:effectLst>
+            <a:outerShdw sx="100000" sy="100000" kx="0" ky="0" algn="bl" rotWithShape="0" blurRad="76200" dist="25400" dir="5400000">
+              <a:srgbClr val="000000">
+                <a:alpha val="12000"/>
+              </a:srgbClr>
+            </a:outerShdw>
+          </a:effectLst>
+        </p:spPr>
+      </p:sp>
+      <p:sp>
+        <p:nvSpPr>
+          <p:cNvPr id="11" name="Shape 9"/>
+          <p:cNvSpPr/>
+          <p:nvPr/>
+        </p:nvSpPr>
+        <p:spPr>
+          <a:xfrm>
+            <a:off x="697687" y="3035808"/>
+            <a:ext cx="566928" cy="566928"/>
+          </a:xfrm>
+          <a:prstGeom prst="ellipse">
+            <a:avLst/>
+          </a:prstGeom>
+          <a:solidFill>
+            <a:srgbClr val="0E8A8F"/>
+          </a:solidFill>
+          <a:ln/>
+          <a:effectLst>
+            <a:outerShdw sx="100000" sy="100000" kx="0" ky="0" algn="bl" rotWithShape="0" blurRad="76200" dist="25400" dir="5400000">
+              <a:srgbClr val="000000">
+                <a:alpha val="12000"/>
+              </a:srgbClr>
+            </a:outerShdw>
+          </a:effectLst>
+        </p:spPr>
+      </p:sp>
+      <p:pic>
+        <p:nvPicPr>
+          <p:cNvPr id="12" name="Image 0" descr="preencoded.png">    </p:cNvPr>
+          <p:cNvPicPr>
+            <a:picLocks noChangeAspect="1"/>
+          </p:cNvPicPr>
+          <p:nvPr/>
+        </p:nvPicPr>
+        <p:blipFill>
+          <a:blip r:embed="rId1"/>
+          <a:stretch>
+            <a:fillRect/>
+          </a:stretch>
+        </p:blipFill>
+        <p:spPr>
+          <a:xfrm>
+            <a:off x="850758" y="3188879"/>
+            <a:ext cx="260787" cy="260787"/>
+          </a:xfrm>
+          <a:prstGeom prst="rect">
+            <a:avLst/>
+          </a:prstGeom>
+        </p:spPr>
+      </p:pic>
+      <p:sp>
+        <p:nvSpPr>
+          <p:cNvPr id="13" name="Text 10"/>
+          <p:cNvSpPr/>
+          <p:nvPr/>
+        </p:nvSpPr>
+        <p:spPr>
+          <a:xfrm>
+            <a:off x="1493215" y="3090672"/>
+            <a:ext cx="4023360" cy="365760"/>
+          </a:xfrm>
+          <a:prstGeom prst="rect">
+            <a:avLst/>
+          </a:prstGeom>
+          <a:noFill/>
+          <a:ln/>
+        </p:spPr>
+        <p:txBody>
+          <a:bodyPr wrap="square" lIns="0" tIns="0" rIns="0" bIns="0" rtlCol="0" anchor="ctr"/>
+          <a:lstStyle/>
+          <a:p>
+            <a:pPr algn="r" indent="0" marL="0">
+              <a:buNone/>
+            </a:pPr>
+            <a:r>
+              <a:rPr lang="en-US" sz="1600" b="1" dirty="0">
+                <a:solidFill>
+                  <a:srgbClr val="153139"/>
+                </a:solidFill>
+                <a:latin typeface="Cambria" pitchFamily="34" charset="0"/>
+                <a:ea typeface="Cambria" pitchFamily="34" charset="-122"/>
+                <a:cs typeface="Cambria" pitchFamily="34" charset="-120"/>
+              </a:rPr>
+              <a:t>TF-IDF · לקסיקלי</a:t>
+            </a:r>
+            <a:endParaRPr lang="en-US" sz="1600" dirty="0"/>
+          </a:p>
+        </p:txBody>
+      </p:sp>
+      <p:sp>
+        <p:nvSpPr>
+          <p:cNvPr id="14" name="Text 11"/>
+          <p:cNvSpPr/>
+          <p:nvPr/>
+        </p:nvSpPr>
+        <p:spPr>
+          <a:xfrm>
+            <a:off x="715975" y="3657600"/>
+            <a:ext cx="4937760" cy="365760"/>
+          </a:xfrm>
+          <a:prstGeom prst="rect">
+            <a:avLst/>
+          </a:prstGeom>
+          <a:noFill/>
+          <a:ln/>
+        </p:spPr>
+        <p:txBody>
+          <a:bodyPr wrap="square" lIns="0" tIns="0" rIns="0" bIns="0" rtlCol="0" anchor="ctr"/>
+          <a:lstStyle/>
+          <a:p>
+            <a:pPr rtl="1" algn="r" indent="0" marL="0">
+              <a:buNone/>
+            </a:pPr>
+            <a:r>
+              <a:rPr lang="en-US" sz="1250" dirty="0">
+                <a:solidFill>
+                  <a:srgbClr val="5C6B72"/>
+                </a:solidFill>
+                <a:latin typeface="Calibri" pitchFamily="34" charset="0"/>
+                <a:ea typeface="Calibri" pitchFamily="34" charset="-122"/>
+                <a:cs typeface="Calibri" pitchFamily="34" charset="-120"/>
+              </a:rPr>
+              <a:t>1.  זכאות לגמלת הבטחת הכנסה ובעלות על רכב</a:t>
+            </a:r>
+            <a:endParaRPr lang="en-US" sz="1250" dirty="0"/>
+          </a:p>
+        </p:txBody>
+      </p:sp>
+      <p:sp>
+        <p:nvSpPr>
+          <p:cNvPr id="15" name="Text 12"/>
+          <p:cNvSpPr/>
+          <p:nvPr/>
+        </p:nvSpPr>
+        <p:spPr>
+          <a:xfrm>
+            <a:off x="715975" y="4041648"/>
+            <a:ext cx="4937760" cy="365760"/>
+          </a:xfrm>
+          <a:prstGeom prst="rect">
+            <a:avLst/>
+          </a:prstGeom>
+          <a:noFill/>
+          <a:ln/>
+        </p:spPr>
+        <p:txBody>
+          <a:bodyPr wrap="square" lIns="0" tIns="0" rIns="0" bIns="0" rtlCol="0" anchor="ctr"/>
+          <a:lstStyle/>
+          <a:p>
+            <a:pPr rtl="1" algn="r" indent="0" marL="0">
+              <a:buNone/>
+            </a:pPr>
+            <a:r>
+              <a:rPr lang="en-US" sz="1250" dirty="0">
+                <a:solidFill>
+                  <a:srgbClr val="5C6B72"/>
+                </a:solidFill>
+                <a:latin typeface="Calibri" pitchFamily="34" charset="0"/>
+                <a:ea typeface="Calibri" pitchFamily="34" charset="-122"/>
+                <a:cs typeface="Calibri" pitchFamily="34" charset="-120"/>
+              </a:rPr>
+              <a:t>2.  ניכוי הכנסות מדמי אבטלה</a:t>
+            </a:r>
+            <a:endParaRPr lang="en-US" sz="1250" dirty="0"/>
+          </a:p>
+        </p:txBody>
+      </p:sp>
+      <p:sp>
+        <p:nvSpPr>
+          <p:cNvPr id="16" name="Text 13"/>
+          <p:cNvSpPr/>
+          <p:nvPr/>
+        </p:nvSpPr>
+        <p:spPr>
+          <a:xfrm>
+            <a:off x="715975" y="4425696"/>
+            <a:ext cx="4937760" cy="365760"/>
+          </a:xfrm>
+          <a:prstGeom prst="rect">
+            <a:avLst/>
+          </a:prstGeom>
+          <a:noFill/>
+          <a:ln/>
+        </p:spPr>
+        <p:txBody>
+          <a:bodyPr wrap="square" lIns="0" tIns="0" rIns="0" bIns="0" rtlCol="0" anchor="ctr"/>
+          <a:lstStyle/>
+          <a:p>
+            <a:pPr rtl="1" algn="r" indent="0" marL="0">
+              <a:buNone/>
+            </a:pPr>
+            <a:r>
+              <a:rPr lang="en-US" sz="1250" dirty="0">
+                <a:solidFill>
+                  <a:srgbClr val="5C6B72"/>
+                </a:solidFill>
+                <a:latin typeface="Calibri" pitchFamily="34" charset="0"/>
+                <a:ea typeface="Calibri" pitchFamily="34" charset="-122"/>
+                <a:cs typeface="Calibri" pitchFamily="34" charset="-120"/>
+              </a:rPr>
+              <a:t>3.  איסור ניכוי שכר מנער הנעדר מעבודתו…</a:t>
+            </a:r>
+            <a:endParaRPr lang="en-US" sz="1250" dirty="0"/>
+          </a:p>
+        </p:txBody>
+      </p:sp>
+      <p:sp>
+        <p:nvSpPr>
+          <p:cNvPr id="17" name="Text 14"/>
+          <p:cNvSpPr/>
+          <p:nvPr/>
+        </p:nvSpPr>
+        <p:spPr>
+          <a:xfrm>
+            <a:off x="715975" y="4828032"/>
+            <a:ext cx="4937760" cy="320040"/>
+          </a:xfrm>
+          <a:prstGeom prst="rect">
+            <a:avLst/>
+          </a:prstGeom>
+          <a:noFill/>
+          <a:ln/>
+        </p:spPr>
+        <p:txBody>
+          <a:bodyPr wrap="square" lIns="0" tIns="0" rIns="0" bIns="0" rtlCol="0" anchor="ctr"/>
+          <a:lstStyle/>
+          <a:p>
+            <a:pPr rtl="1" algn="r" indent="0" marL="0">
+              <a:buNone/>
+            </a:pPr>
+            <a:r>
+              <a:rPr lang="en-US" sz="1200" b="1" dirty="0">
+                <a:solidFill>
+                  <a:srgbClr val="C2603A"/>
+                </a:solidFill>
+                <a:latin typeface="Calibri" pitchFamily="34" charset="0"/>
+                <a:ea typeface="Calibri" pitchFamily="34" charset="-122"/>
+                <a:cs typeface="Calibri" pitchFamily="34" charset="-120"/>
+              </a:rPr>
+              <a:t>✗  מסמך הזהב לא הופיע ב-top-10</a:t>
+            </a:r>
+            <a:endParaRPr lang="en-US" sz="1200" dirty="0"/>
+          </a:p>
+        </p:txBody>
+      </p:sp>
+      <p:sp>
+        <p:nvSpPr>
+          <p:cNvPr id="18" name="Shape 15"/>
+          <p:cNvSpPr/>
+          <p:nvPr/>
+        </p:nvSpPr>
+        <p:spPr>
+          <a:xfrm>
+            <a:off x="6385255" y="2788920"/>
+            <a:ext cx="5257800" cy="2377440"/>
+          </a:xfrm>
+          <a:prstGeom prst="roundRect">
+            <a:avLst>
+              <a:gd name="adj" fmla="val 3077"/>
             </a:avLst>
           </a:prstGeom>
           <a:solidFill>
@@ -4004,14 +4499,14 @@
       </p:sp>
       <p:sp>
         <p:nvSpPr>
-          <p:cNvPr id="8" name="Shape 6"/>
-          <p:cNvSpPr/>
-          <p:nvPr/>
-        </p:nvSpPr>
-        <p:spPr>
-          <a:xfrm>
-            <a:off x="624535" y="2057400"/>
-            <a:ext cx="640080" cy="640080"/>
+          <p:cNvPr id="19" name="Shape 16"/>
+          <p:cNvSpPr/>
+          <p:nvPr/>
+        </p:nvSpPr>
+        <p:spPr>
+          <a:xfrm>
+            <a:off x="6504127" y="3035808"/>
+            <a:ext cx="566928" cy="566928"/>
           </a:xfrm>
           <a:prstGeom prst="ellipse">
             <a:avLst/>
@@ -4031,22 +4526,22 @@
       </p:sp>
       <p:pic>
         <p:nvPicPr>
-          <p:cNvPr id="9" name="Image 0" descr="preencoded.png">    </p:cNvPr>
+          <p:cNvPr id="20" name="Image 1" descr="preencoded.png">    </p:cNvPr>
           <p:cNvPicPr>
             <a:picLocks noChangeAspect="1"/>
           </p:cNvPicPr>
           <p:nvPr/>
         </p:nvPicPr>
         <p:blipFill>
-          <a:blip r:embed="rId1"/>
+          <a:blip r:embed="rId2"/>
           <a:stretch>
             <a:fillRect/>
           </a:stretch>
         </p:blipFill>
         <p:spPr>
           <a:xfrm>
-            <a:off x="797357" y="2230222"/>
-            <a:ext cx="294437" cy="294437"/>
+            <a:off x="6657198" y="3188879"/>
+            <a:ext cx="260787" cy="260787"/>
           </a:xfrm>
           <a:prstGeom prst="rect">
             <a:avLst/>
@@ -4055,14 +4550,14 @@
       </p:pic>
       <p:sp>
         <p:nvSpPr>
-          <p:cNvPr id="10" name="Text 7"/>
-          <p:cNvSpPr/>
-          <p:nvPr/>
-        </p:nvSpPr>
-        <p:spPr>
-          <a:xfrm>
-            <a:off x="1538935" y="2130552"/>
-            <a:ext cx="4206240" cy="457200"/>
+          <p:cNvPr id="21" name="Text 17"/>
+          <p:cNvSpPr/>
+          <p:nvPr/>
+        </p:nvSpPr>
+        <p:spPr>
+          <a:xfrm>
+            <a:off x="7299655" y="3090672"/>
+            <a:ext cx="4023360" cy="365760"/>
           </a:xfrm>
           <a:prstGeom prst="rect">
             <a:avLst/>
@@ -4078,7 +4573,7 @@
               <a:buNone/>
             </a:pPr>
             <a:r>
-              <a:rPr lang="en-US" sz="1800" b="1" dirty="0">
+              <a:rPr lang="en-US" sz="1600" b="1" dirty="0">
                 <a:solidFill>
                   <a:srgbClr val="153139"/>
                 </a:solidFill>
@@ -4086,181 +4581,186 @@
                 <a:ea typeface="Cambria" pitchFamily="34" charset="-122"/>
                 <a:cs typeface="Cambria" pitchFamily="34" charset="-120"/>
               </a:rPr>
-              <a:t>Reciprocal Rank Fusion</a:t>
-            </a:r>
-            <a:endParaRPr lang="en-US" sz="1800" dirty="0"/>
-          </a:p>
-        </p:txBody>
-      </p:sp>
-      <p:sp>
-        <p:nvSpPr>
-          <p:cNvPr id="11" name="Shape 8"/>
-          <p:cNvSpPr/>
-          <p:nvPr/>
-        </p:nvSpPr>
-        <p:spPr>
-          <a:xfrm>
-            <a:off x="898855" y="2834640"/>
-            <a:ext cx="4846320" cy="868680"/>
-          </a:xfrm>
-          <a:prstGeom prst="roundRect">
-            <a:avLst>
-              <a:gd name="adj" fmla="val 6316"/>
-            </a:avLst>
-          </a:prstGeom>
-          <a:solidFill>
-            <a:srgbClr val="FFFFFF"/>
-          </a:solidFill>
-          <a:ln w="12700">
-            <a:solidFill>
-              <a:srgbClr val="D7E6E6"/>
-            </a:solidFill>
-            <a:prstDash val="solid"/>
-          </a:ln>
-        </p:spPr>
-      </p:sp>
-      <p:sp>
-        <p:nvSpPr>
-          <p:cNvPr id="12" name="Text 9"/>
-          <p:cNvSpPr/>
-          <p:nvPr/>
-        </p:nvSpPr>
-        <p:spPr>
-          <a:xfrm>
-            <a:off x="898855" y="2834640"/>
-            <a:ext cx="4846320" cy="868680"/>
-          </a:xfrm>
-          <a:prstGeom prst="rect">
-            <a:avLst/>
-          </a:prstGeom>
-          <a:noFill/>
-          <a:ln/>
-        </p:spPr>
-        <p:txBody>
-          <a:bodyPr wrap="square" lIns="0" tIns="0" rIns="0" bIns="0" rtlCol="0" anchor="ctr"/>
-          <a:lstStyle/>
-          <a:p>
-            <a:pPr algn="ctr" indent="0" marL="0">
-              <a:buNone/>
-            </a:pPr>
-            <a:r>
-              <a:rPr lang="en-US" sz="2000" b="1" i="1" dirty="0">
+              <a:t>AlephBERT · סמנטי</a:t>
+            </a:r>
+            <a:endParaRPr lang="en-US" sz="1600" dirty="0"/>
+          </a:p>
+        </p:txBody>
+      </p:sp>
+      <p:sp>
+        <p:nvSpPr>
+          <p:cNvPr id="22" name="Text 18"/>
+          <p:cNvSpPr/>
+          <p:nvPr/>
+        </p:nvSpPr>
+        <p:spPr>
+          <a:xfrm>
+            <a:off x="6522415" y="3657600"/>
+            <a:ext cx="4937760" cy="365760"/>
+          </a:xfrm>
+          <a:prstGeom prst="rect">
+            <a:avLst/>
+          </a:prstGeom>
+          <a:noFill/>
+          <a:ln/>
+        </p:spPr>
+        <p:txBody>
+          <a:bodyPr wrap="square" lIns="0" tIns="0" rIns="0" bIns="0" rtlCol="0" anchor="ctr"/>
+          <a:lstStyle/>
+          <a:p>
+            <a:pPr rtl="1" algn="r" indent="0" marL="0">
+              <a:buNone/>
+            </a:pPr>
+            <a:r>
+              <a:rPr lang="en-US" sz="1250" b="1" dirty="0">
                 <a:solidFill>
                   <a:srgbClr val="0E8A8F"/>
-                </a:solidFill>
-                <a:latin typeface="Cambria" pitchFamily="34" charset="0"/>
-                <a:ea typeface="Cambria" pitchFamily="34" charset="-122"/>
-                <a:cs typeface="Cambria" pitchFamily="34" charset="-120"/>
-              </a:rPr>
-              <a:t>score(d) = Σ  1 / (k + rank_i(d))</a:t>
-            </a:r>
-            <a:endParaRPr lang="en-US" sz="2000" dirty="0"/>
-          </a:p>
-        </p:txBody>
-      </p:sp>
-      <p:sp>
-        <p:nvSpPr>
-          <p:cNvPr id="13" name="Text 10"/>
-          <p:cNvSpPr/>
-          <p:nvPr/>
-        </p:nvSpPr>
-        <p:spPr>
-          <a:xfrm>
-            <a:off x="853135" y="3886200"/>
-            <a:ext cx="4846320" cy="1920240"/>
-          </a:xfrm>
-          <a:prstGeom prst="rect">
-            <a:avLst/>
-          </a:prstGeom>
-          <a:noFill/>
-          <a:ln/>
-        </p:spPr>
-        <p:txBody>
-          <a:bodyPr wrap="square" lIns="0" tIns="0" rIns="0" bIns="0" rtlCol="0" anchor="ctr"/>
-          <a:lstStyle/>
-          <a:p>
-            <a:pPr algn="r" marL="342900" indent="-342900">
-              <a:lnSpc>
-                <a:spcPct val="125000"/>
-              </a:lnSpc>
-              <a:buSzPct val="100000"/>
-              <a:buChar char="•"/>
-            </a:pPr>
-            <a:r>
-              <a:rPr lang="en-US" sz="1400" dirty="0">
-                <a:solidFill>
-                  <a:srgbClr val="153139"/>
                 </a:solidFill>
                 <a:latin typeface="Calibri" pitchFamily="34" charset="0"/>
                 <a:ea typeface="Calibri" pitchFamily="34" charset="-122"/>
                 <a:cs typeface="Calibri" pitchFamily="34" charset="-120"/>
               </a:rPr>
-              <a:t>מבוסס-דירוג — לא נדרש כיול ציונים</a:t>
-            </a:r>
-            <a:endParaRPr lang="en-US" sz="1400" dirty="0"/>
-          </a:p>
-          <a:p>
-            <a:pPr algn="r" marL="342900" indent="-342900">
-              <a:lnSpc>
-                <a:spcPct val="125000"/>
-              </a:lnSpc>
-              <a:buSzPct val="100000"/>
-              <a:buChar char="•"/>
-            </a:pPr>
-            <a:r>
-              <a:rPr lang="en-US" sz="1400" dirty="0">
-                <a:solidFill>
-                  <a:srgbClr val="153139"/>
+              <a:t>1.  דמי אבטלה</a:t>
+            </a:r>
+            <a:endParaRPr lang="en-US" sz="1250" dirty="0"/>
+          </a:p>
+        </p:txBody>
+      </p:sp>
+      <p:sp>
+        <p:nvSpPr>
+          <p:cNvPr id="23" name="Text 19"/>
+          <p:cNvSpPr/>
+          <p:nvPr/>
+        </p:nvSpPr>
+        <p:spPr>
+          <a:xfrm>
+            <a:off x="6522415" y="4041648"/>
+            <a:ext cx="4937760" cy="365760"/>
+          </a:xfrm>
+          <a:prstGeom prst="rect">
+            <a:avLst/>
+          </a:prstGeom>
+          <a:noFill/>
+          <a:ln/>
+        </p:spPr>
+        <p:txBody>
+          <a:bodyPr wrap="square" lIns="0" tIns="0" rIns="0" bIns="0" rtlCol="0" anchor="ctr"/>
+          <a:lstStyle/>
+          <a:p>
+            <a:pPr rtl="1" algn="r" indent="0" marL="0">
+              <a:buNone/>
+            </a:pPr>
+            <a:r>
+              <a:rPr lang="en-US" sz="1250" dirty="0">
+                <a:solidFill>
+                  <a:srgbClr val="5C6B72"/>
                 </a:solidFill>
                 <a:latin typeface="Calibri" pitchFamily="34" charset="0"/>
                 <a:ea typeface="Calibri" pitchFamily="34" charset="-122"/>
                 <a:cs typeface="Calibri" pitchFamily="34" charset="-120"/>
               </a:rPr>
-              <a:t>מסמך שדורג גבוה ע"י אחד המודלים עולה</a:t>
-            </a:r>
-            <a:endParaRPr lang="en-US" sz="1400" dirty="0"/>
-          </a:p>
-          <a:p>
-            <a:pPr algn="r" marL="342900" indent="-342900">
-              <a:lnSpc>
-                <a:spcPct val="125000"/>
-              </a:lnSpc>
-              <a:buSzPct val="100000"/>
-              <a:buChar char="•"/>
-            </a:pPr>
-            <a:r>
-              <a:rPr lang="en-US" sz="1400" dirty="0">
-                <a:solidFill>
-                  <a:srgbClr val="153139"/>
+              <a:t>2.  דמי אבטלה בתקופת מלחמת חרבות ברזל</a:t>
+            </a:r>
+            <a:endParaRPr lang="en-US" sz="1250" dirty="0"/>
+          </a:p>
+        </p:txBody>
+      </p:sp>
+      <p:sp>
+        <p:nvSpPr>
+          <p:cNvPr id="24" name="Text 20"/>
+          <p:cNvSpPr/>
+          <p:nvPr/>
+        </p:nvSpPr>
+        <p:spPr>
+          <a:xfrm>
+            <a:off x="6522415" y="4425696"/>
+            <a:ext cx="4937760" cy="365760"/>
+          </a:xfrm>
+          <a:prstGeom prst="rect">
+            <a:avLst/>
+          </a:prstGeom>
+          <a:noFill/>
+          <a:ln/>
+        </p:spPr>
+        <p:txBody>
+          <a:bodyPr wrap="square" lIns="0" tIns="0" rIns="0" bIns="0" rtlCol="0" anchor="ctr"/>
+          <a:lstStyle/>
+          <a:p>
+            <a:pPr rtl="1" algn="r" indent="0" marL="0">
+              <a:buNone/>
+            </a:pPr>
+            <a:r>
+              <a:rPr lang="en-US" sz="1250" dirty="0">
+                <a:solidFill>
+                  <a:srgbClr val="5C6B72"/>
                 </a:solidFill>
                 <a:latin typeface="Calibri" pitchFamily="34" charset="0"/>
                 <a:ea typeface="Calibri" pitchFamily="34" charset="-122"/>
                 <a:cs typeface="Calibri" pitchFamily="34" charset="-120"/>
               </a:rPr>
-              <a:t>נבדק גם שילוב ציונים משוקלל (min-max)</a:t>
-            </a:r>
-            <a:endParaRPr lang="en-US" sz="1400" dirty="0"/>
-          </a:p>
-        </p:txBody>
-      </p:sp>
-      <p:sp>
-        <p:nvSpPr>
-          <p:cNvPr id="14" name="Shape 11"/>
-          <p:cNvSpPr/>
-          <p:nvPr/>
-        </p:nvSpPr>
-        <p:spPr>
-          <a:xfrm>
-            <a:off x="6293815" y="1737360"/>
-            <a:ext cx="5349240" cy="4206240"/>
+              <a:t>3.  התפטרות בנסיבות המזכות בדמי אבטלה</a:t>
+            </a:r>
+            <a:endParaRPr lang="en-US" sz="1250" dirty="0"/>
+          </a:p>
+        </p:txBody>
+      </p:sp>
+      <p:sp>
+        <p:nvSpPr>
+          <p:cNvPr id="25" name="Text 21"/>
+          <p:cNvSpPr/>
+          <p:nvPr/>
+        </p:nvSpPr>
+        <p:spPr>
+          <a:xfrm>
+            <a:off x="6522415" y="4828032"/>
+            <a:ext cx="4937760" cy="320040"/>
+          </a:xfrm>
+          <a:prstGeom prst="rect">
+            <a:avLst/>
+          </a:prstGeom>
+          <a:noFill/>
+          <a:ln/>
+        </p:spPr>
+        <p:txBody>
+          <a:bodyPr wrap="square" lIns="0" tIns="0" rIns="0" bIns="0" rtlCol="0" anchor="ctr"/>
+          <a:lstStyle/>
+          <a:p>
+            <a:pPr rtl="1" algn="r" indent="0" marL="0">
+              <a:buNone/>
+            </a:pPr>
+            <a:r>
+              <a:rPr lang="en-US" sz="1200" b="1" dirty="0">
+                <a:solidFill>
+                  <a:srgbClr val="0E8A8F"/>
+                </a:solidFill>
+                <a:latin typeface="Calibri" pitchFamily="34" charset="0"/>
+                <a:ea typeface="Calibri" pitchFamily="34" charset="-122"/>
+                <a:cs typeface="Calibri" pitchFamily="34" charset="-120"/>
+              </a:rPr>
+              <a:t>✓  מסמך הזהב במקום 1</a:t>
+            </a:r>
+            <a:endParaRPr lang="en-US" sz="1200" dirty="0"/>
+          </a:p>
+        </p:txBody>
+      </p:sp>
+      <p:sp>
+        <p:nvSpPr>
+          <p:cNvPr id="26" name="Shape 22"/>
+          <p:cNvSpPr/>
+          <p:nvPr/>
+        </p:nvSpPr>
+        <p:spPr>
+          <a:xfrm>
+            <a:off x="578815" y="5349240"/>
+            <a:ext cx="11064240" cy="914400"/>
           </a:xfrm>
           <a:prstGeom prst="roundRect">
             <a:avLst>
-              <a:gd name="adj" fmla="val 1739"/>
+              <a:gd name="adj" fmla="val 8000"/>
             </a:avLst>
           </a:prstGeom>
           <a:solidFill>
-            <a:srgbClr val="F4F9F9"/>
+            <a:srgbClr val="0B3B45"/>
           </a:solidFill>
           <a:ln w="12700">
             <a:solidFill>
@@ -4279,442 +4779,93 @@
       </p:sp>
       <p:sp>
         <p:nvSpPr>
-          <p:cNvPr id="15" name="Shape 12"/>
-          <p:cNvSpPr/>
-          <p:nvPr/>
-        </p:nvSpPr>
-        <p:spPr>
-          <a:xfrm>
-            <a:off x="6293815" y="2057400"/>
-            <a:ext cx="640080" cy="640080"/>
-          </a:xfrm>
-          <a:prstGeom prst="ellipse">
-            <a:avLst/>
-          </a:prstGeom>
-          <a:solidFill>
-            <a:srgbClr val="E0852F"/>
-          </a:solidFill>
-          <a:ln/>
-          <a:effectLst>
-            <a:outerShdw sx="100000" sy="100000" kx="0" ky="0" algn="bl" rotWithShape="0" blurRad="76200" dist="25400" dir="5400000">
-              <a:srgbClr val="000000">
-                <a:alpha val="12000"/>
-              </a:srgbClr>
-            </a:outerShdw>
-          </a:effectLst>
-        </p:spPr>
-      </p:sp>
-      <p:pic>
-        <p:nvPicPr>
-          <p:cNvPr id="16" name="Image 1" descr="preencoded.png">    </p:cNvPr>
-          <p:cNvPicPr>
-            <a:picLocks noChangeAspect="1"/>
-          </p:cNvPicPr>
-          <p:nvPr/>
-        </p:nvPicPr>
-        <p:blipFill>
-          <a:blip r:embed="rId2"/>
-          <a:stretch>
-            <a:fillRect/>
-          </a:stretch>
-        </p:blipFill>
-        <p:spPr>
-          <a:xfrm>
-            <a:off x="6466637" y="2230222"/>
-            <a:ext cx="294437" cy="294437"/>
-          </a:xfrm>
-          <a:prstGeom prst="rect">
-            <a:avLst/>
-          </a:prstGeom>
-        </p:spPr>
-      </p:pic>
-      <p:sp>
-        <p:nvSpPr>
-          <p:cNvPr id="17" name="Text 13"/>
-          <p:cNvSpPr/>
-          <p:nvPr/>
-        </p:nvSpPr>
-        <p:spPr>
-          <a:xfrm>
-            <a:off x="7208215" y="2130552"/>
-            <a:ext cx="4114800" cy="457200"/>
-          </a:xfrm>
-          <a:prstGeom prst="rect">
-            <a:avLst/>
-          </a:prstGeom>
-          <a:noFill/>
-          <a:ln/>
-        </p:spPr>
-        <p:txBody>
-          <a:bodyPr wrap="square" lIns="0" tIns="0" rIns="0" bIns="0" rtlCol="0" anchor="ctr"/>
-          <a:lstStyle/>
-          <a:p>
-            <a:pPr rtl="1" algn="r" indent="0" marL="0">
-              <a:buNone/>
-            </a:pPr>
-            <a:r>
-              <a:rPr lang="en-US" sz="1800" b="1" dirty="0">
-                <a:solidFill>
-                  <a:srgbClr val="153139"/>
-                </a:solidFill>
-                <a:latin typeface="Cambria" pitchFamily="34" charset="0"/>
-                <a:ea typeface="Cambria" pitchFamily="34" charset="-122"/>
-                <a:cs typeface="Cambria" pitchFamily="34" charset="-120"/>
-              </a:rPr>
-              <a:t>מדדי הערכה</a:t>
-            </a:r>
-            <a:endParaRPr lang="en-US" sz="1800" dirty="0"/>
-          </a:p>
-        </p:txBody>
-      </p:sp>
-      <p:sp>
-        <p:nvSpPr>
-          <p:cNvPr id="18" name="Text 14"/>
-          <p:cNvSpPr/>
-          <p:nvPr/>
-        </p:nvSpPr>
-        <p:spPr>
-          <a:xfrm>
-            <a:off x="6430975" y="2880360"/>
-            <a:ext cx="1691640" cy="457200"/>
-          </a:xfrm>
-          <a:prstGeom prst="rect">
-            <a:avLst/>
-          </a:prstGeom>
-          <a:noFill/>
-          <a:ln/>
-        </p:spPr>
-        <p:txBody>
-          <a:bodyPr wrap="square" lIns="0" tIns="0" rIns="0" bIns="0" rtlCol="0" anchor="ctr"/>
-          <a:lstStyle/>
-          <a:p>
-            <a:pPr algn="l" indent="0" marL="0">
-              <a:buNone/>
-            </a:pPr>
-            <a:r>
-              <a:rPr lang="en-US" sz="1500" b="1" dirty="0">
-                <a:solidFill>
-                  <a:srgbClr val="0E8A8F"/>
-                </a:solidFill>
-                <a:latin typeface="Cambria" pitchFamily="34" charset="0"/>
-                <a:ea typeface="Cambria" pitchFamily="34" charset="-122"/>
-                <a:cs typeface="Cambria" pitchFamily="34" charset="-120"/>
-              </a:rPr>
-              <a:t>Recall@k</a:t>
-            </a:r>
-            <a:endParaRPr lang="en-US" sz="1500" dirty="0"/>
-          </a:p>
-        </p:txBody>
-      </p:sp>
-      <p:sp>
-        <p:nvSpPr>
-          <p:cNvPr id="19" name="Text 15"/>
-          <p:cNvSpPr/>
-          <p:nvPr/>
-        </p:nvSpPr>
-        <p:spPr>
-          <a:xfrm>
-            <a:off x="8214055" y="2880360"/>
-            <a:ext cx="3200400" cy="457200"/>
-          </a:xfrm>
-          <a:prstGeom prst="rect">
-            <a:avLst/>
-          </a:prstGeom>
-          <a:noFill/>
-          <a:ln/>
-        </p:spPr>
-        <p:txBody>
-          <a:bodyPr wrap="square" lIns="0" tIns="0" rIns="0" bIns="0" rtlCol="0" anchor="ctr"/>
-          <a:lstStyle/>
-          <a:p>
-            <a:pPr rtl="1" algn="r" indent="0" marL="0">
-              <a:buNone/>
-            </a:pPr>
-            <a:r>
-              <a:rPr lang="en-US" sz="1250" dirty="0">
-                <a:solidFill>
-                  <a:srgbClr val="5C6B72"/>
+          <p:cNvPr id="27" name="Text 23"/>
+          <p:cNvSpPr/>
+          <p:nvPr/>
+        </p:nvSpPr>
+        <p:spPr>
+          <a:xfrm>
+            <a:off x="761695" y="5440680"/>
+            <a:ext cx="10881360" cy="411480"/>
+          </a:xfrm>
+          <a:prstGeom prst="rect">
+            <a:avLst/>
+          </a:prstGeom>
+          <a:noFill/>
+          <a:ln/>
+        </p:spPr>
+        <p:txBody>
+          <a:bodyPr wrap="square" lIns="3175" tIns="3175" rIns="3175" bIns="3175" rtlCol="0" anchor="ctr"/>
+          <a:lstStyle/>
+          <a:p>
+            <a:pPr algn="r" indent="0" marL="0">
+              <a:buNone/>
+            </a:pPr>
+            <a:r>
+              <a:rPr lang="en-US" sz="1400" b="1" dirty="0">
+                <a:solidFill>
+                  <a:srgbClr val="FFFFFF"/>
                 </a:solidFill>
                 <a:latin typeface="Calibri" pitchFamily="34" charset="0"/>
                 <a:ea typeface="Calibri" pitchFamily="34" charset="-122"/>
                 <a:cs typeface="Calibri" pitchFamily="34" charset="-120"/>
               </a:rPr>
-              <a:t>האם מסמך רלוונטי נמצא ב-top-k?</a:t>
-            </a:r>
-            <a:endParaRPr lang="en-US" sz="1250" dirty="0"/>
-          </a:p>
-        </p:txBody>
-      </p:sp>
-      <p:sp>
-        <p:nvSpPr>
-          <p:cNvPr id="20" name="Text 16"/>
-          <p:cNvSpPr/>
-          <p:nvPr/>
-        </p:nvSpPr>
-        <p:spPr>
-          <a:xfrm>
-            <a:off x="6430975" y="3593592"/>
-            <a:ext cx="1691640" cy="457200"/>
-          </a:xfrm>
-          <a:prstGeom prst="rect">
-            <a:avLst/>
-          </a:prstGeom>
-          <a:noFill/>
-          <a:ln/>
-        </p:spPr>
-        <p:txBody>
-          <a:bodyPr wrap="square" lIns="0" tIns="0" rIns="0" bIns="0" rtlCol="0" anchor="ctr"/>
-          <a:lstStyle/>
-          <a:p>
-            <a:pPr algn="l" indent="0" marL="0">
-              <a:buNone/>
-            </a:pPr>
-            <a:r>
-              <a:rPr lang="en-US" sz="1500" b="1" dirty="0">
-                <a:solidFill>
-                  <a:srgbClr val="0E8A8F"/>
-                </a:solidFill>
-                <a:latin typeface="Cambria" pitchFamily="34" charset="0"/>
-                <a:ea typeface="Cambria" pitchFamily="34" charset="-122"/>
-                <a:cs typeface="Cambria" pitchFamily="34" charset="-120"/>
-              </a:rPr>
-              <a:t>MRR</a:t>
-            </a:r>
-            <a:endParaRPr lang="en-US" sz="1500" dirty="0"/>
-          </a:p>
-        </p:txBody>
-      </p:sp>
-      <p:sp>
-        <p:nvSpPr>
-          <p:cNvPr id="21" name="Text 17"/>
-          <p:cNvSpPr/>
-          <p:nvPr/>
-        </p:nvSpPr>
-        <p:spPr>
-          <a:xfrm>
-            <a:off x="8214055" y="3593592"/>
-            <a:ext cx="3200400" cy="457200"/>
-          </a:xfrm>
-          <a:prstGeom prst="rect">
-            <a:avLst/>
-          </a:prstGeom>
-          <a:noFill/>
-          <a:ln/>
-        </p:spPr>
-        <p:txBody>
-          <a:bodyPr wrap="square" lIns="0" tIns="0" rIns="0" bIns="0" rtlCol="0" anchor="ctr"/>
-          <a:lstStyle/>
-          <a:p>
-            <a:pPr rtl="1" algn="r" indent="0" marL="0">
-              <a:buNone/>
-            </a:pPr>
-            <a:r>
-              <a:rPr lang="en-US" sz="1250" dirty="0">
-                <a:solidFill>
-                  <a:srgbClr val="5C6B72"/>
+              <a:t>דירוג מסמך הזהב —  </a:t>
+            </a:r>
+            <a:pPr algn="r" indent="0" marL="0">
+              <a:buNone/>
+            </a:pPr>
+            <a:r>
+              <a:rPr lang="en-US" sz="1400" dirty="0">
+                <a:solidFill>
+                  <a:srgbClr val="CFE6E4"/>
                 </a:solidFill>
                 <a:latin typeface="Calibri" pitchFamily="34" charset="0"/>
                 <a:ea typeface="Calibri" pitchFamily="34" charset="-122"/>
                 <a:cs typeface="Calibri" pitchFamily="34" charset="-120"/>
               </a:rPr>
-              <a:t>1 חלקי דירוג המסמך הרלוונטי הראשון</a:t>
-            </a:r>
-            <a:endParaRPr lang="en-US" sz="1250" dirty="0"/>
-          </a:p>
-        </p:txBody>
-      </p:sp>
-      <p:sp>
-        <p:nvSpPr>
-          <p:cNvPr id="22" name="Text 18"/>
-          <p:cNvSpPr/>
-          <p:nvPr/>
-        </p:nvSpPr>
-        <p:spPr>
-          <a:xfrm>
-            <a:off x="6430975" y="4306824"/>
-            <a:ext cx="1691640" cy="457200"/>
-          </a:xfrm>
-          <a:prstGeom prst="rect">
-            <a:avLst/>
-          </a:prstGeom>
-          <a:noFill/>
-          <a:ln/>
-        </p:spPr>
-        <p:txBody>
-          <a:bodyPr wrap="square" lIns="0" tIns="0" rIns="0" bIns="0" rtlCol="0" anchor="ctr"/>
-          <a:lstStyle/>
-          <a:p>
-            <a:pPr algn="l" indent="0" marL="0">
-              <a:buNone/>
-            </a:pPr>
-            <a:r>
-              <a:rPr lang="en-US" sz="1500" b="1" dirty="0">
-                <a:solidFill>
-                  <a:srgbClr val="0E8A8F"/>
-                </a:solidFill>
-                <a:latin typeface="Cambria" pitchFamily="34" charset="0"/>
-                <a:ea typeface="Cambria" pitchFamily="34" charset="-122"/>
-                <a:cs typeface="Cambria" pitchFamily="34" charset="-120"/>
-              </a:rPr>
-              <a:t>nDCG@10</a:t>
-            </a:r>
-            <a:endParaRPr lang="en-US" sz="1500" dirty="0"/>
-          </a:p>
-        </p:txBody>
-      </p:sp>
-      <p:sp>
-        <p:nvSpPr>
-          <p:cNvPr id="23" name="Text 19"/>
-          <p:cNvSpPr/>
-          <p:nvPr/>
-        </p:nvSpPr>
-        <p:spPr>
-          <a:xfrm>
-            <a:off x="8214055" y="4306824"/>
-            <a:ext cx="3200400" cy="457200"/>
-          </a:xfrm>
-          <a:prstGeom prst="rect">
-            <a:avLst/>
-          </a:prstGeom>
-          <a:noFill/>
-          <a:ln/>
-        </p:spPr>
-        <p:txBody>
-          <a:bodyPr wrap="square" lIns="0" tIns="0" rIns="0" bIns="0" rtlCol="0" anchor="ctr"/>
+              <a:t>TF-IDF: ✗   ·   AlephBERT: 1   ·   Hybrid-RRF: 4</a:t>
+            </a:r>
+            <a:endParaRPr lang="en-US" sz="1400" dirty="0"/>
+          </a:p>
+        </p:txBody>
+      </p:sp>
+      <p:sp>
+        <p:nvSpPr>
+          <p:cNvPr id="28" name="Text 24"/>
+          <p:cNvSpPr/>
+          <p:nvPr/>
+        </p:nvSpPr>
+        <p:spPr>
+          <a:xfrm>
+            <a:off x="761695" y="5870448"/>
+            <a:ext cx="10881360" cy="365760"/>
+          </a:xfrm>
+          <a:prstGeom prst="rect">
+            <a:avLst/>
+          </a:prstGeom>
+          <a:noFill/>
+          <a:ln/>
+        </p:spPr>
+        <p:txBody>
+          <a:bodyPr wrap="square" lIns="3175" tIns="3175" rIns="3175" bIns="3175" rtlCol="0" anchor="ctr"/>
           <a:lstStyle/>
           <a:p>
             <a:pPr rtl="1" algn="r" indent="0" marL="0">
               <a:buNone/>
             </a:pPr>
             <a:r>
-              <a:rPr lang="en-US" sz="1250" dirty="0">
-                <a:solidFill>
-                  <a:srgbClr val="5C6B72"/>
+              <a:rPr lang="en-US" sz="1200" i="1" dirty="0">
+                <a:solidFill>
+                  <a:srgbClr val="5FBDB6"/>
                 </a:solidFill>
                 <a:latin typeface="Calibri" pitchFamily="34" charset="0"/>
                 <a:ea typeface="Calibri" pitchFamily="34" charset="-122"/>
                 <a:cs typeface="Calibri" pitchFamily="34" charset="-120"/>
               </a:rPr>
-              <a:t>מתגמל מסמכים רלוונטיים בדירוג גבוה</a:t>
-            </a:r>
-            <a:endParaRPr lang="en-US" sz="1250" dirty="0"/>
-          </a:p>
-        </p:txBody>
-      </p:sp>
-      <p:sp>
-        <p:nvSpPr>
-          <p:cNvPr id="24" name="Text 20"/>
-          <p:cNvSpPr/>
-          <p:nvPr/>
-        </p:nvSpPr>
-        <p:spPr>
-          <a:xfrm>
-            <a:off x="6430975" y="5020056"/>
-            <a:ext cx="1691640" cy="457200"/>
-          </a:xfrm>
-          <a:prstGeom prst="rect">
-            <a:avLst/>
-          </a:prstGeom>
-          <a:noFill/>
-          <a:ln/>
-        </p:spPr>
-        <p:txBody>
-          <a:bodyPr wrap="square" lIns="0" tIns="0" rIns="0" bIns="0" rtlCol="0" anchor="ctr"/>
-          <a:lstStyle/>
-          <a:p>
-            <a:pPr algn="l" indent="0" marL="0">
-              <a:buNone/>
-            </a:pPr>
-            <a:r>
-              <a:rPr lang="en-US" sz="1500" b="1" dirty="0">
-                <a:solidFill>
-                  <a:srgbClr val="0E8A8F"/>
-                </a:solidFill>
-                <a:latin typeface="Cambria" pitchFamily="34" charset="0"/>
-                <a:ea typeface="Cambria" pitchFamily="34" charset="-122"/>
-                <a:cs typeface="Cambria" pitchFamily="34" charset="-120"/>
-              </a:rPr>
-              <a:t>MAP</a:t>
-            </a:r>
-            <a:endParaRPr lang="en-US" sz="1500" dirty="0"/>
-          </a:p>
-        </p:txBody>
-      </p:sp>
-      <p:sp>
-        <p:nvSpPr>
-          <p:cNvPr id="25" name="Text 21"/>
-          <p:cNvSpPr/>
-          <p:nvPr/>
-        </p:nvSpPr>
-        <p:spPr>
-          <a:xfrm>
-            <a:off x="8214055" y="5020056"/>
-            <a:ext cx="3200400" cy="457200"/>
-          </a:xfrm>
-          <a:prstGeom prst="rect">
-            <a:avLst/>
-          </a:prstGeom>
-          <a:noFill/>
-          <a:ln/>
-        </p:spPr>
-        <p:txBody>
-          <a:bodyPr wrap="square" lIns="0" tIns="0" rIns="0" bIns="0" rtlCol="0" anchor="ctr"/>
-          <a:lstStyle/>
-          <a:p>
-            <a:pPr rtl="1" algn="r" indent="0" marL="0">
-              <a:buNone/>
-            </a:pPr>
-            <a:r>
-              <a:rPr lang="en-US" sz="1250" dirty="0">
-                <a:solidFill>
-                  <a:srgbClr val="5C6B72"/>
-                </a:solidFill>
-                <a:latin typeface="Calibri" pitchFamily="34" charset="0"/>
-                <a:ea typeface="Calibri" pitchFamily="34" charset="-122"/>
-                <a:cs typeface="Calibri" pitchFamily="34" charset="-120"/>
-              </a:rPr>
-              <a:t>דיוק ממוצע על פני כל הדירוג</a:t>
-            </a:r>
-            <a:endParaRPr lang="en-US" sz="1250" dirty="0"/>
-          </a:p>
-        </p:txBody>
-      </p:sp>
-      <p:sp>
-        <p:nvSpPr>
-          <p:cNvPr id="26" name="Text 22"/>
-          <p:cNvSpPr/>
-          <p:nvPr/>
-        </p:nvSpPr>
-        <p:spPr>
-          <a:xfrm>
-            <a:off x="6430975" y="5669280"/>
-            <a:ext cx="5029200" cy="365760"/>
-          </a:xfrm>
-          <a:prstGeom prst="rect">
-            <a:avLst/>
-          </a:prstGeom>
-          <a:noFill/>
-          <a:ln/>
-        </p:spPr>
-        <p:txBody>
-          <a:bodyPr wrap="square" lIns="0" tIns="0" rIns="0" bIns="0" rtlCol="0" anchor="ctr"/>
-          <a:lstStyle/>
-          <a:p>
-            <a:pPr rtl="1" algn="r" indent="0" marL="0">
-              <a:buNone/>
-            </a:pPr>
-            <a:r>
-              <a:rPr lang="en-US" sz="1150" i="1" dirty="0">
-                <a:solidFill>
-                  <a:srgbClr val="5C6B72"/>
-                </a:solidFill>
-                <a:latin typeface="Calibri" pitchFamily="34" charset="0"/>
-                <a:ea typeface="Calibri" pitchFamily="34" charset="-122"/>
-                <a:cs typeface="Calibri" pitchFamily="34" charset="-120"/>
-              </a:rPr>
-              <a:t>המדידה היא ברמת המסמך: פסקה נחשבת עבור הדף שאליו היא שייכת.</a:t>
-            </a:r>
-            <a:endParaRPr lang="en-US" sz="1150" dirty="0"/>
+              <a:t>אפס מילים משותפות → הלקסיקלי מחמיץ, הסמנטי מגשר על פער הניסוח. ההיברידי אינו ראשון בכל שאלה — יתרונו הוא במצטבר על פני 40 השאלות.</a:t>
+            </a:r>
+            <a:endParaRPr lang="en-US" sz="1200" dirty="0"/>
           </a:p>
         </p:txBody>
       </p:sp>
@@ -4825,7 +4976,7 @@
                 <a:ea typeface="Calibri" pitchFamily="34" charset="-122"/>
                 <a:cs typeface="Calibri" pitchFamily="34" charset="-120"/>
               </a:rPr>
-              <a:t>פרוטוקול הערכה</a:t>
+              <a:t>איך משלבים ומודדים</a:t>
             </a:r>
             <a:endParaRPr lang="en-US" sz="1200" dirty="0"/>
           </a:p>
@@ -4864,7 +5015,7 @@
                 <a:ea typeface="Cambria" pitchFamily="34" charset="-122"/>
                 <a:cs typeface="Cambria" pitchFamily="34" charset="-120"/>
               </a:rPr>
-              <a:t>חלוקה לאימון · ולידציה · טסט</a:t>
+              <a:t>שילוב היברידי והמדדים</a:t>
             </a:r>
             <a:endParaRPr lang="en-US" sz="3000" dirty="0"/>
           </a:p>
@@ -4911,57 +5062,293 @@
       </p:sp>
       <p:sp>
         <p:nvSpPr>
-          <p:cNvPr id="7" name="Text 5"/>
-          <p:cNvSpPr/>
-          <p:nvPr/>
-        </p:nvSpPr>
-        <p:spPr>
-          <a:xfrm>
-            <a:off x="578815" y="1481328"/>
-            <a:ext cx="11064240" cy="640080"/>
-          </a:xfrm>
-          <a:prstGeom prst="rect">
-            <a:avLst/>
-          </a:prstGeom>
-          <a:noFill/>
-          <a:ln/>
-        </p:spPr>
-        <p:txBody>
-          <a:bodyPr wrap="square" lIns="0" tIns="0" rIns="0" bIns="0" rtlCol="0" anchor="ctr"/>
-          <a:lstStyle/>
-          <a:p>
-            <a:pPr rtl="1" algn="r" indent="0" marL="0">
-              <a:buNone/>
-            </a:pPr>
-            <a:r>
-              <a:rPr lang="en-US" sz="1500" dirty="0">
-                <a:solidFill>
-                  <a:srgbClr val="5C6B72"/>
+          <p:cNvPr id="7" name="Shape 5"/>
+          <p:cNvSpPr/>
+          <p:nvPr/>
+        </p:nvSpPr>
+        <p:spPr>
+          <a:xfrm>
+            <a:off x="578815" y="1737360"/>
+            <a:ext cx="5486400" cy="4206240"/>
+          </a:xfrm>
+          <a:prstGeom prst="roundRect">
+            <a:avLst>
+              <a:gd name="adj" fmla="val 1739"/>
+            </a:avLst>
+          </a:prstGeom>
+          <a:solidFill>
+            <a:srgbClr val="EAF4F4"/>
+          </a:solidFill>
+          <a:ln w="12700">
+            <a:solidFill>
+              <a:srgbClr val="DDE8E8"/>
+            </a:solidFill>
+            <a:prstDash val="solid"/>
+          </a:ln>
+          <a:effectLst>
+            <a:outerShdw sx="100000" sy="100000" kx="0" ky="0" algn="bl" rotWithShape="0" blurRad="76200" dist="25400" dir="5400000">
+              <a:srgbClr val="000000">
+                <a:alpha val="12000"/>
+              </a:srgbClr>
+            </a:outerShdw>
+          </a:effectLst>
+        </p:spPr>
+      </p:sp>
+      <p:sp>
+        <p:nvSpPr>
+          <p:cNvPr id="8" name="Shape 6"/>
+          <p:cNvSpPr/>
+          <p:nvPr/>
+        </p:nvSpPr>
+        <p:spPr>
+          <a:xfrm>
+            <a:off x="624535" y="2057400"/>
+            <a:ext cx="640080" cy="640080"/>
+          </a:xfrm>
+          <a:prstGeom prst="ellipse">
+            <a:avLst/>
+          </a:prstGeom>
+          <a:solidFill>
+            <a:srgbClr val="0E8A8F"/>
+          </a:solidFill>
+          <a:ln/>
+          <a:effectLst>
+            <a:outerShdw sx="100000" sy="100000" kx="0" ky="0" algn="bl" rotWithShape="0" blurRad="76200" dist="25400" dir="5400000">
+              <a:srgbClr val="000000">
+                <a:alpha val="12000"/>
+              </a:srgbClr>
+            </a:outerShdw>
+          </a:effectLst>
+        </p:spPr>
+      </p:sp>
+      <p:pic>
+        <p:nvPicPr>
+          <p:cNvPr id="9" name="Image 0" descr="preencoded.png">    </p:cNvPr>
+          <p:cNvPicPr>
+            <a:picLocks noChangeAspect="1"/>
+          </p:cNvPicPr>
+          <p:nvPr/>
+        </p:nvPicPr>
+        <p:blipFill>
+          <a:blip r:embed="rId1"/>
+          <a:stretch>
+            <a:fillRect/>
+          </a:stretch>
+        </p:blipFill>
+        <p:spPr>
+          <a:xfrm>
+            <a:off x="797357" y="2230222"/>
+            <a:ext cx="294437" cy="294437"/>
+          </a:xfrm>
+          <a:prstGeom prst="rect">
+            <a:avLst/>
+          </a:prstGeom>
+        </p:spPr>
+      </p:pic>
+      <p:sp>
+        <p:nvSpPr>
+          <p:cNvPr id="10" name="Text 7"/>
+          <p:cNvSpPr/>
+          <p:nvPr/>
+        </p:nvSpPr>
+        <p:spPr>
+          <a:xfrm>
+            <a:off x="1538935" y="2130552"/>
+            <a:ext cx="4206240" cy="457200"/>
+          </a:xfrm>
+          <a:prstGeom prst="rect">
+            <a:avLst/>
+          </a:prstGeom>
+          <a:noFill/>
+          <a:ln/>
+        </p:spPr>
+        <p:txBody>
+          <a:bodyPr wrap="square" lIns="0" tIns="0" rIns="0" bIns="0" rtlCol="0" anchor="ctr"/>
+          <a:lstStyle/>
+          <a:p>
+            <a:pPr algn="r" indent="0" marL="0">
+              <a:buNone/>
+            </a:pPr>
+            <a:r>
+              <a:rPr lang="en-US" sz="1800" b="1" dirty="0">
+                <a:solidFill>
+                  <a:srgbClr val="153139"/>
+                </a:solidFill>
+                <a:latin typeface="Cambria" pitchFamily="34" charset="0"/>
+                <a:ea typeface="Cambria" pitchFamily="34" charset="-122"/>
+                <a:cs typeface="Cambria" pitchFamily="34" charset="-120"/>
+              </a:rPr>
+              <a:t>Reciprocal Rank Fusion</a:t>
+            </a:r>
+            <a:endParaRPr lang="en-US" sz="1800" dirty="0"/>
+          </a:p>
+        </p:txBody>
+      </p:sp>
+      <p:sp>
+        <p:nvSpPr>
+          <p:cNvPr id="11" name="Shape 8"/>
+          <p:cNvSpPr/>
+          <p:nvPr/>
+        </p:nvSpPr>
+        <p:spPr>
+          <a:xfrm>
+            <a:off x="898855" y="2834640"/>
+            <a:ext cx="4846320" cy="868680"/>
+          </a:xfrm>
+          <a:prstGeom prst="roundRect">
+            <a:avLst>
+              <a:gd name="adj" fmla="val 6316"/>
+            </a:avLst>
+          </a:prstGeom>
+          <a:solidFill>
+            <a:srgbClr val="FFFFFF"/>
+          </a:solidFill>
+          <a:ln w="12700">
+            <a:solidFill>
+              <a:srgbClr val="D7E6E6"/>
+            </a:solidFill>
+            <a:prstDash val="solid"/>
+          </a:ln>
+        </p:spPr>
+      </p:sp>
+      <p:sp>
+        <p:nvSpPr>
+          <p:cNvPr id="12" name="Text 9"/>
+          <p:cNvSpPr/>
+          <p:nvPr/>
+        </p:nvSpPr>
+        <p:spPr>
+          <a:xfrm>
+            <a:off x="898855" y="2834640"/>
+            <a:ext cx="4846320" cy="868680"/>
+          </a:xfrm>
+          <a:prstGeom prst="rect">
+            <a:avLst/>
+          </a:prstGeom>
+          <a:noFill/>
+          <a:ln/>
+        </p:spPr>
+        <p:txBody>
+          <a:bodyPr wrap="square" lIns="0" tIns="0" rIns="0" bIns="0" rtlCol="0" anchor="ctr"/>
+          <a:lstStyle/>
+          <a:p>
+            <a:pPr algn="ctr" indent="0" marL="0">
+              <a:buNone/>
+            </a:pPr>
+            <a:r>
+              <a:rPr lang="en-US" sz="2000" b="1" i="1" dirty="0">
+                <a:solidFill>
+                  <a:srgbClr val="0E8A8F"/>
+                </a:solidFill>
+                <a:latin typeface="Cambria" pitchFamily="34" charset="0"/>
+                <a:ea typeface="Cambria" pitchFamily="34" charset="-122"/>
+                <a:cs typeface="Cambria" pitchFamily="34" charset="-120"/>
+              </a:rPr>
+              <a:t>score(d) = Σ  1 / (k + rank_i(d))</a:t>
+            </a:r>
+            <a:endParaRPr lang="en-US" sz="2000" dirty="0"/>
+          </a:p>
+        </p:txBody>
+      </p:sp>
+      <p:sp>
+        <p:nvSpPr>
+          <p:cNvPr id="13" name="Text 10"/>
+          <p:cNvSpPr/>
+          <p:nvPr/>
+        </p:nvSpPr>
+        <p:spPr>
+          <a:xfrm>
+            <a:off x="853135" y="3886200"/>
+            <a:ext cx="4846320" cy="1920240"/>
+          </a:xfrm>
+          <a:prstGeom prst="rect">
+            <a:avLst/>
+          </a:prstGeom>
+          <a:noFill/>
+          <a:ln/>
+        </p:spPr>
+        <p:txBody>
+          <a:bodyPr wrap="square" lIns="0" tIns="0" rIns="0" bIns="0" rtlCol="0" anchor="ctr"/>
+          <a:lstStyle/>
+          <a:p>
+            <a:pPr algn="r" marL="342900" indent="-342900">
+              <a:lnSpc>
+                <a:spcPct val="125000"/>
+              </a:lnSpc>
+              <a:buSzPct val="100000"/>
+              <a:buChar char="•"/>
+            </a:pPr>
+            <a:r>
+              <a:rPr lang="en-US" sz="1400" dirty="0">
+                <a:solidFill>
+                  <a:srgbClr val="153139"/>
                 </a:solidFill>
                 <a:latin typeface="Calibri" pitchFamily="34" charset="0"/>
                 <a:ea typeface="Calibri" pitchFamily="34" charset="-122"/>
                 <a:cs typeface="Calibri" pitchFamily="34" charset="-120"/>
               </a:rPr>
-              <a:t>זהו אחזור מידע, ולכן החלוקה היא ברמת השאילתה: הקורפוס משמש כאינדקס (נלמד ללא תוויות), ו-40 השאלות המתויגות מחולקות לולידציה ולטסט.</a:t>
-            </a:r>
-            <a:endParaRPr lang="en-US" sz="1500" dirty="0"/>
-          </a:p>
-        </p:txBody>
-      </p:sp>
-      <p:sp>
-        <p:nvSpPr>
-          <p:cNvPr id="8" name="Shape 6"/>
-          <p:cNvSpPr/>
-          <p:nvPr/>
-        </p:nvSpPr>
-        <p:spPr>
-          <a:xfrm>
-            <a:off x="8031175" y="2286000"/>
-            <a:ext cx="3611880" cy="2468880"/>
+              <a:t>מבוסס-דירוג — לא נדרש כיול ציונים</a:t>
+            </a:r>
+            <a:endParaRPr lang="en-US" sz="1400" dirty="0"/>
+          </a:p>
+          <a:p>
+            <a:pPr algn="r" marL="342900" indent="-342900">
+              <a:lnSpc>
+                <a:spcPct val="125000"/>
+              </a:lnSpc>
+              <a:buSzPct val="100000"/>
+              <a:buChar char="•"/>
+            </a:pPr>
+            <a:r>
+              <a:rPr lang="en-US" sz="1400" dirty="0">
+                <a:solidFill>
+                  <a:srgbClr val="153139"/>
+                </a:solidFill>
+                <a:latin typeface="Calibri" pitchFamily="34" charset="0"/>
+                <a:ea typeface="Calibri" pitchFamily="34" charset="-122"/>
+                <a:cs typeface="Calibri" pitchFamily="34" charset="-120"/>
+              </a:rPr>
+              <a:t>מסמך שדורג גבוה ע"י אחד המודלים עולה</a:t>
+            </a:r>
+            <a:endParaRPr lang="en-US" sz="1400" dirty="0"/>
+          </a:p>
+          <a:p>
+            <a:pPr algn="r" marL="342900" indent="-342900">
+              <a:lnSpc>
+                <a:spcPct val="125000"/>
+              </a:lnSpc>
+              <a:buSzPct val="100000"/>
+              <a:buChar char="•"/>
+            </a:pPr>
+            <a:r>
+              <a:rPr lang="en-US" sz="1400" dirty="0">
+                <a:solidFill>
+                  <a:srgbClr val="153139"/>
+                </a:solidFill>
+                <a:latin typeface="Calibri" pitchFamily="34" charset="0"/>
+                <a:ea typeface="Calibri" pitchFamily="34" charset="-122"/>
+                <a:cs typeface="Calibri" pitchFamily="34" charset="-120"/>
+              </a:rPr>
+              <a:t>נבדק גם שילוב ציונים משוקלל (min-max)</a:t>
+            </a:r>
+            <a:endParaRPr lang="en-US" sz="1400" dirty="0"/>
+          </a:p>
+        </p:txBody>
+      </p:sp>
+      <p:sp>
+        <p:nvSpPr>
+          <p:cNvPr id="14" name="Shape 11"/>
+          <p:cNvSpPr/>
+          <p:nvPr/>
+        </p:nvSpPr>
+        <p:spPr>
+          <a:xfrm>
+            <a:off x="6293815" y="1737360"/>
+            <a:ext cx="5349240" cy="4206240"/>
           </a:xfrm>
           <a:prstGeom prst="roundRect">
             <a:avLst>
-              <a:gd name="adj" fmla="val 2963"/>
+              <a:gd name="adj" fmla="val 1739"/>
             </a:avLst>
           </a:prstGeom>
           <a:solidFill>
@@ -4984,20 +5371,20 @@
       </p:sp>
       <p:sp>
         <p:nvSpPr>
-          <p:cNvPr id="9" name="Shape 7"/>
-          <p:cNvSpPr/>
-          <p:nvPr/>
-        </p:nvSpPr>
-        <p:spPr>
-          <a:xfrm>
-            <a:off x="8305495" y="2560320"/>
+          <p:cNvPr id="15" name="Shape 12"/>
+          <p:cNvSpPr/>
+          <p:nvPr/>
+        </p:nvSpPr>
+        <p:spPr>
+          <a:xfrm>
+            <a:off x="6293815" y="2057400"/>
             <a:ext cx="640080" cy="640080"/>
           </a:xfrm>
           <a:prstGeom prst="ellipse">
             <a:avLst/>
           </a:prstGeom>
           <a:solidFill>
-            <a:srgbClr val="0E8A8F"/>
+            <a:srgbClr val="E0852F"/>
           </a:solidFill>
           <a:ln/>
           <a:effectLst>
@@ -5011,211 +5398,6 @@
       </p:sp>
       <p:pic>
         <p:nvPicPr>
-          <p:cNvPr id="10" name="Image 0" descr="preencoded.png">    </p:cNvPr>
-          <p:cNvPicPr>
-            <a:picLocks noChangeAspect="1"/>
-          </p:cNvPicPr>
-          <p:nvPr/>
-        </p:nvPicPr>
-        <p:blipFill>
-          <a:blip r:embed="rId1"/>
-          <a:stretch>
-            <a:fillRect/>
-          </a:stretch>
-        </p:blipFill>
-        <p:spPr>
-          <a:xfrm>
-            <a:off x="8478317" y="2733142"/>
-            <a:ext cx="294437" cy="294437"/>
-          </a:xfrm>
-          <a:prstGeom prst="rect">
-            <a:avLst/>
-          </a:prstGeom>
-        </p:spPr>
-      </p:pic>
-      <p:sp>
-        <p:nvSpPr>
-          <p:cNvPr id="11" name="Text 8"/>
-          <p:cNvSpPr/>
-          <p:nvPr/>
-        </p:nvSpPr>
-        <p:spPr>
-          <a:xfrm>
-            <a:off x="8991295" y="2542032"/>
-            <a:ext cx="2423160" cy="411480"/>
-          </a:xfrm>
-          <a:prstGeom prst="rect">
-            <a:avLst/>
-          </a:prstGeom>
-          <a:noFill/>
-          <a:ln/>
-        </p:spPr>
-        <p:txBody>
-          <a:bodyPr wrap="square" lIns="0" tIns="0" rIns="0" bIns="0" rtlCol="0" anchor="ctr"/>
-          <a:lstStyle/>
-          <a:p>
-            <a:pPr rtl="1" algn="r" indent="0" marL="0">
-              <a:buNone/>
-            </a:pPr>
-            <a:r>
-              <a:rPr lang="en-US" sz="1700" b="1" dirty="0">
-                <a:solidFill>
-                  <a:srgbClr val="153139"/>
-                </a:solidFill>
-                <a:latin typeface="Cambria" pitchFamily="34" charset="0"/>
-                <a:ea typeface="Cambria" pitchFamily="34" charset="-122"/>
-                <a:cs typeface="Cambria" pitchFamily="34" charset="-120"/>
-              </a:rPr>
-              <a:t>קורפוס · אינדקס</a:t>
-            </a:r>
-            <a:endParaRPr lang="en-US" sz="1700" dirty="0"/>
-          </a:p>
-        </p:txBody>
-      </p:sp>
-      <p:sp>
-        <p:nvSpPr>
-          <p:cNvPr id="12" name="Text 9"/>
-          <p:cNvSpPr/>
-          <p:nvPr/>
-        </p:nvSpPr>
-        <p:spPr>
-          <a:xfrm>
-            <a:off x="8305495" y="3182112"/>
-            <a:ext cx="3063240" cy="365760"/>
-          </a:xfrm>
-          <a:prstGeom prst="rect">
-            <a:avLst/>
-          </a:prstGeom>
-          <a:noFill/>
-          <a:ln/>
-        </p:spPr>
-        <p:txBody>
-          <a:bodyPr wrap="square" lIns="0" tIns="0" rIns="0" bIns="0" rtlCol="0" anchor="ctr"/>
-          <a:lstStyle/>
-          <a:p>
-            <a:pPr rtl="1" algn="r" indent="0" marL="0">
-              <a:buNone/>
-            </a:pPr>
-            <a:r>
-              <a:rPr lang="en-US" sz="1500" b="1" dirty="0">
-                <a:solidFill>
-                  <a:srgbClr val="0E8A8F"/>
-                </a:solidFill>
-                <a:latin typeface="Cambria" pitchFamily="34" charset="0"/>
-                <a:ea typeface="Cambria" pitchFamily="34" charset="-122"/>
-                <a:cs typeface="Cambria" pitchFamily="34" charset="-120"/>
-              </a:rPr>
-              <a:t>296 מסמכים · 1,602 פסקאות</a:t>
-            </a:r>
-            <a:endParaRPr lang="en-US" sz="1500" dirty="0"/>
-          </a:p>
-        </p:txBody>
-      </p:sp>
-      <p:sp>
-        <p:nvSpPr>
-          <p:cNvPr id="13" name="Text 10"/>
-          <p:cNvSpPr/>
-          <p:nvPr/>
-        </p:nvSpPr>
-        <p:spPr>
-          <a:xfrm>
-            <a:off x="8305495" y="3657600"/>
-            <a:ext cx="3063240" cy="960120"/>
-          </a:xfrm>
-          <a:prstGeom prst="rect">
-            <a:avLst/>
-          </a:prstGeom>
-          <a:noFill/>
-          <a:ln/>
-        </p:spPr>
-        <p:txBody>
-          <a:bodyPr wrap="square" lIns="0" tIns="0" rIns="0" bIns="0" rtlCol="0" anchor="ctr"/>
-          <a:lstStyle/>
-          <a:p>
-            <a:pPr rtl="1" algn="r" indent="0" marL="0">
-              <a:lnSpc>
-                <a:spcPct val="120000"/>
-              </a:lnSpc>
-              <a:buNone/>
-            </a:pPr>
-            <a:r>
-              <a:rPr lang="en-US" sz="1250" dirty="0">
-                <a:solidFill>
-                  <a:srgbClr val="5C6B72"/>
-                </a:solidFill>
-                <a:latin typeface="Calibri" pitchFamily="34" charset="0"/>
-                <a:ea typeface="Calibri" pitchFamily="34" charset="-122"/>
-                <a:cs typeface="Calibri" pitchFamily="34" charset="-120"/>
-              </a:rPr>
-              <a:t>ללא תוויות — TF-IDF/BM25 נלמדים עליו ו-AlephBERT מקודד אותו</a:t>
-            </a:r>
-            <a:endParaRPr lang="en-US" sz="1250" dirty="0"/>
-          </a:p>
-        </p:txBody>
-      </p:sp>
-      <p:sp>
-        <p:nvSpPr>
-          <p:cNvPr id="14" name="Shape 11"/>
-          <p:cNvSpPr/>
-          <p:nvPr/>
-        </p:nvSpPr>
-        <p:spPr>
-          <a:xfrm>
-            <a:off x="4245559" y="2286000"/>
-            <a:ext cx="3611880" cy="2468880"/>
-          </a:xfrm>
-          <a:prstGeom prst="roundRect">
-            <a:avLst>
-              <a:gd name="adj" fmla="val 2963"/>
-            </a:avLst>
-          </a:prstGeom>
-          <a:solidFill>
-            <a:srgbClr val="F4F9F9"/>
-          </a:solidFill>
-          <a:ln w="12700">
-            <a:solidFill>
-              <a:srgbClr val="DDE8E8"/>
-            </a:solidFill>
-            <a:prstDash val="solid"/>
-          </a:ln>
-          <a:effectLst>
-            <a:outerShdw sx="100000" sy="100000" kx="0" ky="0" algn="bl" rotWithShape="0" blurRad="76200" dist="25400" dir="5400000">
-              <a:srgbClr val="000000">
-                <a:alpha val="12000"/>
-              </a:srgbClr>
-            </a:outerShdw>
-          </a:effectLst>
-        </p:spPr>
-      </p:sp>
-      <p:sp>
-        <p:nvSpPr>
-          <p:cNvPr id="15" name="Shape 12"/>
-          <p:cNvSpPr/>
-          <p:nvPr/>
-        </p:nvSpPr>
-        <p:spPr>
-          <a:xfrm>
-            <a:off x="4519879" y="2560320"/>
-            <a:ext cx="640080" cy="640080"/>
-          </a:xfrm>
-          <a:prstGeom prst="ellipse">
-            <a:avLst/>
-          </a:prstGeom>
-          <a:solidFill>
-            <a:srgbClr val="0E8A8F"/>
-          </a:solidFill>
-          <a:ln/>
-          <a:effectLst>
-            <a:outerShdw sx="100000" sy="100000" kx="0" ky="0" algn="bl" rotWithShape="0" blurRad="76200" dist="25400" dir="5400000">
-              <a:srgbClr val="000000">
-                <a:alpha val="12000"/>
-              </a:srgbClr>
-            </a:outerShdw>
-          </a:effectLst>
-        </p:spPr>
-      </p:sp>
-      <p:pic>
-        <p:nvPicPr>
           <p:cNvPr id="16" name="Image 1" descr="preencoded.png">    </p:cNvPr>
           <p:cNvPicPr>
             <a:picLocks noChangeAspect="1"/>
@@ -5230,7 +5412,7 @@
         </p:blipFill>
         <p:spPr>
           <a:xfrm>
-            <a:off x="4692701" y="2733142"/>
+            <a:off x="6466637" y="2230222"/>
             <a:ext cx="294437" cy="294437"/>
           </a:xfrm>
           <a:prstGeom prst="rect">
@@ -5246,8 +5428,8 @@
         </p:nvSpPr>
         <p:spPr>
           <a:xfrm>
-            <a:off x="5205679" y="2542032"/>
-            <a:ext cx="2423160" cy="411480"/>
+            <a:off x="7208215" y="2130552"/>
+            <a:ext cx="4114800" cy="457200"/>
           </a:xfrm>
           <a:prstGeom prst="rect">
             <a:avLst/>
@@ -5263,7 +5445,7 @@
               <a:buNone/>
             </a:pPr>
             <a:r>
-              <a:rPr lang="en-US" sz="1700" b="1" dirty="0">
+              <a:rPr lang="en-US" sz="1800" b="1" dirty="0">
                 <a:solidFill>
                   <a:srgbClr val="153139"/>
                 </a:solidFill>
@@ -5271,9 +5453,9 @@
                 <a:ea typeface="Cambria" pitchFamily="34" charset="-122"/>
                 <a:cs typeface="Cambria" pitchFamily="34" charset="-120"/>
               </a:rPr>
-              <a:t>ולידציה (dev)</a:t>
-            </a:r>
-            <a:endParaRPr lang="en-US" sz="1700" dirty="0"/>
+              <a:t>מדדי הערכה</a:t>
+            </a:r>
+            <a:endParaRPr lang="en-US" sz="1800" dirty="0"/>
           </a:p>
         </p:txBody>
       </p:sp>
@@ -5285,20 +5467,20 @@
         </p:nvSpPr>
         <p:spPr>
           <a:xfrm>
-            <a:off x="4519879" y="3182112"/>
-            <a:ext cx="3063240" cy="365760"/>
-          </a:xfrm>
-          <a:prstGeom prst="rect">
-            <a:avLst/>
-          </a:prstGeom>
-          <a:noFill/>
-          <a:ln/>
-        </p:spPr>
-        <p:txBody>
-          <a:bodyPr wrap="square" lIns="0" tIns="0" rIns="0" bIns="0" rtlCol="0" anchor="ctr"/>
-          <a:lstStyle/>
-          <a:p>
-            <a:pPr rtl="1" algn="r" indent="0" marL="0">
+            <a:off x="6430975" y="2880360"/>
+            <a:ext cx="1691640" cy="457200"/>
+          </a:xfrm>
+          <a:prstGeom prst="rect">
+            <a:avLst/>
+          </a:prstGeom>
+          <a:noFill/>
+          <a:ln/>
+        </p:spPr>
+        <p:txBody>
+          <a:bodyPr wrap="square" lIns="0" tIns="0" rIns="0" bIns="0" rtlCol="0" anchor="ctr"/>
+          <a:lstStyle/>
+          <a:p>
+            <a:pPr algn="l" indent="0" marL="0">
               <a:buNone/>
             </a:pPr>
             <a:r>
@@ -5310,7 +5492,7 @@
                 <a:ea typeface="Cambria" pitchFamily="34" charset="-122"/>
                 <a:cs typeface="Cambria" pitchFamily="34" charset="-120"/>
               </a:rPr>
-              <a:t>14 שאלות · 35%</a:t>
+              <a:t>Recall@k</a:t>
             </a:r>
             <a:endParaRPr lang="en-US" sz="1500" dirty="0"/>
           </a:p>
@@ -5324,8 +5506,8 @@
         </p:nvSpPr>
         <p:spPr>
           <a:xfrm>
-            <a:off x="4519879" y="3657600"/>
-            <a:ext cx="3063240" cy="960120"/>
+            <a:off x="8214055" y="2880360"/>
+            <a:ext cx="3200400" cy="457200"/>
           </a:xfrm>
           <a:prstGeom prst="rect">
             <a:avLst/>
@@ -5338,9 +5520,6 @@
           <a:lstStyle/>
           <a:p>
             <a:pPr rtl="1" algn="r" indent="0" marL="0">
-              <a:lnSpc>
-                <a:spcPct val="120000"/>
-              </a:lnSpc>
               <a:buNone/>
             </a:pPr>
             <a:r>
@@ -5352,7 +5531,7 @@
                 <a:ea typeface="Calibri" pitchFamily="34" charset="-122"/>
                 <a:cs typeface="Calibri" pitchFamily="34" charset="-120"/>
               </a:rPr>
-              <a:t>בחירת מודל והיפר-פרמטרים (שיטת השילוב, k, α)</a:t>
+              <a:t>האם מסמך רלוונטי נמצא ב-top-k?</a:t>
             </a:r>
             <a:endParaRPr lang="en-US" sz="1250" dirty="0"/>
           </a:p>
@@ -5360,138 +5539,53 @@
       </p:sp>
       <p:sp>
         <p:nvSpPr>
-          <p:cNvPr id="20" name="Shape 16"/>
-          <p:cNvSpPr/>
-          <p:nvPr/>
-        </p:nvSpPr>
-        <p:spPr>
-          <a:xfrm>
-            <a:off x="459943" y="2286000"/>
-            <a:ext cx="3611880" cy="2468880"/>
-          </a:xfrm>
-          <a:prstGeom prst="roundRect">
-            <a:avLst>
-              <a:gd name="adj" fmla="val 2963"/>
-            </a:avLst>
-          </a:prstGeom>
-          <a:solidFill>
-            <a:srgbClr val="FFF4E8"/>
-          </a:solidFill>
-          <a:ln w="12700">
-            <a:solidFill>
-              <a:srgbClr val="DDE8E8"/>
-            </a:solidFill>
-            <a:prstDash val="solid"/>
-          </a:ln>
-          <a:effectLst>
-            <a:outerShdw sx="100000" sy="100000" kx="0" ky="0" algn="bl" rotWithShape="0" blurRad="76200" dist="25400" dir="5400000">
-              <a:srgbClr val="000000">
-                <a:alpha val="12000"/>
-              </a:srgbClr>
-            </a:outerShdw>
-          </a:effectLst>
-        </p:spPr>
-      </p:sp>
-      <p:sp>
-        <p:nvSpPr>
-          <p:cNvPr id="21" name="Shape 17"/>
-          <p:cNvSpPr/>
-          <p:nvPr/>
-        </p:nvSpPr>
-        <p:spPr>
-          <a:xfrm>
-            <a:off x="734263" y="2560320"/>
-            <a:ext cx="640080" cy="640080"/>
-          </a:xfrm>
-          <a:prstGeom prst="ellipse">
-            <a:avLst/>
-          </a:prstGeom>
-          <a:solidFill>
-            <a:srgbClr val="E0852F"/>
-          </a:solidFill>
-          <a:ln/>
-          <a:effectLst>
-            <a:outerShdw sx="100000" sy="100000" kx="0" ky="0" algn="bl" rotWithShape="0" blurRad="76200" dist="25400" dir="5400000">
-              <a:srgbClr val="000000">
-                <a:alpha val="12000"/>
-              </a:srgbClr>
-            </a:outerShdw>
-          </a:effectLst>
-        </p:spPr>
-      </p:sp>
-      <p:pic>
-        <p:nvPicPr>
-          <p:cNvPr id="22" name="Image 2" descr="preencoded.png">    </p:cNvPr>
-          <p:cNvPicPr>
-            <a:picLocks noChangeAspect="1"/>
-          </p:cNvPicPr>
-          <p:nvPr/>
-        </p:nvPicPr>
-        <p:blipFill>
-          <a:blip r:embed="rId3"/>
-          <a:stretch>
-            <a:fillRect/>
-          </a:stretch>
-        </p:blipFill>
-        <p:spPr>
-          <a:xfrm>
-            <a:off x="907085" y="2733142"/>
-            <a:ext cx="294437" cy="294437"/>
-          </a:xfrm>
-          <a:prstGeom prst="rect">
-            <a:avLst/>
-          </a:prstGeom>
-        </p:spPr>
-      </p:pic>
-      <p:sp>
-        <p:nvSpPr>
-          <p:cNvPr id="23" name="Text 18"/>
-          <p:cNvSpPr/>
-          <p:nvPr/>
-        </p:nvSpPr>
-        <p:spPr>
-          <a:xfrm>
-            <a:off x="1420063" y="2542032"/>
-            <a:ext cx="2423160" cy="411480"/>
-          </a:xfrm>
-          <a:prstGeom prst="rect">
-            <a:avLst/>
-          </a:prstGeom>
-          <a:noFill/>
-          <a:ln/>
-        </p:spPr>
-        <p:txBody>
-          <a:bodyPr wrap="square" lIns="0" tIns="0" rIns="0" bIns="0" rtlCol="0" anchor="ctr"/>
-          <a:lstStyle/>
-          <a:p>
-            <a:pPr rtl="1" algn="r" indent="0" marL="0">
-              <a:buNone/>
-            </a:pPr>
-            <a:r>
-              <a:rPr lang="en-US" sz="1700" b="1" dirty="0">
-                <a:solidFill>
-                  <a:srgbClr val="153139"/>
+          <p:cNvPr id="20" name="Text 16"/>
+          <p:cNvSpPr/>
+          <p:nvPr/>
+        </p:nvSpPr>
+        <p:spPr>
+          <a:xfrm>
+            <a:off x="6430975" y="3593592"/>
+            <a:ext cx="1691640" cy="457200"/>
+          </a:xfrm>
+          <a:prstGeom prst="rect">
+            <a:avLst/>
+          </a:prstGeom>
+          <a:noFill/>
+          <a:ln/>
+        </p:spPr>
+        <p:txBody>
+          <a:bodyPr wrap="square" lIns="0" tIns="0" rIns="0" bIns="0" rtlCol="0" anchor="ctr"/>
+          <a:lstStyle/>
+          <a:p>
+            <a:pPr algn="l" indent="0" marL="0">
+              <a:buNone/>
+            </a:pPr>
+            <a:r>
+              <a:rPr lang="en-US" sz="1500" b="1" dirty="0">
+                <a:solidFill>
+                  <a:srgbClr val="0E8A8F"/>
                 </a:solidFill>
                 <a:latin typeface="Cambria" pitchFamily="34" charset="0"/>
                 <a:ea typeface="Cambria" pitchFamily="34" charset="-122"/>
                 <a:cs typeface="Cambria" pitchFamily="34" charset="-120"/>
               </a:rPr>
-              <a:t>טסט (מוחזק)</a:t>
-            </a:r>
-            <a:endParaRPr lang="en-US" sz="1700" dirty="0"/>
-          </a:p>
-        </p:txBody>
-      </p:sp>
-      <p:sp>
-        <p:nvSpPr>
-          <p:cNvPr id="24" name="Text 19"/>
-          <p:cNvSpPr/>
-          <p:nvPr/>
-        </p:nvSpPr>
-        <p:spPr>
-          <a:xfrm>
-            <a:off x="734263" y="3182112"/>
-            <a:ext cx="3063240" cy="365760"/>
+              <a:t>MRR</a:t>
+            </a:r>
+            <a:endParaRPr lang="en-US" sz="1500" dirty="0"/>
+          </a:p>
+        </p:txBody>
+      </p:sp>
+      <p:sp>
+        <p:nvSpPr>
+          <p:cNvPr id="21" name="Text 17"/>
+          <p:cNvSpPr/>
+          <p:nvPr/>
+        </p:nvSpPr>
+        <p:spPr>
+          <a:xfrm>
+            <a:off x="8214055" y="3593592"/>
+            <a:ext cx="3200400" cy="457200"/>
           </a:xfrm>
           <a:prstGeom prst="rect">
             <a:avLst/>
@@ -5507,15 +5601,54 @@
               <a:buNone/>
             </a:pPr>
             <a:r>
+              <a:rPr lang="en-US" sz="1250" dirty="0">
+                <a:solidFill>
+                  <a:srgbClr val="5C6B72"/>
+                </a:solidFill>
+                <a:latin typeface="Calibri" pitchFamily="34" charset="0"/>
+                <a:ea typeface="Calibri" pitchFamily="34" charset="-122"/>
+                <a:cs typeface="Calibri" pitchFamily="34" charset="-120"/>
+              </a:rPr>
+              <a:t>1 חלקי דירוג המסמך הרלוונטי הראשון</a:t>
+            </a:r>
+            <a:endParaRPr lang="en-US" sz="1250" dirty="0"/>
+          </a:p>
+        </p:txBody>
+      </p:sp>
+      <p:sp>
+        <p:nvSpPr>
+          <p:cNvPr id="22" name="Text 18"/>
+          <p:cNvSpPr/>
+          <p:nvPr/>
+        </p:nvSpPr>
+        <p:spPr>
+          <a:xfrm>
+            <a:off x="6430975" y="4306824"/>
+            <a:ext cx="1691640" cy="457200"/>
+          </a:xfrm>
+          <a:prstGeom prst="rect">
+            <a:avLst/>
+          </a:prstGeom>
+          <a:noFill/>
+          <a:ln/>
+        </p:spPr>
+        <p:txBody>
+          <a:bodyPr wrap="square" lIns="0" tIns="0" rIns="0" bIns="0" rtlCol="0" anchor="ctr"/>
+          <a:lstStyle/>
+          <a:p>
+            <a:pPr algn="l" indent="0" marL="0">
+              <a:buNone/>
+            </a:pPr>
+            <a:r>
               <a:rPr lang="en-US" sz="1500" b="1" dirty="0">
                 <a:solidFill>
-                  <a:srgbClr val="E0852F"/>
+                  <a:srgbClr val="0E8A8F"/>
                 </a:solidFill>
                 <a:latin typeface="Cambria" pitchFamily="34" charset="0"/>
                 <a:ea typeface="Cambria" pitchFamily="34" charset="-122"/>
                 <a:cs typeface="Cambria" pitchFamily="34" charset="-120"/>
               </a:rPr>
-              <a:t>26 שאלות · 65%</a:t>
+              <a:t>nDCG@10</a:t>
             </a:r>
             <a:endParaRPr lang="en-US" sz="1500" dirty="0"/>
           </a:p>
@@ -5523,14 +5656,14 @@
       </p:sp>
       <p:sp>
         <p:nvSpPr>
-          <p:cNvPr id="25" name="Text 20"/>
-          <p:cNvSpPr/>
-          <p:nvPr/>
-        </p:nvSpPr>
-        <p:spPr>
-          <a:xfrm>
-            <a:off x="734263" y="3657600"/>
-            <a:ext cx="3063240" cy="960120"/>
+          <p:cNvPr id="23" name="Text 19"/>
+          <p:cNvSpPr/>
+          <p:nvPr/>
+        </p:nvSpPr>
+        <p:spPr>
+          <a:xfrm>
+            <a:off x="8214055" y="4306824"/>
+            <a:ext cx="3200400" cy="457200"/>
           </a:xfrm>
           <a:prstGeom prst="rect">
             <a:avLst/>
@@ -5543,9 +5676,6 @@
           <a:lstStyle/>
           <a:p>
             <a:pPr rtl="1" algn="r" indent="0" marL="0">
-              <a:lnSpc>
-                <a:spcPct val="120000"/>
-              </a:lnSpc>
               <a:buNone/>
             </a:pPr>
             <a:r>
@@ -5557,7 +5687,7 @@
                 <a:ea typeface="Calibri" pitchFamily="34" charset="-122"/>
                 <a:cs typeface="Calibri" pitchFamily="34" charset="-120"/>
               </a:rPr>
-              <a:t>מדדים סופיים ובלתי-מוטים — לא השפיעו על אף בחירה</a:t>
+              <a:t>מתגמל מסמכים רלוונטיים בדירוג גבוה</a:t>
             </a:r>
             <a:endParaRPr lang="en-US" sz="1250" dirty="0"/>
           </a:p>
@@ -5565,127 +5695,118 @@
       </p:sp>
       <p:sp>
         <p:nvSpPr>
-          <p:cNvPr id="26" name="Shape 21"/>
-          <p:cNvSpPr/>
-          <p:nvPr/>
-        </p:nvSpPr>
-        <p:spPr>
-          <a:xfrm>
-            <a:off x="578815" y="5029200"/>
-            <a:ext cx="11064240" cy="914400"/>
-          </a:xfrm>
-          <a:prstGeom prst="roundRect">
-            <a:avLst>
-              <a:gd name="adj" fmla="val 8000"/>
-            </a:avLst>
-          </a:prstGeom>
-          <a:solidFill>
-            <a:srgbClr val="0B3B45"/>
-          </a:solidFill>
-          <a:ln w="12700">
-            <a:solidFill>
-              <a:srgbClr val="DDE8E8"/>
-            </a:solidFill>
-            <a:prstDash val="solid"/>
-          </a:ln>
-          <a:effectLst>
-            <a:outerShdw sx="100000" sy="100000" kx="0" ky="0" algn="bl" rotWithShape="0" blurRad="76200" dist="25400" dir="5400000">
-              <a:srgbClr val="000000">
-                <a:alpha val="12000"/>
-              </a:srgbClr>
-            </a:outerShdw>
-          </a:effectLst>
-        </p:spPr>
-      </p:sp>
-      <p:sp>
-        <p:nvSpPr>
-          <p:cNvPr id="27" name="Text 22"/>
-          <p:cNvSpPr/>
-          <p:nvPr/>
-        </p:nvSpPr>
-        <p:spPr>
-          <a:xfrm>
-            <a:off x="761695" y="5029200"/>
-            <a:ext cx="10881360" cy="914400"/>
-          </a:xfrm>
-          <a:prstGeom prst="rect">
-            <a:avLst/>
-          </a:prstGeom>
-          <a:noFill/>
-          <a:ln/>
-        </p:spPr>
-        <p:txBody>
-          <a:bodyPr wrap="square" lIns="3175" tIns="3175" rIns="3175" bIns="3175" rtlCol="0" anchor="ctr"/>
-          <a:lstStyle/>
-          <a:p>
-            <a:pPr algn="r" indent="0" marL="0">
-              <a:buNone/>
-            </a:pPr>
-            <a:r>
-              <a:rPr lang="en-US" sz="1400" b="1" dirty="0">
-                <a:solidFill>
-                  <a:srgbClr val="FFFFFF"/>
+          <p:cNvPr id="24" name="Text 20"/>
+          <p:cNvSpPr/>
+          <p:nvPr/>
+        </p:nvSpPr>
+        <p:spPr>
+          <a:xfrm>
+            <a:off x="6430975" y="5020056"/>
+            <a:ext cx="1691640" cy="457200"/>
+          </a:xfrm>
+          <a:prstGeom prst="rect">
+            <a:avLst/>
+          </a:prstGeom>
+          <a:noFill/>
+          <a:ln/>
+        </p:spPr>
+        <p:txBody>
+          <a:bodyPr wrap="square" lIns="0" tIns="0" rIns="0" bIns="0" rtlCol="0" anchor="ctr"/>
+          <a:lstStyle/>
+          <a:p>
+            <a:pPr algn="l" indent="0" marL="0">
+              <a:buNone/>
+            </a:pPr>
+            <a:r>
+              <a:rPr lang="en-US" sz="1500" b="1" dirty="0">
+                <a:solidFill>
+                  <a:srgbClr val="0E8A8F"/>
+                </a:solidFill>
+                <a:latin typeface="Cambria" pitchFamily="34" charset="0"/>
+                <a:ea typeface="Cambria" pitchFamily="34" charset="-122"/>
+                <a:cs typeface="Cambria" pitchFamily="34" charset="-120"/>
+              </a:rPr>
+              <a:t>MAP</a:t>
+            </a:r>
+            <a:endParaRPr lang="en-US" sz="1500" dirty="0"/>
+          </a:p>
+        </p:txBody>
+      </p:sp>
+      <p:sp>
+        <p:nvSpPr>
+          <p:cNvPr id="25" name="Text 21"/>
+          <p:cNvSpPr/>
+          <p:nvPr/>
+        </p:nvSpPr>
+        <p:spPr>
+          <a:xfrm>
+            <a:off x="8214055" y="5020056"/>
+            <a:ext cx="3200400" cy="457200"/>
+          </a:xfrm>
+          <a:prstGeom prst="rect">
+            <a:avLst/>
+          </a:prstGeom>
+          <a:noFill/>
+          <a:ln/>
+        </p:spPr>
+        <p:txBody>
+          <a:bodyPr wrap="square" lIns="0" tIns="0" rIns="0" bIns="0" rtlCol="0" anchor="ctr"/>
+          <a:lstStyle/>
+          <a:p>
+            <a:pPr rtl="1" algn="r" indent="0" marL="0">
+              <a:buNone/>
+            </a:pPr>
+            <a:r>
+              <a:rPr lang="en-US" sz="1250" dirty="0">
+                <a:solidFill>
+                  <a:srgbClr val="5C6B72"/>
                 </a:solidFill>
                 <a:latin typeface="Calibri" pitchFamily="34" charset="0"/>
                 <a:ea typeface="Calibri" pitchFamily="34" charset="-122"/>
                 <a:cs typeface="Calibri" pitchFamily="34" charset="-120"/>
               </a:rPr>
-              <a:t>על הטסט המוחזק (26 שאלות) — MRR:   </a:t>
-            </a:r>
-            <a:pPr algn="r" indent="0" marL="0">
-              <a:buNone/>
-            </a:pPr>
-            <a:r>
-              <a:rPr lang="en-US" sz="1400" dirty="0">
-                <a:solidFill>
-                  <a:srgbClr val="CFE6E4"/>
+              <a:t>דיוק ממוצע על פני כל הדירוג</a:t>
+            </a:r>
+            <a:endParaRPr lang="en-US" sz="1250" dirty="0"/>
+          </a:p>
+        </p:txBody>
+      </p:sp>
+      <p:sp>
+        <p:nvSpPr>
+          <p:cNvPr id="26" name="Text 22"/>
+          <p:cNvSpPr/>
+          <p:nvPr/>
+        </p:nvSpPr>
+        <p:spPr>
+          <a:xfrm>
+            <a:off x="6430975" y="5669280"/>
+            <a:ext cx="5029200" cy="365760"/>
+          </a:xfrm>
+          <a:prstGeom prst="rect">
+            <a:avLst/>
+          </a:prstGeom>
+          <a:noFill/>
+          <a:ln/>
+        </p:spPr>
+        <p:txBody>
+          <a:bodyPr wrap="square" lIns="0" tIns="0" rIns="0" bIns="0" rtlCol="0" anchor="ctr"/>
+          <a:lstStyle/>
+          <a:p>
+            <a:pPr rtl="1" algn="r" indent="0" marL="0">
+              <a:buNone/>
+            </a:pPr>
+            <a:r>
+              <a:rPr lang="en-US" sz="1150" i="1" dirty="0">
+                <a:solidFill>
+                  <a:srgbClr val="5C6B72"/>
                 </a:solidFill>
                 <a:latin typeface="Calibri" pitchFamily="34" charset="0"/>
                 <a:ea typeface="Calibri" pitchFamily="34" charset="-122"/>
                 <a:cs typeface="Calibri" pitchFamily="34" charset="-120"/>
               </a:rPr>
-              <a:t>Hybrid-RRF 0.690 · Hybrid-wtd 0.659 · BM25 0.606 · TF-IDF 0.603 · AlephBERT 0.585</a:t>
-            </a:r>
-            <a:endParaRPr lang="en-US" sz="1400" dirty="0"/>
-          </a:p>
-        </p:txBody>
-      </p:sp>
-      <p:sp>
-        <p:nvSpPr>
-          <p:cNvPr id="28" name="Text 23"/>
-          <p:cNvSpPr/>
-          <p:nvPr/>
-        </p:nvSpPr>
-        <p:spPr>
-          <a:xfrm>
-            <a:off x="578815" y="6053328"/>
-            <a:ext cx="11064240" cy="320040"/>
-          </a:xfrm>
-          <a:prstGeom prst="rect">
-            <a:avLst/>
-          </a:prstGeom>
-          <a:noFill/>
-          <a:ln/>
-        </p:spPr>
-        <p:txBody>
-          <a:bodyPr wrap="square" lIns="0" tIns="0" rIns="0" bIns="0" rtlCol="0" anchor="ctr"/>
-          <a:lstStyle/>
-          <a:p>
-            <a:pPr rtl="1" algn="r" indent="0" marL="0">
-              <a:buNone/>
-            </a:pPr>
-            <a:r>
-              <a:rPr lang="en-US" sz="1200" i="1" dirty="0">
-                <a:solidFill>
-                  <a:srgbClr val="0E8A8F"/>
-                </a:solidFill>
-                <a:latin typeface="Calibri" pitchFamily="34" charset="0"/>
-                <a:ea typeface="Calibri" pitchFamily="34" charset="-122"/>
-                <a:cs typeface="Calibri" pitchFamily="34" charset="-120"/>
-              </a:rPr>
-              <a:t>היתרון של ההיברידי נשמר — ואף גדל — על שאלות שלא השתתפו בשום בחירה.</a:t>
-            </a:r>
-            <a:endParaRPr lang="en-US" sz="1200" dirty="0"/>
+              <a:t>המדידה היא ברמת המסמך: פסקה נחשבת עבור הדף שאליו היא שייכת.</a:t>
+            </a:r>
+            <a:endParaRPr lang="en-US" sz="1150" dirty="0"/>
           </a:p>
         </p:txBody>
       </p:sp>
@@ -5796,7 +5917,7 @@
                 <a:ea typeface="Calibri" pitchFamily="34" charset="-122"/>
                 <a:cs typeface="Calibri" pitchFamily="34" charset="-120"/>
               </a:rPr>
-              <a:t>תוצאות</a:t>
+              <a:t>פרוטוקול הערכה</a:t>
             </a:r>
             <a:endParaRPr lang="en-US" sz="1200" dirty="0"/>
           </a:p>
@@ -5835,7 +5956,7 @@
                 <a:ea typeface="Cambria" pitchFamily="34" charset="-122"/>
                 <a:cs typeface="Cambria" pitchFamily="34" charset="-120"/>
               </a:rPr>
-              <a:t>השוואת חמשת המודלים</a:t>
+              <a:t>חלוקה לאימון · ולידציה · טסט</a:t>
             </a:r>
             <a:endParaRPr lang="en-US" sz="3000" dirty="0"/>
           </a:p>
@@ -5875,6 +5996,977 @@
                 <a:cs typeface="Calibri" pitchFamily="34" charset="-120"/>
               </a:rPr>
               <a:t>10</a:t>
+            </a:r>
+            <a:endParaRPr lang="en-US" sz="1000" dirty="0"/>
+          </a:p>
+        </p:txBody>
+      </p:sp>
+      <p:sp>
+        <p:nvSpPr>
+          <p:cNvPr id="7" name="Text 5"/>
+          <p:cNvSpPr/>
+          <p:nvPr/>
+        </p:nvSpPr>
+        <p:spPr>
+          <a:xfrm>
+            <a:off x="578815" y="1481328"/>
+            <a:ext cx="11064240" cy="640080"/>
+          </a:xfrm>
+          <a:prstGeom prst="rect">
+            <a:avLst/>
+          </a:prstGeom>
+          <a:noFill/>
+          <a:ln/>
+        </p:spPr>
+        <p:txBody>
+          <a:bodyPr wrap="square" lIns="0" tIns="0" rIns="0" bIns="0" rtlCol="0" anchor="ctr"/>
+          <a:lstStyle/>
+          <a:p>
+            <a:pPr rtl="1" algn="r" indent="0" marL="0">
+              <a:buNone/>
+            </a:pPr>
+            <a:r>
+              <a:rPr lang="en-US" sz="1500" dirty="0">
+                <a:solidFill>
+                  <a:srgbClr val="5C6B72"/>
+                </a:solidFill>
+                <a:latin typeface="Calibri" pitchFamily="34" charset="0"/>
+                <a:ea typeface="Calibri" pitchFamily="34" charset="-122"/>
+                <a:cs typeface="Calibri" pitchFamily="34" charset="-120"/>
+              </a:rPr>
+              <a:t>זהו אחזור מידע, ולכן החלוקה היא ברמת השאילתה: הקורפוס משמש כאינדקס (נלמד ללא תוויות), ו-40 השאלות המתויגות מחולקות לולידציה ולטסט.</a:t>
+            </a:r>
+            <a:endParaRPr lang="en-US" sz="1500" dirty="0"/>
+          </a:p>
+        </p:txBody>
+      </p:sp>
+      <p:sp>
+        <p:nvSpPr>
+          <p:cNvPr id="8" name="Shape 6"/>
+          <p:cNvSpPr/>
+          <p:nvPr/>
+        </p:nvSpPr>
+        <p:spPr>
+          <a:xfrm>
+            <a:off x="8031175" y="2286000"/>
+            <a:ext cx="3611880" cy="2468880"/>
+          </a:xfrm>
+          <a:prstGeom prst="roundRect">
+            <a:avLst>
+              <a:gd name="adj" fmla="val 2963"/>
+            </a:avLst>
+          </a:prstGeom>
+          <a:solidFill>
+            <a:srgbClr val="F4F9F9"/>
+          </a:solidFill>
+          <a:ln w="12700">
+            <a:solidFill>
+              <a:srgbClr val="DDE8E8"/>
+            </a:solidFill>
+            <a:prstDash val="solid"/>
+          </a:ln>
+          <a:effectLst>
+            <a:outerShdw sx="100000" sy="100000" kx="0" ky="0" algn="bl" rotWithShape="0" blurRad="76200" dist="25400" dir="5400000">
+              <a:srgbClr val="000000">
+                <a:alpha val="12000"/>
+              </a:srgbClr>
+            </a:outerShdw>
+          </a:effectLst>
+        </p:spPr>
+      </p:sp>
+      <p:sp>
+        <p:nvSpPr>
+          <p:cNvPr id="9" name="Shape 7"/>
+          <p:cNvSpPr/>
+          <p:nvPr/>
+        </p:nvSpPr>
+        <p:spPr>
+          <a:xfrm>
+            <a:off x="8305495" y="2560320"/>
+            <a:ext cx="640080" cy="640080"/>
+          </a:xfrm>
+          <a:prstGeom prst="ellipse">
+            <a:avLst/>
+          </a:prstGeom>
+          <a:solidFill>
+            <a:srgbClr val="0E8A8F"/>
+          </a:solidFill>
+          <a:ln/>
+          <a:effectLst>
+            <a:outerShdw sx="100000" sy="100000" kx="0" ky="0" algn="bl" rotWithShape="0" blurRad="76200" dist="25400" dir="5400000">
+              <a:srgbClr val="000000">
+                <a:alpha val="12000"/>
+              </a:srgbClr>
+            </a:outerShdw>
+          </a:effectLst>
+        </p:spPr>
+      </p:sp>
+      <p:pic>
+        <p:nvPicPr>
+          <p:cNvPr id="10" name="Image 0" descr="preencoded.png">    </p:cNvPr>
+          <p:cNvPicPr>
+            <a:picLocks noChangeAspect="1"/>
+          </p:cNvPicPr>
+          <p:nvPr/>
+        </p:nvPicPr>
+        <p:blipFill>
+          <a:blip r:embed="rId1"/>
+          <a:stretch>
+            <a:fillRect/>
+          </a:stretch>
+        </p:blipFill>
+        <p:spPr>
+          <a:xfrm>
+            <a:off x="8478317" y="2733142"/>
+            <a:ext cx="294437" cy="294437"/>
+          </a:xfrm>
+          <a:prstGeom prst="rect">
+            <a:avLst/>
+          </a:prstGeom>
+        </p:spPr>
+      </p:pic>
+      <p:sp>
+        <p:nvSpPr>
+          <p:cNvPr id="11" name="Text 8"/>
+          <p:cNvSpPr/>
+          <p:nvPr/>
+        </p:nvSpPr>
+        <p:spPr>
+          <a:xfrm>
+            <a:off x="8991295" y="2542032"/>
+            <a:ext cx="2423160" cy="411480"/>
+          </a:xfrm>
+          <a:prstGeom prst="rect">
+            <a:avLst/>
+          </a:prstGeom>
+          <a:noFill/>
+          <a:ln/>
+        </p:spPr>
+        <p:txBody>
+          <a:bodyPr wrap="square" lIns="0" tIns="0" rIns="0" bIns="0" rtlCol="0" anchor="ctr"/>
+          <a:lstStyle/>
+          <a:p>
+            <a:pPr rtl="1" algn="r" indent="0" marL="0">
+              <a:buNone/>
+            </a:pPr>
+            <a:r>
+              <a:rPr lang="en-US" sz="1700" b="1" dirty="0">
+                <a:solidFill>
+                  <a:srgbClr val="153139"/>
+                </a:solidFill>
+                <a:latin typeface="Cambria" pitchFamily="34" charset="0"/>
+                <a:ea typeface="Cambria" pitchFamily="34" charset="-122"/>
+                <a:cs typeface="Cambria" pitchFamily="34" charset="-120"/>
+              </a:rPr>
+              <a:t>קורפוס · אינדקס</a:t>
+            </a:r>
+            <a:endParaRPr lang="en-US" sz="1700" dirty="0"/>
+          </a:p>
+        </p:txBody>
+      </p:sp>
+      <p:sp>
+        <p:nvSpPr>
+          <p:cNvPr id="12" name="Text 9"/>
+          <p:cNvSpPr/>
+          <p:nvPr/>
+        </p:nvSpPr>
+        <p:spPr>
+          <a:xfrm>
+            <a:off x="8305495" y="3182112"/>
+            <a:ext cx="3063240" cy="365760"/>
+          </a:xfrm>
+          <a:prstGeom prst="rect">
+            <a:avLst/>
+          </a:prstGeom>
+          <a:noFill/>
+          <a:ln/>
+        </p:spPr>
+        <p:txBody>
+          <a:bodyPr wrap="square" lIns="0" tIns="0" rIns="0" bIns="0" rtlCol="0" anchor="ctr"/>
+          <a:lstStyle/>
+          <a:p>
+            <a:pPr rtl="1" algn="r" indent="0" marL="0">
+              <a:buNone/>
+            </a:pPr>
+            <a:r>
+              <a:rPr lang="en-US" sz="1500" b="1" dirty="0">
+                <a:solidFill>
+                  <a:srgbClr val="0E8A8F"/>
+                </a:solidFill>
+                <a:latin typeface="Cambria" pitchFamily="34" charset="0"/>
+                <a:ea typeface="Cambria" pitchFamily="34" charset="-122"/>
+                <a:cs typeface="Cambria" pitchFamily="34" charset="-120"/>
+              </a:rPr>
+              <a:t>296 מסמכים · 1,602 פסקאות</a:t>
+            </a:r>
+            <a:endParaRPr lang="en-US" sz="1500" dirty="0"/>
+          </a:p>
+        </p:txBody>
+      </p:sp>
+      <p:sp>
+        <p:nvSpPr>
+          <p:cNvPr id="13" name="Text 10"/>
+          <p:cNvSpPr/>
+          <p:nvPr/>
+        </p:nvSpPr>
+        <p:spPr>
+          <a:xfrm>
+            <a:off x="8305495" y="3657600"/>
+            <a:ext cx="3063240" cy="960120"/>
+          </a:xfrm>
+          <a:prstGeom prst="rect">
+            <a:avLst/>
+          </a:prstGeom>
+          <a:noFill/>
+          <a:ln/>
+        </p:spPr>
+        <p:txBody>
+          <a:bodyPr wrap="square" lIns="0" tIns="0" rIns="0" bIns="0" rtlCol="0" anchor="ctr"/>
+          <a:lstStyle/>
+          <a:p>
+            <a:pPr rtl="1" algn="r" indent="0" marL="0">
+              <a:lnSpc>
+                <a:spcPct val="120000"/>
+              </a:lnSpc>
+              <a:buNone/>
+            </a:pPr>
+            <a:r>
+              <a:rPr lang="en-US" sz="1250" dirty="0">
+                <a:solidFill>
+                  <a:srgbClr val="5C6B72"/>
+                </a:solidFill>
+                <a:latin typeface="Calibri" pitchFamily="34" charset="0"/>
+                <a:ea typeface="Calibri" pitchFamily="34" charset="-122"/>
+                <a:cs typeface="Calibri" pitchFamily="34" charset="-120"/>
+              </a:rPr>
+              <a:t>ללא תוויות — TF-IDF/BM25 נלמדים עליו ו-AlephBERT מקודד אותו</a:t>
+            </a:r>
+            <a:endParaRPr lang="en-US" sz="1250" dirty="0"/>
+          </a:p>
+        </p:txBody>
+      </p:sp>
+      <p:sp>
+        <p:nvSpPr>
+          <p:cNvPr id="14" name="Shape 11"/>
+          <p:cNvSpPr/>
+          <p:nvPr/>
+        </p:nvSpPr>
+        <p:spPr>
+          <a:xfrm>
+            <a:off x="4245559" y="2286000"/>
+            <a:ext cx="3611880" cy="2468880"/>
+          </a:xfrm>
+          <a:prstGeom prst="roundRect">
+            <a:avLst>
+              <a:gd name="adj" fmla="val 2963"/>
+            </a:avLst>
+          </a:prstGeom>
+          <a:solidFill>
+            <a:srgbClr val="F4F9F9"/>
+          </a:solidFill>
+          <a:ln w="12700">
+            <a:solidFill>
+              <a:srgbClr val="DDE8E8"/>
+            </a:solidFill>
+            <a:prstDash val="solid"/>
+          </a:ln>
+          <a:effectLst>
+            <a:outerShdw sx="100000" sy="100000" kx="0" ky="0" algn="bl" rotWithShape="0" blurRad="76200" dist="25400" dir="5400000">
+              <a:srgbClr val="000000">
+                <a:alpha val="12000"/>
+              </a:srgbClr>
+            </a:outerShdw>
+          </a:effectLst>
+        </p:spPr>
+      </p:sp>
+      <p:sp>
+        <p:nvSpPr>
+          <p:cNvPr id="15" name="Shape 12"/>
+          <p:cNvSpPr/>
+          <p:nvPr/>
+        </p:nvSpPr>
+        <p:spPr>
+          <a:xfrm>
+            <a:off x="4519879" y="2560320"/>
+            <a:ext cx="640080" cy="640080"/>
+          </a:xfrm>
+          <a:prstGeom prst="ellipse">
+            <a:avLst/>
+          </a:prstGeom>
+          <a:solidFill>
+            <a:srgbClr val="0E8A8F"/>
+          </a:solidFill>
+          <a:ln/>
+          <a:effectLst>
+            <a:outerShdw sx="100000" sy="100000" kx="0" ky="0" algn="bl" rotWithShape="0" blurRad="76200" dist="25400" dir="5400000">
+              <a:srgbClr val="000000">
+                <a:alpha val="12000"/>
+              </a:srgbClr>
+            </a:outerShdw>
+          </a:effectLst>
+        </p:spPr>
+      </p:sp>
+      <p:pic>
+        <p:nvPicPr>
+          <p:cNvPr id="16" name="Image 1" descr="preencoded.png">    </p:cNvPr>
+          <p:cNvPicPr>
+            <a:picLocks noChangeAspect="1"/>
+          </p:cNvPicPr>
+          <p:nvPr/>
+        </p:nvPicPr>
+        <p:blipFill>
+          <a:blip r:embed="rId2"/>
+          <a:stretch>
+            <a:fillRect/>
+          </a:stretch>
+        </p:blipFill>
+        <p:spPr>
+          <a:xfrm>
+            <a:off x="4692701" y="2733142"/>
+            <a:ext cx="294437" cy="294437"/>
+          </a:xfrm>
+          <a:prstGeom prst="rect">
+            <a:avLst/>
+          </a:prstGeom>
+        </p:spPr>
+      </p:pic>
+      <p:sp>
+        <p:nvSpPr>
+          <p:cNvPr id="17" name="Text 13"/>
+          <p:cNvSpPr/>
+          <p:nvPr/>
+        </p:nvSpPr>
+        <p:spPr>
+          <a:xfrm>
+            <a:off x="5205679" y="2542032"/>
+            <a:ext cx="2423160" cy="411480"/>
+          </a:xfrm>
+          <a:prstGeom prst="rect">
+            <a:avLst/>
+          </a:prstGeom>
+          <a:noFill/>
+          <a:ln/>
+        </p:spPr>
+        <p:txBody>
+          <a:bodyPr wrap="square" lIns="0" tIns="0" rIns="0" bIns="0" rtlCol="0" anchor="ctr"/>
+          <a:lstStyle/>
+          <a:p>
+            <a:pPr rtl="1" algn="r" indent="0" marL="0">
+              <a:buNone/>
+            </a:pPr>
+            <a:r>
+              <a:rPr lang="en-US" sz="1700" b="1" dirty="0">
+                <a:solidFill>
+                  <a:srgbClr val="153139"/>
+                </a:solidFill>
+                <a:latin typeface="Cambria" pitchFamily="34" charset="0"/>
+                <a:ea typeface="Cambria" pitchFamily="34" charset="-122"/>
+                <a:cs typeface="Cambria" pitchFamily="34" charset="-120"/>
+              </a:rPr>
+              <a:t>ולידציה (dev)</a:t>
+            </a:r>
+            <a:endParaRPr lang="en-US" sz="1700" dirty="0"/>
+          </a:p>
+        </p:txBody>
+      </p:sp>
+      <p:sp>
+        <p:nvSpPr>
+          <p:cNvPr id="18" name="Text 14"/>
+          <p:cNvSpPr/>
+          <p:nvPr/>
+        </p:nvSpPr>
+        <p:spPr>
+          <a:xfrm>
+            <a:off x="4519879" y="3182112"/>
+            <a:ext cx="3063240" cy="365760"/>
+          </a:xfrm>
+          <a:prstGeom prst="rect">
+            <a:avLst/>
+          </a:prstGeom>
+          <a:noFill/>
+          <a:ln/>
+        </p:spPr>
+        <p:txBody>
+          <a:bodyPr wrap="square" lIns="0" tIns="0" rIns="0" bIns="0" rtlCol="0" anchor="ctr"/>
+          <a:lstStyle/>
+          <a:p>
+            <a:pPr rtl="1" algn="r" indent="0" marL="0">
+              <a:buNone/>
+            </a:pPr>
+            <a:r>
+              <a:rPr lang="en-US" sz="1500" b="1" dirty="0">
+                <a:solidFill>
+                  <a:srgbClr val="0E8A8F"/>
+                </a:solidFill>
+                <a:latin typeface="Cambria" pitchFamily="34" charset="0"/>
+                <a:ea typeface="Cambria" pitchFamily="34" charset="-122"/>
+                <a:cs typeface="Cambria" pitchFamily="34" charset="-120"/>
+              </a:rPr>
+              <a:t>14 שאלות · 35%</a:t>
+            </a:r>
+            <a:endParaRPr lang="en-US" sz="1500" dirty="0"/>
+          </a:p>
+        </p:txBody>
+      </p:sp>
+      <p:sp>
+        <p:nvSpPr>
+          <p:cNvPr id="19" name="Text 15"/>
+          <p:cNvSpPr/>
+          <p:nvPr/>
+        </p:nvSpPr>
+        <p:spPr>
+          <a:xfrm>
+            <a:off x="4519879" y="3657600"/>
+            <a:ext cx="3063240" cy="960120"/>
+          </a:xfrm>
+          <a:prstGeom prst="rect">
+            <a:avLst/>
+          </a:prstGeom>
+          <a:noFill/>
+          <a:ln/>
+        </p:spPr>
+        <p:txBody>
+          <a:bodyPr wrap="square" lIns="0" tIns="0" rIns="0" bIns="0" rtlCol="0" anchor="ctr"/>
+          <a:lstStyle/>
+          <a:p>
+            <a:pPr rtl="1" algn="r" indent="0" marL="0">
+              <a:lnSpc>
+                <a:spcPct val="120000"/>
+              </a:lnSpc>
+              <a:buNone/>
+            </a:pPr>
+            <a:r>
+              <a:rPr lang="en-US" sz="1250" dirty="0">
+                <a:solidFill>
+                  <a:srgbClr val="5C6B72"/>
+                </a:solidFill>
+                <a:latin typeface="Calibri" pitchFamily="34" charset="0"/>
+                <a:ea typeface="Calibri" pitchFamily="34" charset="-122"/>
+                <a:cs typeface="Calibri" pitchFamily="34" charset="-120"/>
+              </a:rPr>
+              <a:t>בחירת מודל והיפר-פרמטרים (שיטת השילוב, k, α)</a:t>
+            </a:r>
+            <a:endParaRPr lang="en-US" sz="1250" dirty="0"/>
+          </a:p>
+        </p:txBody>
+      </p:sp>
+      <p:sp>
+        <p:nvSpPr>
+          <p:cNvPr id="20" name="Shape 16"/>
+          <p:cNvSpPr/>
+          <p:nvPr/>
+        </p:nvSpPr>
+        <p:spPr>
+          <a:xfrm>
+            <a:off x="459943" y="2286000"/>
+            <a:ext cx="3611880" cy="2468880"/>
+          </a:xfrm>
+          <a:prstGeom prst="roundRect">
+            <a:avLst>
+              <a:gd name="adj" fmla="val 2963"/>
+            </a:avLst>
+          </a:prstGeom>
+          <a:solidFill>
+            <a:srgbClr val="FFF4E8"/>
+          </a:solidFill>
+          <a:ln w="12700">
+            <a:solidFill>
+              <a:srgbClr val="DDE8E8"/>
+            </a:solidFill>
+            <a:prstDash val="solid"/>
+          </a:ln>
+          <a:effectLst>
+            <a:outerShdw sx="100000" sy="100000" kx="0" ky="0" algn="bl" rotWithShape="0" blurRad="76200" dist="25400" dir="5400000">
+              <a:srgbClr val="000000">
+                <a:alpha val="12000"/>
+              </a:srgbClr>
+            </a:outerShdw>
+          </a:effectLst>
+        </p:spPr>
+      </p:sp>
+      <p:sp>
+        <p:nvSpPr>
+          <p:cNvPr id="21" name="Shape 17"/>
+          <p:cNvSpPr/>
+          <p:nvPr/>
+        </p:nvSpPr>
+        <p:spPr>
+          <a:xfrm>
+            <a:off x="734263" y="2560320"/>
+            <a:ext cx="640080" cy="640080"/>
+          </a:xfrm>
+          <a:prstGeom prst="ellipse">
+            <a:avLst/>
+          </a:prstGeom>
+          <a:solidFill>
+            <a:srgbClr val="E0852F"/>
+          </a:solidFill>
+          <a:ln/>
+          <a:effectLst>
+            <a:outerShdw sx="100000" sy="100000" kx="0" ky="0" algn="bl" rotWithShape="0" blurRad="76200" dist="25400" dir="5400000">
+              <a:srgbClr val="000000">
+                <a:alpha val="12000"/>
+              </a:srgbClr>
+            </a:outerShdw>
+          </a:effectLst>
+        </p:spPr>
+      </p:sp>
+      <p:pic>
+        <p:nvPicPr>
+          <p:cNvPr id="22" name="Image 2" descr="preencoded.png">    </p:cNvPr>
+          <p:cNvPicPr>
+            <a:picLocks noChangeAspect="1"/>
+          </p:cNvPicPr>
+          <p:nvPr/>
+        </p:nvPicPr>
+        <p:blipFill>
+          <a:blip r:embed="rId3"/>
+          <a:stretch>
+            <a:fillRect/>
+          </a:stretch>
+        </p:blipFill>
+        <p:spPr>
+          <a:xfrm>
+            <a:off x="907085" y="2733142"/>
+            <a:ext cx="294437" cy="294437"/>
+          </a:xfrm>
+          <a:prstGeom prst="rect">
+            <a:avLst/>
+          </a:prstGeom>
+        </p:spPr>
+      </p:pic>
+      <p:sp>
+        <p:nvSpPr>
+          <p:cNvPr id="23" name="Text 18"/>
+          <p:cNvSpPr/>
+          <p:nvPr/>
+        </p:nvSpPr>
+        <p:spPr>
+          <a:xfrm>
+            <a:off x="1420063" y="2542032"/>
+            <a:ext cx="2423160" cy="411480"/>
+          </a:xfrm>
+          <a:prstGeom prst="rect">
+            <a:avLst/>
+          </a:prstGeom>
+          <a:noFill/>
+          <a:ln/>
+        </p:spPr>
+        <p:txBody>
+          <a:bodyPr wrap="square" lIns="0" tIns="0" rIns="0" bIns="0" rtlCol="0" anchor="ctr"/>
+          <a:lstStyle/>
+          <a:p>
+            <a:pPr rtl="1" algn="r" indent="0" marL="0">
+              <a:buNone/>
+            </a:pPr>
+            <a:r>
+              <a:rPr lang="en-US" sz="1700" b="1" dirty="0">
+                <a:solidFill>
+                  <a:srgbClr val="153139"/>
+                </a:solidFill>
+                <a:latin typeface="Cambria" pitchFamily="34" charset="0"/>
+                <a:ea typeface="Cambria" pitchFamily="34" charset="-122"/>
+                <a:cs typeface="Cambria" pitchFamily="34" charset="-120"/>
+              </a:rPr>
+              <a:t>טסט (מוחזק)</a:t>
+            </a:r>
+            <a:endParaRPr lang="en-US" sz="1700" dirty="0"/>
+          </a:p>
+        </p:txBody>
+      </p:sp>
+      <p:sp>
+        <p:nvSpPr>
+          <p:cNvPr id="24" name="Text 19"/>
+          <p:cNvSpPr/>
+          <p:nvPr/>
+        </p:nvSpPr>
+        <p:spPr>
+          <a:xfrm>
+            <a:off x="734263" y="3182112"/>
+            <a:ext cx="3063240" cy="365760"/>
+          </a:xfrm>
+          <a:prstGeom prst="rect">
+            <a:avLst/>
+          </a:prstGeom>
+          <a:noFill/>
+          <a:ln/>
+        </p:spPr>
+        <p:txBody>
+          <a:bodyPr wrap="square" lIns="0" tIns="0" rIns="0" bIns="0" rtlCol="0" anchor="ctr"/>
+          <a:lstStyle/>
+          <a:p>
+            <a:pPr rtl="1" algn="r" indent="0" marL="0">
+              <a:buNone/>
+            </a:pPr>
+            <a:r>
+              <a:rPr lang="en-US" sz="1500" b="1" dirty="0">
+                <a:solidFill>
+                  <a:srgbClr val="E0852F"/>
+                </a:solidFill>
+                <a:latin typeface="Cambria" pitchFamily="34" charset="0"/>
+                <a:ea typeface="Cambria" pitchFamily="34" charset="-122"/>
+                <a:cs typeface="Cambria" pitchFamily="34" charset="-120"/>
+              </a:rPr>
+              <a:t>26 שאלות · 65%</a:t>
+            </a:r>
+            <a:endParaRPr lang="en-US" sz="1500" dirty="0"/>
+          </a:p>
+        </p:txBody>
+      </p:sp>
+      <p:sp>
+        <p:nvSpPr>
+          <p:cNvPr id="25" name="Text 20"/>
+          <p:cNvSpPr/>
+          <p:nvPr/>
+        </p:nvSpPr>
+        <p:spPr>
+          <a:xfrm>
+            <a:off x="734263" y="3657600"/>
+            <a:ext cx="3063240" cy="960120"/>
+          </a:xfrm>
+          <a:prstGeom prst="rect">
+            <a:avLst/>
+          </a:prstGeom>
+          <a:noFill/>
+          <a:ln/>
+        </p:spPr>
+        <p:txBody>
+          <a:bodyPr wrap="square" lIns="0" tIns="0" rIns="0" bIns="0" rtlCol="0" anchor="ctr"/>
+          <a:lstStyle/>
+          <a:p>
+            <a:pPr rtl="1" algn="r" indent="0" marL="0">
+              <a:lnSpc>
+                <a:spcPct val="120000"/>
+              </a:lnSpc>
+              <a:buNone/>
+            </a:pPr>
+            <a:r>
+              <a:rPr lang="en-US" sz="1250" dirty="0">
+                <a:solidFill>
+                  <a:srgbClr val="5C6B72"/>
+                </a:solidFill>
+                <a:latin typeface="Calibri" pitchFamily="34" charset="0"/>
+                <a:ea typeface="Calibri" pitchFamily="34" charset="-122"/>
+                <a:cs typeface="Calibri" pitchFamily="34" charset="-120"/>
+              </a:rPr>
+              <a:t>מדדים סופיים ובלתי-מוטים — לא השפיעו על אף בחירה</a:t>
+            </a:r>
+            <a:endParaRPr lang="en-US" sz="1250" dirty="0"/>
+          </a:p>
+        </p:txBody>
+      </p:sp>
+      <p:sp>
+        <p:nvSpPr>
+          <p:cNvPr id="26" name="Shape 21"/>
+          <p:cNvSpPr/>
+          <p:nvPr/>
+        </p:nvSpPr>
+        <p:spPr>
+          <a:xfrm>
+            <a:off x="578815" y="5029200"/>
+            <a:ext cx="11064240" cy="914400"/>
+          </a:xfrm>
+          <a:prstGeom prst="roundRect">
+            <a:avLst>
+              <a:gd name="adj" fmla="val 8000"/>
+            </a:avLst>
+          </a:prstGeom>
+          <a:solidFill>
+            <a:srgbClr val="0B3B45"/>
+          </a:solidFill>
+          <a:ln w="12700">
+            <a:solidFill>
+              <a:srgbClr val="DDE8E8"/>
+            </a:solidFill>
+            <a:prstDash val="solid"/>
+          </a:ln>
+          <a:effectLst>
+            <a:outerShdw sx="100000" sy="100000" kx="0" ky="0" algn="bl" rotWithShape="0" blurRad="76200" dist="25400" dir="5400000">
+              <a:srgbClr val="000000">
+                <a:alpha val="12000"/>
+              </a:srgbClr>
+            </a:outerShdw>
+          </a:effectLst>
+        </p:spPr>
+      </p:sp>
+      <p:sp>
+        <p:nvSpPr>
+          <p:cNvPr id="27" name="Text 22"/>
+          <p:cNvSpPr/>
+          <p:nvPr/>
+        </p:nvSpPr>
+        <p:spPr>
+          <a:xfrm>
+            <a:off x="761695" y="5029200"/>
+            <a:ext cx="10881360" cy="914400"/>
+          </a:xfrm>
+          <a:prstGeom prst="rect">
+            <a:avLst/>
+          </a:prstGeom>
+          <a:noFill/>
+          <a:ln/>
+        </p:spPr>
+        <p:txBody>
+          <a:bodyPr wrap="square" lIns="3175" tIns="3175" rIns="3175" bIns="3175" rtlCol="0" anchor="ctr"/>
+          <a:lstStyle/>
+          <a:p>
+            <a:pPr algn="r" indent="0" marL="0">
+              <a:buNone/>
+            </a:pPr>
+            <a:r>
+              <a:rPr lang="en-US" sz="1400" b="1" dirty="0">
+                <a:solidFill>
+                  <a:srgbClr val="FFFFFF"/>
+                </a:solidFill>
+                <a:latin typeface="Calibri" pitchFamily="34" charset="0"/>
+                <a:ea typeface="Calibri" pitchFamily="34" charset="-122"/>
+                <a:cs typeface="Calibri" pitchFamily="34" charset="-120"/>
+              </a:rPr>
+              <a:t>על הטסט המוחזק (26 שאלות) — MRR:   </a:t>
+            </a:r>
+            <a:pPr algn="r" indent="0" marL="0">
+              <a:buNone/>
+            </a:pPr>
+            <a:r>
+              <a:rPr lang="en-US" sz="1400" dirty="0">
+                <a:solidFill>
+                  <a:srgbClr val="CFE6E4"/>
+                </a:solidFill>
+                <a:latin typeface="Calibri" pitchFamily="34" charset="0"/>
+                <a:ea typeface="Calibri" pitchFamily="34" charset="-122"/>
+                <a:cs typeface="Calibri" pitchFamily="34" charset="-120"/>
+              </a:rPr>
+              <a:t>Hybrid-RRF 0.690 · Hybrid-wtd 0.659 · BM25 0.606 · TF-IDF 0.603 · AlephBERT 0.585</a:t>
+            </a:r>
+            <a:endParaRPr lang="en-US" sz="1400" dirty="0"/>
+          </a:p>
+        </p:txBody>
+      </p:sp>
+      <p:sp>
+        <p:nvSpPr>
+          <p:cNvPr id="28" name="Text 23"/>
+          <p:cNvSpPr/>
+          <p:nvPr/>
+        </p:nvSpPr>
+        <p:spPr>
+          <a:xfrm>
+            <a:off x="578815" y="6053328"/>
+            <a:ext cx="11064240" cy="320040"/>
+          </a:xfrm>
+          <a:prstGeom prst="rect">
+            <a:avLst/>
+          </a:prstGeom>
+          <a:noFill/>
+          <a:ln/>
+        </p:spPr>
+        <p:txBody>
+          <a:bodyPr wrap="square" lIns="0" tIns="0" rIns="0" bIns="0" rtlCol="0" anchor="ctr"/>
+          <a:lstStyle/>
+          <a:p>
+            <a:pPr rtl="1" algn="r" indent="0" marL="0">
+              <a:buNone/>
+            </a:pPr>
+            <a:r>
+              <a:rPr lang="en-US" sz="1200" i="1" dirty="0">
+                <a:solidFill>
+                  <a:srgbClr val="0E8A8F"/>
+                </a:solidFill>
+                <a:latin typeface="Calibri" pitchFamily="34" charset="0"/>
+                <a:ea typeface="Calibri" pitchFamily="34" charset="-122"/>
+                <a:cs typeface="Calibri" pitchFamily="34" charset="-120"/>
+              </a:rPr>
+              <a:t>היתרון של ההיברידי נשמר — ואף גדל — על שאלות שלא השתתפו בשום בחירה.</a:t>
+            </a:r>
+            <a:endParaRPr lang="en-US" sz="1200" dirty="0"/>
+          </a:p>
+        </p:txBody>
+      </p:sp>
+    </p:spTree>
+  </p:cSld>
+  <p:clrMapOvr>
+    <a:masterClrMapping/>
+  </p:clrMapOvr>
+</p:sld>
+</file>
+
+<file path=ppt/slides/slide13.xml><?xml version="1.0" encoding="utf-8"?>
+<p:sld xmlns:a="http://schemas.openxmlformats.org/drawingml/2006/main" xmlns:r="http://schemas.openxmlformats.org/officeDocument/2006/relationships" xmlns:p="http://schemas.openxmlformats.org/presentationml/2006/main">
+  <p:cSld name="Slide 13">
+    <p:bg>
+      <p:bgPr>
+        <a:solidFill>
+          <a:srgbClr val="FFFFFF"/>
+        </a:solidFill>
+      </p:bgPr>
+    </p:bg>
+    <p:spTree>
+      <p:nvGrpSpPr>
+        <p:cNvPr id="1" name=""/>
+        <p:cNvGrpSpPr/>
+        <p:nvPr/>
+      </p:nvGrpSpPr>
+      <p:grpSpPr>
+        <a:xfrm>
+          <a:off x="0" y="0"/>
+          <a:ext cx="0" cy="0"/>
+          <a:chOff x="0" y="0"/>
+          <a:chExt cx="0" cy="0"/>
+        </a:xfrm>
+      </p:grpSpPr>
+      <p:sp>
+        <p:nvSpPr>
+          <p:cNvPr id="2" name="Shape 0"/>
+          <p:cNvSpPr/>
+          <p:nvPr/>
+        </p:nvSpPr>
+        <p:spPr>
+          <a:xfrm>
+            <a:off x="11313871" y="457200"/>
+            <a:ext cx="310896" cy="310896"/>
+          </a:xfrm>
+          <a:prstGeom prst="ellipse">
+            <a:avLst/>
+          </a:prstGeom>
+          <a:ln w="25400">
+            <a:solidFill>
+              <a:srgbClr val="0E8A8F"/>
+            </a:solidFill>
+            <a:prstDash val="solid"/>
+          </a:ln>
+        </p:spPr>
+      </p:sp>
+      <p:sp>
+        <p:nvSpPr>
+          <p:cNvPr id="3" name="Shape 1"/>
+          <p:cNvSpPr/>
+          <p:nvPr/>
+        </p:nvSpPr>
+        <p:spPr>
+          <a:xfrm>
+            <a:off x="11414455" y="557784"/>
+            <a:ext cx="109728" cy="109728"/>
+          </a:xfrm>
+          <a:prstGeom prst="ellipse">
+            <a:avLst/>
+          </a:prstGeom>
+          <a:solidFill>
+            <a:srgbClr val="0E8A8F"/>
+          </a:solidFill>
+          <a:ln/>
+        </p:spPr>
+      </p:sp>
+      <p:sp>
+        <p:nvSpPr>
+          <p:cNvPr id="4" name="Text 2"/>
+          <p:cNvSpPr/>
+          <p:nvPr/>
+        </p:nvSpPr>
+        <p:spPr>
+          <a:xfrm>
+            <a:off x="2060143" y="420624"/>
+            <a:ext cx="9144000" cy="274320"/>
+          </a:xfrm>
+          <a:prstGeom prst="rect">
+            <a:avLst/>
+          </a:prstGeom>
+          <a:noFill/>
+          <a:ln/>
+        </p:spPr>
+        <p:txBody>
+          <a:bodyPr wrap="square" lIns="0" tIns="0" rIns="0" bIns="0" rtlCol="0" anchor="ctr"/>
+          <a:lstStyle/>
+          <a:p>
+            <a:pPr rtl="1" algn="r" indent="0" marL="0">
+              <a:buNone/>
+            </a:pPr>
+            <a:r>
+              <a:rPr lang="en-US" sz="1200" b="1" spc="100" kern="0" dirty="0">
+                <a:solidFill>
+                  <a:srgbClr val="0E8A8F"/>
+                </a:solidFill>
+                <a:latin typeface="Calibri" pitchFamily="34" charset="0"/>
+                <a:ea typeface="Calibri" pitchFamily="34" charset="-122"/>
+                <a:cs typeface="Calibri" pitchFamily="34" charset="-120"/>
+              </a:rPr>
+              <a:t>תוצאות</a:t>
+            </a:r>
+            <a:endParaRPr lang="en-US" sz="1200" dirty="0"/>
+          </a:p>
+        </p:txBody>
+      </p:sp>
+      <p:sp>
+        <p:nvSpPr>
+          <p:cNvPr id="5" name="Text 3"/>
+          <p:cNvSpPr/>
+          <p:nvPr/>
+        </p:nvSpPr>
+        <p:spPr>
+          <a:xfrm>
+            <a:off x="578815" y="713232"/>
+            <a:ext cx="11064240" cy="640080"/>
+          </a:xfrm>
+          <a:prstGeom prst="rect">
+            <a:avLst/>
+          </a:prstGeom>
+          <a:noFill/>
+          <a:ln/>
+        </p:spPr>
+        <p:txBody>
+          <a:bodyPr wrap="square" lIns="0" tIns="0" rIns="0" bIns="0" rtlCol="0" anchor="ctr"/>
+          <a:lstStyle/>
+          <a:p>
+            <a:pPr rtl="1" algn="r" indent="0" marL="0">
+              <a:buNone/>
+            </a:pPr>
+            <a:r>
+              <a:rPr lang="en-US" sz="3000" b="1" dirty="0">
+                <a:solidFill>
+                  <a:srgbClr val="153139"/>
+                </a:solidFill>
+                <a:latin typeface="Cambria" pitchFamily="34" charset="0"/>
+                <a:ea typeface="Cambria" pitchFamily="34" charset="-122"/>
+                <a:cs typeface="Cambria" pitchFamily="34" charset="-120"/>
+              </a:rPr>
+              <a:t>השוואת חמשת המודלים</a:t>
+            </a:r>
+            <a:endParaRPr lang="en-US" sz="3000" dirty="0"/>
+          </a:p>
+        </p:txBody>
+      </p:sp>
+      <p:sp>
+        <p:nvSpPr>
+          <p:cNvPr id="6" name="Text 4"/>
+          <p:cNvSpPr/>
+          <p:nvPr/>
+        </p:nvSpPr>
+        <p:spPr>
+          <a:xfrm>
+            <a:off x="121615" y="6400800"/>
+            <a:ext cx="457200" cy="274320"/>
+          </a:xfrm>
+          <a:prstGeom prst="rect">
+            <a:avLst/>
+          </a:prstGeom>
+          <a:noFill/>
+          <a:ln/>
+        </p:spPr>
+        <p:txBody>
+          <a:bodyPr wrap="square" lIns="0" tIns="0" rIns="0" bIns="0" rtlCol="0" anchor="ctr"/>
+          <a:lstStyle/>
+          <a:p>
+            <a:pPr rtl="1" algn="r" indent="0" marL="0">
+              <a:buNone/>
+            </a:pPr>
+            <a:r>
+              <a:rPr lang="en-US" sz="1000" dirty="0">
+                <a:solidFill>
+                  <a:srgbClr val="5C6B72"/>
+                </a:solidFill>
+                <a:latin typeface="Calibri" pitchFamily="34" charset="0"/>
+                <a:ea typeface="Calibri" pitchFamily="34" charset="-122"/>
+                <a:cs typeface="Calibri" pitchFamily="34" charset="-120"/>
+              </a:rPr>
+              <a:t>11</a:t>
             </a:r>
             <a:endParaRPr lang="en-US" sz="1000" dirty="0"/>
           </a:p>
@@ -5937,7 +7029,7 @@
       </p:graphicFrame>
       <p:graphicFrame>
         <p:nvGraphicFramePr>
-          <p:cNvPr id="13" name="Table 0"/>
+          <p:cNvPr id="14" name="Table 0"/>
           <p:cNvGraphicFramePr>
             <a:graphicFrameLocks noGrp="1"/>
           </p:cNvGraphicFramePr>
@@ -8874,9 +9966,9 @@
 </p:sld>
 </file>
 
-<file path=ppt/slides/slide13.xml><?xml version="1.0" encoding="utf-8"?>
+<file path=ppt/slides/slide14.xml><?xml version="1.0" encoding="utf-8"?>
 <p:sld xmlns:a="http://schemas.openxmlformats.org/drawingml/2006/main" xmlns:r="http://schemas.openxmlformats.org/officeDocument/2006/relationships" xmlns:p="http://schemas.openxmlformats.org/presentationml/2006/main">
-  <p:cSld name="Slide 13">
+  <p:cSld name="Slide 14">
     <p:bg>
       <p:bgPr>
         <a:solidFill>
@@ -9549,7 +10641,7 @@
                 <a:ea typeface="Calibri" pitchFamily="34" charset="-122"/>
                 <a:cs typeface="Calibri" pitchFamily="34" charset="-120"/>
               </a:rPr>
-              <a:t>11</a:t>
+              <a:t>12</a:t>
             </a:r>
             <a:endParaRPr lang="en-US" sz="1000" dirty="0"/>
           </a:p>
@@ -9563,9 +10655,9 @@
 </p:sld>
 </file>
 
-<file path=ppt/slides/slide14.xml><?xml version="1.0" encoding="utf-8"?>
+<file path=ppt/slides/slide15.xml><?xml version="1.0" encoding="utf-8"?>
 <p:sld xmlns:a="http://schemas.openxmlformats.org/drawingml/2006/main" xmlns:r="http://schemas.openxmlformats.org/officeDocument/2006/relationships" xmlns:p="http://schemas.openxmlformats.org/presentationml/2006/main">
-  <p:cSld name="Slide 14">
+  <p:cSld name="Slide 15">
     <p:bg>
       <p:bgPr>
         <a:solidFill>
@@ -9740,7 +10832,7 @@
                 <a:ea typeface="Calibri" pitchFamily="34" charset="-122"/>
                 <a:cs typeface="Calibri" pitchFamily="34" charset="-120"/>
               </a:rPr>
-              <a:t>12</a:t>
+              <a:t>13</a:t>
             </a:r>
             <a:endParaRPr lang="en-US" sz="1000" dirty="0"/>
           </a:p>
@@ -9842,7 +10934,7 @@
       </p:sp>
       <p:graphicFrame>
         <p:nvGraphicFramePr>
-          <p:cNvPr id="15" name="Table 0"/>
+          <p:cNvPr id="16" name="Table 0"/>
           <p:cNvGraphicFramePr>
             <a:graphicFrameLocks noGrp="1"/>
           </p:cNvGraphicFramePr>
@@ -11376,466 +12468,6 @@
 </p:sld>
 </file>
 
-<file path=ppt/slides/slide15.xml><?xml version="1.0" encoding="utf-8"?>
-<p:sld xmlns:a="http://schemas.openxmlformats.org/drawingml/2006/main" xmlns:r="http://schemas.openxmlformats.org/officeDocument/2006/relationships" xmlns:p="http://schemas.openxmlformats.org/presentationml/2006/main">
-  <p:cSld name="Slide 15">
-    <p:bg>
-      <p:bgPr>
-        <a:solidFill>
-          <a:srgbClr val="FFFFFF"/>
-        </a:solidFill>
-      </p:bgPr>
-    </p:bg>
-    <p:spTree>
-      <p:nvGrpSpPr>
-        <p:cNvPr id="1" name=""/>
-        <p:cNvGrpSpPr/>
-        <p:nvPr/>
-      </p:nvGrpSpPr>
-      <p:grpSpPr>
-        <a:xfrm>
-          <a:off x="0" y="0"/>
-          <a:ext cx="0" cy="0"/>
-          <a:chOff x="0" y="0"/>
-          <a:chExt cx="0" cy="0"/>
-        </a:xfrm>
-      </p:grpSpPr>
-      <p:sp>
-        <p:nvSpPr>
-          <p:cNvPr id="2" name="Shape 0"/>
-          <p:cNvSpPr/>
-          <p:nvPr/>
-        </p:nvSpPr>
-        <p:spPr>
-          <a:xfrm>
-            <a:off x="11313871" y="457200"/>
-            <a:ext cx="310896" cy="310896"/>
-          </a:xfrm>
-          <a:prstGeom prst="ellipse">
-            <a:avLst/>
-          </a:prstGeom>
-          <a:ln w="25400">
-            <a:solidFill>
-              <a:srgbClr val="0E8A8F"/>
-            </a:solidFill>
-            <a:prstDash val="solid"/>
-          </a:ln>
-        </p:spPr>
-      </p:sp>
-      <p:sp>
-        <p:nvSpPr>
-          <p:cNvPr id="3" name="Shape 1"/>
-          <p:cNvSpPr/>
-          <p:nvPr/>
-        </p:nvSpPr>
-        <p:spPr>
-          <a:xfrm>
-            <a:off x="11414455" y="557784"/>
-            <a:ext cx="109728" cy="109728"/>
-          </a:xfrm>
-          <a:prstGeom prst="ellipse">
-            <a:avLst/>
-          </a:prstGeom>
-          <a:solidFill>
-            <a:srgbClr val="0E8A8F"/>
-          </a:solidFill>
-          <a:ln/>
-        </p:spPr>
-      </p:sp>
-      <p:sp>
-        <p:nvSpPr>
-          <p:cNvPr id="4" name="Text 2"/>
-          <p:cNvSpPr/>
-          <p:nvPr/>
-        </p:nvSpPr>
-        <p:spPr>
-          <a:xfrm>
-            <a:off x="2060143" y="420624"/>
-            <a:ext cx="9144000" cy="274320"/>
-          </a:xfrm>
-          <a:prstGeom prst="rect">
-            <a:avLst/>
-          </a:prstGeom>
-          <a:noFill/>
-          <a:ln/>
-        </p:spPr>
-        <p:txBody>
-          <a:bodyPr wrap="square" lIns="0" tIns="0" rIns="0" bIns="0" rtlCol="0" anchor="ctr"/>
-          <a:lstStyle/>
-          <a:p>
-            <a:pPr rtl="1" algn="r" indent="0" marL="0">
-              <a:buNone/>
-            </a:pPr>
-            <a:r>
-              <a:rPr lang="en-US" sz="1200" b="1" spc="100" kern="0" dirty="0">
-                <a:solidFill>
-                  <a:srgbClr val="0E8A8F"/>
-                </a:solidFill>
-                <a:latin typeface="Calibri" pitchFamily="34" charset="0"/>
-                <a:ea typeface="Calibri" pitchFamily="34" charset="-122"/>
-                <a:cs typeface="Calibri" pitchFamily="34" charset="-120"/>
-              </a:rPr>
-              <a:t>תוצאות · לכל שאילתה</a:t>
-            </a:r>
-            <a:endParaRPr lang="en-US" sz="1200" dirty="0"/>
-          </a:p>
-        </p:txBody>
-      </p:sp>
-      <p:sp>
-        <p:nvSpPr>
-          <p:cNvPr id="5" name="Text 3"/>
-          <p:cNvSpPr/>
-          <p:nvPr/>
-        </p:nvSpPr>
-        <p:spPr>
-          <a:xfrm>
-            <a:off x="578815" y="713232"/>
-            <a:ext cx="11064240" cy="640080"/>
-          </a:xfrm>
-          <a:prstGeom prst="rect">
-            <a:avLst/>
-          </a:prstGeom>
-          <a:noFill/>
-          <a:ln/>
-        </p:spPr>
-        <p:txBody>
-          <a:bodyPr wrap="square" lIns="0" tIns="0" rIns="0" bIns="0" rtlCol="0" anchor="ctr"/>
-          <a:lstStyle/>
-          <a:p>
-            <a:pPr rtl="1" algn="r" indent="0" marL="0">
-              <a:buNone/>
-            </a:pPr>
-            <a:r>
-              <a:rPr lang="en-US" sz="3000" b="1" dirty="0">
-                <a:solidFill>
-                  <a:srgbClr val="153139"/>
-                </a:solidFill>
-                <a:latin typeface="Cambria" pitchFamily="34" charset="0"/>
-                <a:ea typeface="Cambria" pitchFamily="34" charset="-122"/>
-                <a:cs typeface="Cambria" pitchFamily="34" charset="-120"/>
-              </a:rPr>
-              <a:t>היכן כל מודל מנצח, שאלה אחר שאלה</a:t>
-            </a:r>
-            <a:endParaRPr lang="en-US" sz="3000" dirty="0"/>
-          </a:p>
-        </p:txBody>
-      </p:sp>
-      <p:sp>
-        <p:nvSpPr>
-          <p:cNvPr id="6" name="Text 4"/>
-          <p:cNvSpPr/>
-          <p:nvPr/>
-        </p:nvSpPr>
-        <p:spPr>
-          <a:xfrm>
-            <a:off x="121615" y="6400800"/>
-            <a:ext cx="457200" cy="274320"/>
-          </a:xfrm>
-          <a:prstGeom prst="rect">
-            <a:avLst/>
-          </a:prstGeom>
-          <a:noFill/>
-          <a:ln/>
-        </p:spPr>
-        <p:txBody>
-          <a:bodyPr wrap="square" lIns="0" tIns="0" rIns="0" bIns="0" rtlCol="0" anchor="ctr"/>
-          <a:lstStyle/>
-          <a:p>
-            <a:pPr rtl="1" algn="r" indent="0" marL="0">
-              <a:buNone/>
-            </a:pPr>
-            <a:r>
-              <a:rPr lang="en-US" sz="1000" dirty="0">
-                <a:solidFill>
-                  <a:srgbClr val="5C6B72"/>
-                </a:solidFill>
-                <a:latin typeface="Calibri" pitchFamily="34" charset="0"/>
-                <a:ea typeface="Calibri" pitchFamily="34" charset="-122"/>
-                <a:cs typeface="Calibri" pitchFamily="34" charset="-120"/>
-              </a:rPr>
-              <a:t>13</a:t>
-            </a:r>
-            <a:endParaRPr lang="en-US" sz="1000" dirty="0"/>
-          </a:p>
-        </p:txBody>
-      </p:sp>
-      <p:pic>
-        <p:nvPicPr>
-          <p:cNvPr id="7" name="Image 0" descr="results/figures/winloss_heatmap.png">    </p:cNvPr>
-          <p:cNvPicPr>
-            <a:picLocks noChangeAspect="1"/>
-          </p:cNvPicPr>
-          <p:nvPr/>
-        </p:nvPicPr>
-        <p:blipFill>
-          <a:blip r:embed="rId1"/>
-          <a:stretch>
-            <a:fillRect/>
-          </a:stretch>
-        </p:blipFill>
-        <p:spPr>
-          <a:xfrm>
-            <a:off x="1467607" y="1554480"/>
-            <a:ext cx="2494488" cy="5120640"/>
-          </a:xfrm>
-          <a:prstGeom prst="rect">
-            <a:avLst/>
-          </a:prstGeom>
-        </p:spPr>
-      </p:pic>
-      <p:sp>
-        <p:nvSpPr>
-          <p:cNvPr id="8" name="Shape 5"/>
-          <p:cNvSpPr/>
-          <p:nvPr/>
-        </p:nvSpPr>
-        <p:spPr>
-          <a:xfrm>
-            <a:off x="5150815" y="1920240"/>
-            <a:ext cx="6492240" cy="3566160"/>
-          </a:xfrm>
-          <a:prstGeom prst="roundRect">
-            <a:avLst>
-              <a:gd name="adj" fmla="val 2051"/>
-            </a:avLst>
-          </a:prstGeom>
-          <a:solidFill>
-            <a:srgbClr val="F4F9F9"/>
-          </a:solidFill>
-          <a:ln w="12700">
-            <a:solidFill>
-              <a:srgbClr val="DDE8E8"/>
-            </a:solidFill>
-            <a:prstDash val="solid"/>
-          </a:ln>
-          <a:effectLst>
-            <a:outerShdw sx="100000" sy="100000" kx="0" ky="0" algn="bl" rotWithShape="0" blurRad="76200" dist="25400" dir="5400000">
-              <a:srgbClr val="000000">
-                <a:alpha val="12000"/>
-              </a:srgbClr>
-            </a:outerShdw>
-          </a:effectLst>
-        </p:spPr>
-      </p:sp>
-      <p:sp>
-        <p:nvSpPr>
-          <p:cNvPr id="9" name="Text 6"/>
-          <p:cNvSpPr/>
-          <p:nvPr/>
-        </p:nvSpPr>
-        <p:spPr>
-          <a:xfrm>
-            <a:off x="5516575" y="2148840"/>
-            <a:ext cx="5760720" cy="457200"/>
-          </a:xfrm>
-          <a:prstGeom prst="rect">
-            <a:avLst/>
-          </a:prstGeom>
-          <a:noFill/>
-          <a:ln/>
-        </p:spPr>
-        <p:txBody>
-          <a:bodyPr wrap="square" lIns="0" tIns="0" rIns="0" bIns="0" rtlCol="0" anchor="ctr"/>
-          <a:lstStyle/>
-          <a:p>
-            <a:pPr rtl="1" algn="r" indent="0" marL="0">
-              <a:buNone/>
-            </a:pPr>
-            <a:r>
-              <a:rPr lang="en-US" sz="1800" b="1" dirty="0">
-                <a:solidFill>
-                  <a:srgbClr val="153139"/>
-                </a:solidFill>
-                <a:latin typeface="Cambria" pitchFamily="34" charset="0"/>
-                <a:ea typeface="Cambria" pitchFamily="34" charset="-122"/>
-                <a:cs typeface="Cambria" pitchFamily="34" charset="-120"/>
-              </a:rPr>
-              <a:t>כיצד לקרוא את מפת החום</a:t>
-            </a:r>
-            <a:endParaRPr lang="en-US" sz="1800" dirty="0"/>
-          </a:p>
-        </p:txBody>
-      </p:sp>
-      <p:sp>
-        <p:nvSpPr>
-          <p:cNvPr id="10" name="Text 7"/>
-          <p:cNvSpPr/>
-          <p:nvPr/>
-        </p:nvSpPr>
-        <p:spPr>
-          <a:xfrm>
-            <a:off x="5425135" y="2788920"/>
-            <a:ext cx="5943600" cy="2377440"/>
-          </a:xfrm>
-          <a:prstGeom prst="rect">
-            <a:avLst/>
-          </a:prstGeom>
-          <a:noFill/>
-          <a:ln/>
-        </p:spPr>
-        <p:txBody>
-          <a:bodyPr wrap="square" lIns="0" tIns="0" rIns="0" bIns="0" rtlCol="0" anchor="ctr"/>
-          <a:lstStyle/>
-          <a:p>
-            <a:pPr algn="r" marL="342900" indent="-342900">
-              <a:lnSpc>
-                <a:spcPct val="130000"/>
-              </a:lnSpc>
-              <a:buSzPct val="100000"/>
-              <a:buChar char="•"/>
-            </a:pPr>
-            <a:r>
-              <a:rPr lang="en-US" sz="1450" dirty="0">
-                <a:solidFill>
-                  <a:srgbClr val="153139"/>
-                </a:solidFill>
-                <a:latin typeface="Calibri" pitchFamily="34" charset="0"/>
-                <a:ea typeface="Calibri" pitchFamily="34" charset="-122"/>
-                <a:cs typeface="Calibri" pitchFamily="34" charset="-120"/>
-              </a:rPr>
-              <a:t>כל שורה היא אחת מ-40 השאלות; הצבע = דירוג המסמך הנכון הראשון (ירוק = למעלה, אדום = עמוק, אפור = הוחמץ).</a:t>
-            </a:r>
-            <a:endParaRPr lang="en-US" sz="1450" dirty="0"/>
-          </a:p>
-          <a:p>
-            <a:pPr algn="r" marL="342900" indent="-342900">
-              <a:lnSpc>
-                <a:spcPct val="130000"/>
-              </a:lnSpc>
-              <a:buSzPct val="100000"/>
-              <a:buChar char="•"/>
-            </a:pPr>
-            <a:r>
-              <a:rPr lang="en-US" sz="1450" dirty="0">
-                <a:solidFill>
-                  <a:srgbClr val="153139"/>
-                </a:solidFill>
-                <a:latin typeface="Calibri" pitchFamily="34" charset="0"/>
-                <a:ea typeface="Calibri" pitchFamily="34" charset="-122"/>
-                <a:cs typeface="Calibri" pitchFamily="34" charset="-120"/>
-              </a:rPr>
-              <a:t>ירוקים ואפורים מתחלפים בין העמודות — המודלים מצליחים ונכשלים בשאלות שונות.</a:t>
-            </a:r>
-            <a:endParaRPr lang="en-US" sz="1450" dirty="0"/>
-          </a:p>
-          <a:p>
-            <a:pPr algn="r" marL="342900" indent="-342900">
-              <a:lnSpc>
-                <a:spcPct val="130000"/>
-              </a:lnSpc>
-              <a:buSzPct val="100000"/>
-              <a:buChar char="•"/>
-            </a:pPr>
-            <a:r>
-              <a:rPr lang="en-US" sz="1450" dirty="0">
-                <a:solidFill>
-                  <a:srgbClr val="153139"/>
-                </a:solidFill>
-                <a:latin typeface="Calibri" pitchFamily="34" charset="0"/>
-                <a:ea typeface="Calibri" pitchFamily="34" charset="-122"/>
-                <a:cs typeface="Calibri" pitchFamily="34" charset="-120"/>
-              </a:rPr>
-              <a:t>אי-ההסכמה הזו היא בדיוק מה שהופך את השילוב למשתלם.</a:t>
-            </a:r>
-            <a:endParaRPr lang="en-US" sz="1450" dirty="0"/>
-          </a:p>
-        </p:txBody>
-      </p:sp>
-      <p:sp>
-        <p:nvSpPr>
-          <p:cNvPr id="11" name="Shape 8"/>
-          <p:cNvSpPr/>
-          <p:nvPr/>
-        </p:nvSpPr>
-        <p:spPr>
-          <a:xfrm>
-            <a:off x="5150815" y="5669280"/>
-            <a:ext cx="6492240" cy="777240"/>
-          </a:xfrm>
-          <a:prstGeom prst="roundRect">
-            <a:avLst>
-              <a:gd name="adj" fmla="val 9412"/>
-            </a:avLst>
-          </a:prstGeom>
-          <a:solidFill>
-            <a:srgbClr val="0B3B45"/>
-          </a:solidFill>
-          <a:ln w="12700">
-            <a:solidFill>
-              <a:srgbClr val="DDE8E8"/>
-            </a:solidFill>
-            <a:prstDash val="solid"/>
-          </a:ln>
-          <a:effectLst>
-            <a:outerShdw sx="100000" sy="100000" kx="0" ky="0" algn="bl" rotWithShape="0" blurRad="76200" dist="25400" dir="5400000">
-              <a:srgbClr val="000000">
-                <a:alpha val="12000"/>
-              </a:srgbClr>
-            </a:outerShdw>
-          </a:effectLst>
-        </p:spPr>
-      </p:sp>
-      <p:sp>
-        <p:nvSpPr>
-          <p:cNvPr id="12" name="Text 9"/>
-          <p:cNvSpPr/>
-          <p:nvPr/>
-        </p:nvSpPr>
-        <p:spPr>
-          <a:xfrm>
-            <a:off x="5379415" y="5669280"/>
-            <a:ext cx="6035040" cy="777240"/>
-          </a:xfrm>
-          <a:prstGeom prst="rect">
-            <a:avLst/>
-          </a:prstGeom>
-          <a:noFill/>
-          <a:ln/>
-        </p:spPr>
-        <p:txBody>
-          <a:bodyPr wrap="square" lIns="0" tIns="0" rIns="0" bIns="0" rtlCol="0" anchor="ctr"/>
-          <a:lstStyle/>
-          <a:p>
-            <a:pPr algn="r" indent="0" marL="0">
-              <a:buNone/>
-            </a:pPr>
-            <a:r>
-              <a:rPr lang="en-US" sz="1400" dirty="0">
-                <a:solidFill>
-                  <a:srgbClr val="CFE6E4"/>
-                </a:solidFill>
-                <a:latin typeface="Calibri" pitchFamily="34" charset="0"/>
-                <a:ea typeface="Calibri" pitchFamily="34" charset="-122"/>
-                <a:cs typeface="Calibri" pitchFamily="34" charset="-120"/>
-              </a:rPr>
-              <a:t>החטאות (מסמך האמת לא ב-top-10):   </a:t>
-            </a:r>
-            <a:pPr algn="r" indent="0" marL="0">
-              <a:buNone/>
-            </a:pPr>
-            <a:r>
-              <a:rPr lang="en-US" sz="1400" b="1" dirty="0">
-                <a:solidFill>
-                  <a:srgbClr val="FFFFFF"/>
-                </a:solidFill>
-                <a:latin typeface="Calibri" pitchFamily="34" charset="0"/>
-                <a:ea typeface="Calibri" pitchFamily="34" charset="-122"/>
-                <a:cs typeface="Calibri" pitchFamily="34" charset="-120"/>
-              </a:rPr>
-              <a:t>TF-IDF 6   ·   AlephBERT 9   ·   היברידי 5</a:t>
-            </a:r>
-            <a:endParaRPr lang="en-US" sz="1400" dirty="0"/>
-          </a:p>
-        </p:txBody>
-      </p:sp>
-    </p:spTree>
-  </p:cSld>
-  <p:clrMapOvr>
-    <a:masterClrMapping/>
-  </p:clrMapOvr>
-</p:sld>
-</file>
-
 <file path=ppt/slides/slide16.xml><?xml version="1.0" encoding="utf-8"?>
 <p:sld xmlns:a="http://schemas.openxmlformats.org/drawingml/2006/main" xmlns:r="http://schemas.openxmlformats.org/officeDocument/2006/relationships" xmlns:p="http://schemas.openxmlformats.org/presentationml/2006/main">
   <p:cSld name="Slide 16">
@@ -11935,7 +12567,7 @@
                 <a:ea typeface="Calibri" pitchFamily="34" charset="-122"/>
                 <a:cs typeface="Calibri" pitchFamily="34" charset="-120"/>
               </a:rPr>
-              <a:t>ניתוח שגיאות</a:t>
+              <a:t>תוצאות · לכל שאילתה</a:t>
             </a:r>
             <a:endParaRPr lang="en-US" sz="1200" dirty="0"/>
           </a:p>
@@ -11974,7 +12606,7 @@
                 <a:ea typeface="Cambria" pitchFamily="34" charset="-122"/>
                 <a:cs typeface="Cambria" pitchFamily="34" charset="-120"/>
               </a:rPr>
-              <a:t>שלוש תבניות, דוגמאות אמיתיות</a:t>
+              <a:t>היכן כל מודל מנצח, שאלה אחר שאלה</a:t>
             </a:r>
             <a:endParaRPr lang="en-US" sz="3000" dirty="0"/>
           </a:p>
@@ -12019,20 +12651,44 @@
           </a:p>
         </p:txBody>
       </p:sp>
-      <p:sp>
-        <p:nvSpPr>
-          <p:cNvPr id="7" name="Shape 5"/>
-          <p:cNvSpPr/>
-          <p:nvPr/>
-        </p:nvSpPr>
-        <p:spPr>
-          <a:xfrm>
-            <a:off x="578815" y="1691640"/>
-            <a:ext cx="11064240" cy="1371600"/>
+      <p:pic>
+        <p:nvPicPr>
+          <p:cNvPr id="7" name="Image 0" descr="results/figures/winloss_heatmap.png">    </p:cNvPr>
+          <p:cNvPicPr>
+            <a:picLocks noChangeAspect="1"/>
+          </p:cNvPicPr>
+          <p:nvPr/>
+        </p:nvPicPr>
+        <p:blipFill>
+          <a:blip r:embed="rId1"/>
+          <a:stretch>
+            <a:fillRect/>
+          </a:stretch>
+        </p:blipFill>
+        <p:spPr>
+          <a:xfrm>
+            <a:off x="1467607" y="1554480"/>
+            <a:ext cx="2494488" cy="5120640"/>
+          </a:xfrm>
+          <a:prstGeom prst="rect">
+            <a:avLst/>
+          </a:prstGeom>
+        </p:spPr>
+      </p:pic>
+      <p:sp>
+        <p:nvSpPr>
+          <p:cNvPr id="8" name="Shape 5"/>
+          <p:cNvSpPr/>
+          <p:nvPr/>
+        </p:nvSpPr>
+        <p:spPr>
+          <a:xfrm>
+            <a:off x="5150815" y="1920240"/>
+            <a:ext cx="6492240" cy="3566160"/>
           </a:xfrm>
           <a:prstGeom prst="roundRect">
             <a:avLst>
-              <a:gd name="adj" fmla="val 5333"/>
+              <a:gd name="adj" fmla="val 2051"/>
             </a:avLst>
           </a:prstGeom>
           <a:solidFill>
@@ -12055,65 +12711,14 @@
       </p:sp>
       <p:sp>
         <p:nvSpPr>
-          <p:cNvPr id="8" name="Shape 6"/>
-          <p:cNvSpPr/>
-          <p:nvPr/>
-        </p:nvSpPr>
-        <p:spPr>
-          <a:xfrm>
-            <a:off x="624535" y="2057400"/>
-            <a:ext cx="640080" cy="640080"/>
-          </a:xfrm>
-          <a:prstGeom prst="ellipse">
-            <a:avLst/>
-          </a:prstGeom>
-          <a:solidFill>
-            <a:srgbClr val="0E8A8F"/>
-          </a:solidFill>
-          <a:ln/>
-          <a:effectLst>
-            <a:outerShdw sx="100000" sy="100000" kx="0" ky="0" algn="bl" rotWithShape="0" blurRad="76200" dist="25400" dir="5400000">
-              <a:srgbClr val="000000">
-                <a:alpha val="12000"/>
-              </a:srgbClr>
-            </a:outerShdw>
-          </a:effectLst>
-        </p:spPr>
-      </p:sp>
-      <p:pic>
-        <p:nvPicPr>
-          <p:cNvPr id="9" name="Image 0" descr="preencoded.png">    </p:cNvPr>
-          <p:cNvPicPr>
-            <a:picLocks noChangeAspect="1"/>
-          </p:cNvPicPr>
-          <p:nvPr/>
-        </p:nvPicPr>
-        <p:blipFill>
-          <a:blip r:embed="rId1"/>
-          <a:stretch>
-            <a:fillRect/>
-          </a:stretch>
-        </p:blipFill>
-        <p:spPr>
-          <a:xfrm>
-            <a:off x="797357" y="2230222"/>
-            <a:ext cx="294437" cy="294437"/>
-          </a:xfrm>
-          <a:prstGeom prst="rect">
-            <a:avLst/>
-          </a:prstGeom>
-        </p:spPr>
-      </p:pic>
-      <p:sp>
-        <p:nvSpPr>
-          <p:cNvPr id="10" name="Text 7"/>
-          <p:cNvSpPr/>
-          <p:nvPr/>
-        </p:nvSpPr>
-        <p:spPr>
-          <a:xfrm>
-            <a:off x="1630375" y="1856232"/>
-            <a:ext cx="3657600" cy="411480"/>
+          <p:cNvPr id="9" name="Text 6"/>
+          <p:cNvSpPr/>
+          <p:nvPr/>
+        </p:nvSpPr>
+        <p:spPr>
+          <a:xfrm>
+            <a:off x="5516575" y="2148840"/>
+            <a:ext cx="5760720" cy="457200"/>
           </a:xfrm>
           <a:prstGeom prst="rect">
             <a:avLst/>
@@ -12129,7 +12734,7 @@
               <a:buNone/>
             </a:pPr>
             <a:r>
-              <a:rPr lang="en-US" sz="1700" b="1" dirty="0">
+              <a:rPr lang="en-US" sz="1800" b="1" dirty="0">
                 <a:solidFill>
                   <a:srgbClr val="153139"/>
                 </a:solidFill>
@@ -12137,77 +12742,63 @@
                 <a:ea typeface="Cambria" pitchFamily="34" charset="-122"/>
                 <a:cs typeface="Cambria" pitchFamily="34" charset="-120"/>
               </a:rPr>
-              <a:t>A · הסמנטי מנצח</a:t>
-            </a:r>
-            <a:endParaRPr lang="en-US" sz="1700" dirty="0"/>
-          </a:p>
-        </p:txBody>
-      </p:sp>
-      <p:sp>
-        <p:nvSpPr>
-          <p:cNvPr id="11" name="Text 8"/>
-          <p:cNvSpPr/>
-          <p:nvPr/>
-        </p:nvSpPr>
-        <p:spPr>
-          <a:xfrm>
-            <a:off x="1630375" y="2295144"/>
-            <a:ext cx="3657600" cy="320040"/>
-          </a:xfrm>
-          <a:prstGeom prst="rect">
-            <a:avLst/>
-          </a:prstGeom>
-          <a:noFill/>
-          <a:ln/>
-        </p:spPr>
-        <p:txBody>
-          <a:bodyPr wrap="square" lIns="0" tIns="0" rIns="0" bIns="0" rtlCol="0" anchor="ctr"/>
-          <a:lstStyle/>
-          <a:p>
-            <a:pPr rtl="1" algn="r" indent="0" marL="0">
-              <a:buNone/>
-            </a:pPr>
-            <a:r>
-              <a:rPr lang="en-US" sz="1150" b="1" dirty="0">
-                <a:solidFill>
-                  <a:srgbClr val="0E8A8F"/>
+              <a:t>כיצד לקרוא את מפת החום</a:t>
+            </a:r>
+            <a:endParaRPr lang="en-US" sz="1800" dirty="0"/>
+          </a:p>
+        </p:txBody>
+      </p:sp>
+      <p:sp>
+        <p:nvSpPr>
+          <p:cNvPr id="10" name="Text 7"/>
+          <p:cNvSpPr/>
+          <p:nvPr/>
+        </p:nvSpPr>
+        <p:spPr>
+          <a:xfrm>
+            <a:off x="5425135" y="2788920"/>
+            <a:ext cx="5943600" cy="2377440"/>
+          </a:xfrm>
+          <a:prstGeom prst="rect">
+            <a:avLst/>
+          </a:prstGeom>
+          <a:noFill/>
+          <a:ln/>
+        </p:spPr>
+        <p:txBody>
+          <a:bodyPr wrap="square" lIns="0" tIns="0" rIns="0" bIns="0" rtlCol="0" anchor="ctr"/>
+          <a:lstStyle/>
+          <a:p>
+            <a:pPr algn="r" marL="342900" indent="-342900">
+              <a:lnSpc>
+                <a:spcPct val="130000"/>
+              </a:lnSpc>
+              <a:buSzPct val="100000"/>
+              <a:buChar char="•"/>
+            </a:pPr>
+            <a:r>
+              <a:rPr lang="en-US" sz="1450" dirty="0">
+                <a:solidFill>
+                  <a:srgbClr val="153139"/>
                 </a:solidFill>
                 <a:latin typeface="Calibri" pitchFamily="34" charset="0"/>
                 <a:ea typeface="Calibri" pitchFamily="34" charset="-122"/>
                 <a:cs typeface="Calibri" pitchFamily="34" charset="-120"/>
               </a:rPr>
-              <a:t>4 מקרים</a:t>
-            </a:r>
-            <a:endParaRPr lang="en-US" sz="1150" dirty="0"/>
-          </a:p>
-        </p:txBody>
-      </p:sp>
-      <p:sp>
-        <p:nvSpPr>
-          <p:cNvPr id="12" name="Text 9"/>
-          <p:cNvSpPr/>
-          <p:nvPr/>
-        </p:nvSpPr>
-        <p:spPr>
-          <a:xfrm>
-            <a:off x="5516575" y="1856232"/>
-            <a:ext cx="5943600" cy="457200"/>
-          </a:xfrm>
-          <a:prstGeom prst="rect">
-            <a:avLst/>
-          </a:prstGeom>
-          <a:noFill/>
-          <a:ln/>
-        </p:spPr>
-        <p:txBody>
-          <a:bodyPr wrap="square" lIns="0" tIns="0" rIns="0" bIns="0" rtlCol="0" anchor="ctr"/>
-          <a:lstStyle/>
-          <a:p>
-            <a:pPr rtl="1" algn="r" indent="0" marL="0">
-              <a:buNone/>
-            </a:pPr>
-            <a:r>
-              <a:rPr lang="en-US" sz="1500" b="1" dirty="0">
+              <a:t>כל שורה היא אחת מ-40 השאלות; הצבע = דירוג המסמך הנכון הראשון (ירוק = למעלה, אדום = עמוק, אפור = הוחמץ).</a:t>
+            </a:r>
+            <a:endParaRPr lang="en-US" sz="1450" dirty="0"/>
+          </a:p>
+          <a:p>
+            <a:pPr algn="r" marL="342900" indent="-342900">
+              <a:lnSpc>
+                <a:spcPct val="130000"/>
+              </a:lnSpc>
+              <a:buSzPct val="100000"/>
+              <a:buChar char="•"/>
+            </a:pPr>
+            <a:r>
+              <a:rPr lang="en-US" sz="1450" dirty="0">
                 <a:solidFill>
                   <a:srgbClr val="153139"/>
                 </a:solidFill>
@@ -12215,69 +12806,51 @@
                 <a:ea typeface="Calibri" pitchFamily="34" charset="-122"/>
                 <a:cs typeface="Calibri" pitchFamily="34" charset="-120"/>
               </a:rPr>
-              <a:t>”חייבים להגיע ללשכת התעסוקה כל הזמן?“</a:t>
-            </a:r>
-            <a:endParaRPr lang="en-US" sz="1500" dirty="0"/>
-          </a:p>
-        </p:txBody>
-      </p:sp>
-      <p:sp>
-        <p:nvSpPr>
-          <p:cNvPr id="13" name="Text 10"/>
-          <p:cNvSpPr/>
-          <p:nvPr/>
-        </p:nvSpPr>
-        <p:spPr>
-          <a:xfrm>
-            <a:off x="5516575" y="2350008"/>
-            <a:ext cx="5943600" cy="594360"/>
-          </a:xfrm>
-          <a:prstGeom prst="rect">
-            <a:avLst/>
-          </a:prstGeom>
-          <a:noFill/>
-          <a:ln/>
-        </p:spPr>
-        <p:txBody>
-          <a:bodyPr wrap="square" lIns="0" tIns="0" rIns="0" bIns="0" rtlCol="0" anchor="ctr"/>
-          <a:lstStyle/>
-          <a:p>
-            <a:pPr rtl="1" algn="r" indent="0" marL="0">
-              <a:buNone/>
-            </a:pPr>
-            <a:r>
-              <a:rPr lang="en-US" sz="1250" dirty="0">
-                <a:solidFill>
-                  <a:srgbClr val="5C6B72"/>
+              <a:t>ירוקים ואפורים מתחלפים בין העמודות — המודלים מצליחים ונכשלים בשאלות שונות.</a:t>
+            </a:r>
+            <a:endParaRPr lang="en-US" sz="1450" dirty="0"/>
+          </a:p>
+          <a:p>
+            <a:pPr algn="r" marL="342900" indent="-342900">
+              <a:lnSpc>
+                <a:spcPct val="130000"/>
+              </a:lnSpc>
+              <a:buSzPct val="100000"/>
+              <a:buChar char="•"/>
+            </a:pPr>
+            <a:r>
+              <a:rPr lang="en-US" sz="1450" dirty="0">
+                <a:solidFill>
+                  <a:srgbClr val="153139"/>
                 </a:solidFill>
                 <a:latin typeface="Calibri" pitchFamily="34" charset="0"/>
                 <a:ea typeface="Calibri" pitchFamily="34" charset="-122"/>
                 <a:cs typeface="Calibri" pitchFamily="34" charset="-120"/>
               </a:rPr>
-              <a:t>אמת: התייצבות בשירות התעסוקה.  אפס מילים משותפות → לקסיקלי דירוג 4, סמנטי דירוג 1.</a:t>
-            </a:r>
-            <a:endParaRPr lang="en-US" sz="1250" dirty="0"/>
-          </a:p>
-        </p:txBody>
-      </p:sp>
-      <p:sp>
-        <p:nvSpPr>
-          <p:cNvPr id="14" name="Shape 11"/>
-          <p:cNvSpPr/>
-          <p:nvPr/>
-        </p:nvSpPr>
-        <p:spPr>
-          <a:xfrm>
-            <a:off x="578815" y="3172968"/>
-            <a:ext cx="11064240" cy="1371600"/>
+              <a:t>אי-ההסכמה הזו היא בדיוק מה שהופך את השילוב למשתלם.</a:t>
+            </a:r>
+            <a:endParaRPr lang="en-US" sz="1450" dirty="0"/>
+          </a:p>
+        </p:txBody>
+      </p:sp>
+      <p:sp>
+        <p:nvSpPr>
+          <p:cNvPr id="11" name="Shape 8"/>
+          <p:cNvSpPr/>
+          <p:nvPr/>
+        </p:nvSpPr>
+        <p:spPr>
+          <a:xfrm>
+            <a:off x="5150815" y="5669280"/>
+            <a:ext cx="6492240" cy="777240"/>
           </a:xfrm>
           <a:prstGeom prst="roundRect">
             <a:avLst>
-              <a:gd name="adj" fmla="val 5333"/>
+              <a:gd name="adj" fmla="val 9412"/>
             </a:avLst>
           </a:prstGeom>
           <a:solidFill>
-            <a:srgbClr val="F4F9F9"/>
+            <a:srgbClr val="0B3B45"/>
           </a:solidFill>
           <a:ln w="12700">
             <a:solidFill>
@@ -12296,449 +12869,54 @@
       </p:sp>
       <p:sp>
         <p:nvSpPr>
-          <p:cNvPr id="15" name="Shape 12"/>
-          <p:cNvSpPr/>
-          <p:nvPr/>
-        </p:nvSpPr>
-        <p:spPr>
-          <a:xfrm>
-            <a:off x="624535" y="3538728"/>
-            <a:ext cx="640080" cy="640080"/>
-          </a:xfrm>
-          <a:prstGeom prst="ellipse">
-            <a:avLst/>
-          </a:prstGeom>
-          <a:solidFill>
-            <a:srgbClr val="E0852F"/>
-          </a:solidFill>
-          <a:ln/>
-          <a:effectLst>
-            <a:outerShdw sx="100000" sy="100000" kx="0" ky="0" algn="bl" rotWithShape="0" blurRad="76200" dist="25400" dir="5400000">
-              <a:srgbClr val="000000">
-                <a:alpha val="12000"/>
-              </a:srgbClr>
-            </a:outerShdw>
-          </a:effectLst>
-        </p:spPr>
-      </p:sp>
-      <p:pic>
-        <p:nvPicPr>
-          <p:cNvPr id="16" name="Image 1" descr="preencoded.png">    </p:cNvPr>
-          <p:cNvPicPr>
-            <a:picLocks noChangeAspect="1"/>
-          </p:cNvPicPr>
-          <p:nvPr/>
-        </p:nvPicPr>
-        <p:blipFill>
-          <a:blip r:embed="rId2"/>
-          <a:stretch>
-            <a:fillRect/>
-          </a:stretch>
-        </p:blipFill>
-        <p:spPr>
-          <a:xfrm>
-            <a:off x="797357" y="3711550"/>
-            <a:ext cx="294437" cy="294437"/>
-          </a:xfrm>
-          <a:prstGeom prst="rect">
-            <a:avLst/>
-          </a:prstGeom>
-        </p:spPr>
-      </p:pic>
-      <p:sp>
-        <p:nvSpPr>
-          <p:cNvPr id="17" name="Text 13"/>
-          <p:cNvSpPr/>
-          <p:nvPr/>
-        </p:nvSpPr>
-        <p:spPr>
-          <a:xfrm>
-            <a:off x="1630375" y="3337560"/>
-            <a:ext cx="3657600" cy="411480"/>
-          </a:xfrm>
-          <a:prstGeom prst="rect">
-            <a:avLst/>
-          </a:prstGeom>
-          <a:noFill/>
-          <a:ln/>
-        </p:spPr>
-        <p:txBody>
-          <a:bodyPr wrap="square" lIns="0" tIns="0" rIns="0" bIns="0" rtlCol="0" anchor="ctr"/>
-          <a:lstStyle/>
-          <a:p>
-            <a:pPr rtl="1" algn="r" indent="0" marL="0">
-              <a:buNone/>
-            </a:pPr>
-            <a:r>
-              <a:rPr lang="en-US" sz="1700" b="1" dirty="0">
-                <a:solidFill>
-                  <a:srgbClr val="153139"/>
-                </a:solidFill>
-                <a:latin typeface="Cambria" pitchFamily="34" charset="0"/>
-                <a:ea typeface="Cambria" pitchFamily="34" charset="-122"/>
-                <a:cs typeface="Cambria" pitchFamily="34" charset="-120"/>
-              </a:rPr>
-              <a:t>B · הלקסיקלי מנצח</a:t>
-            </a:r>
-            <a:endParaRPr lang="en-US" sz="1700" dirty="0"/>
-          </a:p>
-        </p:txBody>
-      </p:sp>
-      <p:sp>
-        <p:nvSpPr>
-          <p:cNvPr id="18" name="Text 14"/>
-          <p:cNvSpPr/>
-          <p:nvPr/>
-        </p:nvSpPr>
-        <p:spPr>
-          <a:xfrm>
-            <a:off x="1630375" y="3776472"/>
-            <a:ext cx="3657600" cy="320040"/>
-          </a:xfrm>
-          <a:prstGeom prst="rect">
-            <a:avLst/>
-          </a:prstGeom>
-          <a:noFill/>
-          <a:ln/>
-        </p:spPr>
-        <p:txBody>
-          <a:bodyPr wrap="square" lIns="0" tIns="0" rIns="0" bIns="0" rtlCol="0" anchor="ctr"/>
-          <a:lstStyle/>
-          <a:p>
-            <a:pPr rtl="1" algn="r" indent="0" marL="0">
-              <a:buNone/>
-            </a:pPr>
-            <a:r>
-              <a:rPr lang="en-US" sz="1150" b="1" dirty="0">
-                <a:solidFill>
-                  <a:srgbClr val="E0852F"/>
+          <p:cNvPr id="12" name="Text 9"/>
+          <p:cNvSpPr/>
+          <p:nvPr/>
+        </p:nvSpPr>
+        <p:spPr>
+          <a:xfrm>
+            <a:off x="5379415" y="5669280"/>
+            <a:ext cx="6035040" cy="777240"/>
+          </a:xfrm>
+          <a:prstGeom prst="rect">
+            <a:avLst/>
+          </a:prstGeom>
+          <a:noFill/>
+          <a:ln/>
+        </p:spPr>
+        <p:txBody>
+          <a:bodyPr wrap="square" lIns="0" tIns="0" rIns="0" bIns="0" rtlCol="0" anchor="ctr"/>
+          <a:lstStyle/>
+          <a:p>
+            <a:pPr algn="r" indent="0" marL="0">
+              <a:buNone/>
+            </a:pPr>
+            <a:r>
+              <a:rPr lang="en-US" sz="1400" dirty="0">
+                <a:solidFill>
+                  <a:srgbClr val="CFE6E4"/>
                 </a:solidFill>
                 <a:latin typeface="Calibri" pitchFamily="34" charset="0"/>
                 <a:ea typeface="Calibri" pitchFamily="34" charset="-122"/>
                 <a:cs typeface="Calibri" pitchFamily="34" charset="-120"/>
               </a:rPr>
-              <a:t>5 מקרים</a:t>
-            </a:r>
-            <a:endParaRPr lang="en-US" sz="1150" dirty="0"/>
-          </a:p>
-        </p:txBody>
-      </p:sp>
-      <p:sp>
-        <p:nvSpPr>
-          <p:cNvPr id="19" name="Text 15"/>
-          <p:cNvSpPr/>
-          <p:nvPr/>
-        </p:nvSpPr>
-        <p:spPr>
-          <a:xfrm>
-            <a:off x="5516575" y="3337560"/>
-            <a:ext cx="5943600" cy="457200"/>
-          </a:xfrm>
-          <a:prstGeom prst="rect">
-            <a:avLst/>
-          </a:prstGeom>
-          <a:noFill/>
-          <a:ln/>
-        </p:spPr>
-        <p:txBody>
-          <a:bodyPr wrap="square" lIns="0" tIns="0" rIns="0" bIns="0" rtlCol="0" anchor="ctr"/>
-          <a:lstStyle/>
-          <a:p>
-            <a:pPr rtl="1" algn="r" indent="0" marL="0">
-              <a:buNone/>
-            </a:pPr>
-            <a:r>
-              <a:rPr lang="en-US" sz="1500" b="1" dirty="0">
-                <a:solidFill>
-                  <a:srgbClr val="153139"/>
+              <a:t>החטאות (מסמך האמת לא ב-top-10):   </a:t>
+            </a:r>
+            <a:pPr algn="r" indent="0" marL="0">
+              <a:buNone/>
+            </a:pPr>
+            <a:r>
+              <a:rPr lang="en-US" sz="1400" b="1" dirty="0">
+                <a:solidFill>
+                  <a:srgbClr val="FFFFFF"/>
                 </a:solidFill>
                 <a:latin typeface="Calibri" pitchFamily="34" charset="0"/>
                 <a:ea typeface="Calibri" pitchFamily="34" charset="-122"/>
                 <a:cs typeface="Calibri" pitchFamily="34" charset="-120"/>
               </a:rPr>
-              <a:t>”כיסא גלגלים ומכשירי שיקום?“</a:t>
-            </a:r>
-            <a:endParaRPr lang="en-US" sz="1500" dirty="0"/>
-          </a:p>
-        </p:txBody>
-      </p:sp>
-      <p:sp>
-        <p:nvSpPr>
-          <p:cNvPr id="20" name="Text 16"/>
-          <p:cNvSpPr/>
-          <p:nvPr/>
-        </p:nvSpPr>
-        <p:spPr>
-          <a:xfrm>
-            <a:off x="5516575" y="3831336"/>
-            <a:ext cx="5943600" cy="594360"/>
-          </a:xfrm>
-          <a:prstGeom prst="rect">
-            <a:avLst/>
-          </a:prstGeom>
-          <a:noFill/>
-          <a:ln/>
-        </p:spPr>
-        <p:txBody>
-          <a:bodyPr wrap="square" lIns="0" tIns="0" rIns="0" bIns="0" rtlCol="0" anchor="ctr"/>
-          <a:lstStyle/>
-          <a:p>
-            <a:pPr rtl="1" algn="r" indent="0" marL="0">
-              <a:buNone/>
-            </a:pPr>
-            <a:r>
-              <a:rPr lang="en-US" sz="1250" dirty="0">
-                <a:solidFill>
-                  <a:srgbClr val="5C6B72"/>
-                </a:solidFill>
-                <a:latin typeface="Calibri" pitchFamily="34" charset="0"/>
-                <a:ea typeface="Calibri" pitchFamily="34" charset="-122"/>
-                <a:cs typeface="Calibri" pitchFamily="34" charset="-120"/>
-              </a:rPr>
-              <a:t>אמת: אביזרי ומכשירי שיקום.  מונח מדויק וחד → לקסיקלי דירוג 1, סמנטי מחמיץ.</a:t>
-            </a:r>
-            <a:endParaRPr lang="en-US" sz="1250" dirty="0"/>
-          </a:p>
-        </p:txBody>
-      </p:sp>
-      <p:sp>
-        <p:nvSpPr>
-          <p:cNvPr id="21" name="Shape 17"/>
-          <p:cNvSpPr/>
-          <p:nvPr/>
-        </p:nvSpPr>
-        <p:spPr>
-          <a:xfrm>
-            <a:off x="578815" y="4654296"/>
-            <a:ext cx="11064240" cy="1371600"/>
-          </a:xfrm>
-          <a:prstGeom prst="roundRect">
-            <a:avLst>
-              <a:gd name="adj" fmla="val 5333"/>
-            </a:avLst>
-          </a:prstGeom>
-          <a:solidFill>
-            <a:srgbClr val="F4F9F9"/>
-          </a:solidFill>
-          <a:ln w="12700">
-            <a:solidFill>
-              <a:srgbClr val="DDE8E8"/>
-            </a:solidFill>
-            <a:prstDash val="solid"/>
-          </a:ln>
-          <a:effectLst>
-            <a:outerShdw sx="100000" sy="100000" kx="0" ky="0" algn="bl" rotWithShape="0" blurRad="76200" dist="25400" dir="5400000">
-              <a:srgbClr val="000000">
-                <a:alpha val="12000"/>
-              </a:srgbClr>
-            </a:outerShdw>
-          </a:effectLst>
-        </p:spPr>
-      </p:sp>
-      <p:sp>
-        <p:nvSpPr>
-          <p:cNvPr id="22" name="Shape 18"/>
-          <p:cNvSpPr/>
-          <p:nvPr/>
-        </p:nvSpPr>
-        <p:spPr>
-          <a:xfrm>
-            <a:off x="624535" y="5020056"/>
-            <a:ext cx="640080" cy="640080"/>
-          </a:xfrm>
-          <a:prstGeom prst="ellipse">
-            <a:avLst/>
-          </a:prstGeom>
-          <a:solidFill>
-            <a:srgbClr val="8A8F94"/>
-          </a:solidFill>
-          <a:ln/>
-          <a:effectLst>
-            <a:outerShdw sx="100000" sy="100000" kx="0" ky="0" algn="bl" rotWithShape="0" blurRad="76200" dist="25400" dir="5400000">
-              <a:srgbClr val="000000">
-                <a:alpha val="12000"/>
-              </a:srgbClr>
-            </a:outerShdw>
-          </a:effectLst>
-        </p:spPr>
-      </p:sp>
-      <p:pic>
-        <p:nvPicPr>
-          <p:cNvPr id="23" name="Image 2" descr="preencoded.png">    </p:cNvPr>
-          <p:cNvPicPr>
-            <a:picLocks noChangeAspect="1"/>
-          </p:cNvPicPr>
-          <p:nvPr/>
-        </p:nvPicPr>
-        <p:blipFill>
-          <a:blip r:embed="rId3"/>
-          <a:stretch>
-            <a:fillRect/>
-          </a:stretch>
-        </p:blipFill>
-        <p:spPr>
-          <a:xfrm>
-            <a:off x="797357" y="5192878"/>
-            <a:ext cx="294437" cy="294437"/>
-          </a:xfrm>
-          <a:prstGeom prst="rect">
-            <a:avLst/>
-          </a:prstGeom>
-        </p:spPr>
-      </p:pic>
-      <p:sp>
-        <p:nvSpPr>
-          <p:cNvPr id="24" name="Text 19"/>
-          <p:cNvSpPr/>
-          <p:nvPr/>
-        </p:nvSpPr>
-        <p:spPr>
-          <a:xfrm>
-            <a:off x="1630375" y="4818888"/>
-            <a:ext cx="3657600" cy="411480"/>
-          </a:xfrm>
-          <a:prstGeom prst="rect">
-            <a:avLst/>
-          </a:prstGeom>
-          <a:noFill/>
-          <a:ln/>
-        </p:spPr>
-        <p:txBody>
-          <a:bodyPr wrap="square" lIns="0" tIns="0" rIns="0" bIns="0" rtlCol="0" anchor="ctr"/>
-          <a:lstStyle/>
-          <a:p>
-            <a:pPr rtl="1" algn="r" indent="0" marL="0">
-              <a:buNone/>
-            </a:pPr>
-            <a:r>
-              <a:rPr lang="en-US" sz="1700" b="1" dirty="0">
-                <a:solidFill>
-                  <a:srgbClr val="153139"/>
-                </a:solidFill>
-                <a:latin typeface="Cambria" pitchFamily="34" charset="0"/>
-                <a:ea typeface="Cambria" pitchFamily="34" charset="-122"/>
-                <a:cs typeface="Cambria" pitchFamily="34" charset="-120"/>
-              </a:rPr>
-              <a:t>C · שניהם נכשלים</a:t>
-            </a:r>
-            <a:endParaRPr lang="en-US" sz="1700" dirty="0"/>
-          </a:p>
-        </p:txBody>
-      </p:sp>
-      <p:sp>
-        <p:nvSpPr>
-          <p:cNvPr id="25" name="Text 20"/>
-          <p:cNvSpPr/>
-          <p:nvPr/>
-        </p:nvSpPr>
-        <p:spPr>
-          <a:xfrm>
-            <a:off x="1630375" y="5257800"/>
-            <a:ext cx="3657600" cy="320040"/>
-          </a:xfrm>
-          <a:prstGeom prst="rect">
-            <a:avLst/>
-          </a:prstGeom>
-          <a:noFill/>
-          <a:ln/>
-        </p:spPr>
-        <p:txBody>
-          <a:bodyPr wrap="square" lIns="0" tIns="0" rIns="0" bIns="0" rtlCol="0" anchor="ctr"/>
-          <a:lstStyle/>
-          <a:p>
-            <a:pPr rtl="1" algn="r" indent="0" marL="0">
-              <a:buNone/>
-            </a:pPr>
-            <a:r>
-              <a:rPr lang="en-US" sz="1150" b="1" dirty="0">
-                <a:solidFill>
-                  <a:srgbClr val="5C6B72"/>
-                </a:solidFill>
-                <a:latin typeface="Calibri" pitchFamily="34" charset="0"/>
-                <a:ea typeface="Calibri" pitchFamily="34" charset="-122"/>
-                <a:cs typeface="Calibri" pitchFamily="34" charset="-120"/>
-              </a:rPr>
-              <a:t>7 מקרים</a:t>
-            </a:r>
-            <a:endParaRPr lang="en-US" sz="1150" dirty="0"/>
-          </a:p>
-        </p:txBody>
-      </p:sp>
-      <p:sp>
-        <p:nvSpPr>
-          <p:cNvPr id="26" name="Text 21"/>
-          <p:cNvSpPr/>
-          <p:nvPr/>
-        </p:nvSpPr>
-        <p:spPr>
-          <a:xfrm>
-            <a:off x="5516575" y="4818888"/>
-            <a:ext cx="5943600" cy="457200"/>
-          </a:xfrm>
-          <a:prstGeom prst="rect">
-            <a:avLst/>
-          </a:prstGeom>
-          <a:noFill/>
-          <a:ln/>
-        </p:spPr>
-        <p:txBody>
-          <a:bodyPr wrap="square" lIns="0" tIns="0" rIns="0" bIns="0" rtlCol="0" anchor="ctr"/>
-          <a:lstStyle/>
-          <a:p>
-            <a:pPr rtl="1" algn="r" indent="0" marL="0">
-              <a:buNone/>
-            </a:pPr>
-            <a:r>
-              <a:rPr lang="en-US" sz="1500" b="1" dirty="0">
-                <a:solidFill>
-                  <a:srgbClr val="153139"/>
-                </a:solidFill>
-                <a:latin typeface="Calibri" pitchFamily="34" charset="0"/>
-                <a:ea typeface="Calibri" pitchFamily="34" charset="-122"/>
-                <a:cs typeface="Calibri" pitchFamily="34" charset="-120"/>
-              </a:rPr>
-              <a:t>”איך מקבלים קצבת נכות?“</a:t>
-            </a:r>
-            <a:endParaRPr lang="en-US" sz="1500" dirty="0"/>
-          </a:p>
-        </p:txBody>
-      </p:sp>
-      <p:sp>
-        <p:nvSpPr>
-          <p:cNvPr id="27" name="Text 22"/>
-          <p:cNvSpPr/>
-          <p:nvPr/>
-        </p:nvSpPr>
-        <p:spPr>
-          <a:xfrm>
-            <a:off x="5516575" y="5312664"/>
-            <a:ext cx="5943600" cy="594360"/>
-          </a:xfrm>
-          <a:prstGeom prst="rect">
-            <a:avLst/>
-          </a:prstGeom>
-          <a:noFill/>
-          <a:ln/>
-        </p:spPr>
-        <p:txBody>
-          <a:bodyPr wrap="square" lIns="0" tIns="0" rIns="0" bIns="0" rtlCol="0" anchor="ctr"/>
-          <a:lstStyle/>
-          <a:p>
-            <a:pPr rtl="1" algn="r" indent="0" marL="0">
-              <a:buNone/>
-            </a:pPr>
-            <a:r>
-              <a:rPr lang="en-US" sz="1250" dirty="0">
-                <a:solidFill>
-                  <a:srgbClr val="5C6B72"/>
-                </a:solidFill>
-                <a:latin typeface="Calibri" pitchFamily="34" charset="0"/>
-                <a:ea typeface="Calibri" pitchFamily="34" charset="-122"/>
-                <a:cs typeface="Calibri" pitchFamily="34" charset="-120"/>
-              </a:rPr>
-              <a:t>הדף הקרוב ביותר הוא קצרמר של ביטוח לאומי, מוצף בדפי ”קביעת נכות“ ספציפיים.</a:t>
-            </a:r>
-            <a:endParaRPr lang="en-US" sz="1250" dirty="0"/>
+              <a:t>TF-IDF 6   ·   AlephBERT 9   ·   היברידי 5</a:t>
+            </a:r>
+            <a:endParaRPr lang="en-US" sz="1400" dirty="0"/>
           </a:p>
         </p:txBody>
       </p:sp>
@@ -12849,7 +13027,7 @@
                 <a:ea typeface="Calibri" pitchFamily="34" charset="-122"/>
                 <a:cs typeface="Calibri" pitchFamily="34" charset="-120"/>
               </a:rPr>
-              <a:t>בתוך המודל</a:t>
+              <a:t>ניתוח שגיאות</a:t>
             </a:r>
             <a:endParaRPr lang="en-US" sz="1200" dirty="0"/>
           </a:p>
@@ -12888,7 +13066,7 @@
                 <a:ea typeface="Cambria" pitchFamily="34" charset="-122"/>
                 <a:cs typeface="Cambria" pitchFamily="34" charset="-120"/>
               </a:rPr>
-              <a:t>כך נראה מרחב ההטמעות</a:t>
+              <a:t>שלוש תבניות, דוגמאות אמיתיות</a:t>
             </a:r>
             <a:endParaRPr lang="en-US" sz="3000" dirty="0"/>
           </a:p>
@@ -12928,6 +13106,920 @@
                 <a:cs typeface="Calibri" pitchFamily="34" charset="-120"/>
               </a:rPr>
               <a:t>15</a:t>
+            </a:r>
+            <a:endParaRPr lang="en-US" sz="1000" dirty="0"/>
+          </a:p>
+        </p:txBody>
+      </p:sp>
+      <p:sp>
+        <p:nvSpPr>
+          <p:cNvPr id="7" name="Shape 5"/>
+          <p:cNvSpPr/>
+          <p:nvPr/>
+        </p:nvSpPr>
+        <p:spPr>
+          <a:xfrm>
+            <a:off x="578815" y="1691640"/>
+            <a:ext cx="11064240" cy="1371600"/>
+          </a:xfrm>
+          <a:prstGeom prst="roundRect">
+            <a:avLst>
+              <a:gd name="adj" fmla="val 5333"/>
+            </a:avLst>
+          </a:prstGeom>
+          <a:solidFill>
+            <a:srgbClr val="F4F9F9"/>
+          </a:solidFill>
+          <a:ln w="12700">
+            <a:solidFill>
+              <a:srgbClr val="DDE8E8"/>
+            </a:solidFill>
+            <a:prstDash val="solid"/>
+          </a:ln>
+          <a:effectLst>
+            <a:outerShdw sx="100000" sy="100000" kx="0" ky="0" algn="bl" rotWithShape="0" blurRad="76200" dist="25400" dir="5400000">
+              <a:srgbClr val="000000">
+                <a:alpha val="12000"/>
+              </a:srgbClr>
+            </a:outerShdw>
+          </a:effectLst>
+        </p:spPr>
+      </p:sp>
+      <p:sp>
+        <p:nvSpPr>
+          <p:cNvPr id="8" name="Shape 6"/>
+          <p:cNvSpPr/>
+          <p:nvPr/>
+        </p:nvSpPr>
+        <p:spPr>
+          <a:xfrm>
+            <a:off x="624535" y="2057400"/>
+            <a:ext cx="640080" cy="640080"/>
+          </a:xfrm>
+          <a:prstGeom prst="ellipse">
+            <a:avLst/>
+          </a:prstGeom>
+          <a:solidFill>
+            <a:srgbClr val="0E8A8F"/>
+          </a:solidFill>
+          <a:ln/>
+          <a:effectLst>
+            <a:outerShdw sx="100000" sy="100000" kx="0" ky="0" algn="bl" rotWithShape="0" blurRad="76200" dist="25400" dir="5400000">
+              <a:srgbClr val="000000">
+                <a:alpha val="12000"/>
+              </a:srgbClr>
+            </a:outerShdw>
+          </a:effectLst>
+        </p:spPr>
+      </p:sp>
+      <p:pic>
+        <p:nvPicPr>
+          <p:cNvPr id="9" name="Image 0" descr="preencoded.png">    </p:cNvPr>
+          <p:cNvPicPr>
+            <a:picLocks noChangeAspect="1"/>
+          </p:cNvPicPr>
+          <p:nvPr/>
+        </p:nvPicPr>
+        <p:blipFill>
+          <a:blip r:embed="rId1"/>
+          <a:stretch>
+            <a:fillRect/>
+          </a:stretch>
+        </p:blipFill>
+        <p:spPr>
+          <a:xfrm>
+            <a:off x="797357" y="2230222"/>
+            <a:ext cx="294437" cy="294437"/>
+          </a:xfrm>
+          <a:prstGeom prst="rect">
+            <a:avLst/>
+          </a:prstGeom>
+        </p:spPr>
+      </p:pic>
+      <p:sp>
+        <p:nvSpPr>
+          <p:cNvPr id="10" name="Text 7"/>
+          <p:cNvSpPr/>
+          <p:nvPr/>
+        </p:nvSpPr>
+        <p:spPr>
+          <a:xfrm>
+            <a:off x="1630375" y="1856232"/>
+            <a:ext cx="3657600" cy="411480"/>
+          </a:xfrm>
+          <a:prstGeom prst="rect">
+            <a:avLst/>
+          </a:prstGeom>
+          <a:noFill/>
+          <a:ln/>
+        </p:spPr>
+        <p:txBody>
+          <a:bodyPr wrap="square" lIns="0" tIns="0" rIns="0" bIns="0" rtlCol="0" anchor="ctr"/>
+          <a:lstStyle/>
+          <a:p>
+            <a:pPr rtl="1" algn="r" indent="0" marL="0">
+              <a:buNone/>
+            </a:pPr>
+            <a:r>
+              <a:rPr lang="en-US" sz="1700" b="1" dirty="0">
+                <a:solidFill>
+                  <a:srgbClr val="153139"/>
+                </a:solidFill>
+                <a:latin typeface="Cambria" pitchFamily="34" charset="0"/>
+                <a:ea typeface="Cambria" pitchFamily="34" charset="-122"/>
+                <a:cs typeface="Cambria" pitchFamily="34" charset="-120"/>
+              </a:rPr>
+              <a:t>A · הסמנטי מנצח</a:t>
+            </a:r>
+            <a:endParaRPr lang="en-US" sz="1700" dirty="0"/>
+          </a:p>
+        </p:txBody>
+      </p:sp>
+      <p:sp>
+        <p:nvSpPr>
+          <p:cNvPr id="11" name="Text 8"/>
+          <p:cNvSpPr/>
+          <p:nvPr/>
+        </p:nvSpPr>
+        <p:spPr>
+          <a:xfrm>
+            <a:off x="1630375" y="2295144"/>
+            <a:ext cx="3657600" cy="320040"/>
+          </a:xfrm>
+          <a:prstGeom prst="rect">
+            <a:avLst/>
+          </a:prstGeom>
+          <a:noFill/>
+          <a:ln/>
+        </p:spPr>
+        <p:txBody>
+          <a:bodyPr wrap="square" lIns="0" tIns="0" rIns="0" bIns="0" rtlCol="0" anchor="ctr"/>
+          <a:lstStyle/>
+          <a:p>
+            <a:pPr rtl="1" algn="r" indent="0" marL="0">
+              <a:buNone/>
+            </a:pPr>
+            <a:r>
+              <a:rPr lang="en-US" sz="1150" b="1" dirty="0">
+                <a:solidFill>
+                  <a:srgbClr val="0E8A8F"/>
+                </a:solidFill>
+                <a:latin typeface="Calibri" pitchFamily="34" charset="0"/>
+                <a:ea typeface="Calibri" pitchFamily="34" charset="-122"/>
+                <a:cs typeface="Calibri" pitchFamily="34" charset="-120"/>
+              </a:rPr>
+              <a:t>4 מקרים</a:t>
+            </a:r>
+            <a:endParaRPr lang="en-US" sz="1150" dirty="0"/>
+          </a:p>
+        </p:txBody>
+      </p:sp>
+      <p:sp>
+        <p:nvSpPr>
+          <p:cNvPr id="12" name="Text 9"/>
+          <p:cNvSpPr/>
+          <p:nvPr/>
+        </p:nvSpPr>
+        <p:spPr>
+          <a:xfrm>
+            <a:off x="5516575" y="1856232"/>
+            <a:ext cx="5943600" cy="457200"/>
+          </a:xfrm>
+          <a:prstGeom prst="rect">
+            <a:avLst/>
+          </a:prstGeom>
+          <a:noFill/>
+          <a:ln/>
+        </p:spPr>
+        <p:txBody>
+          <a:bodyPr wrap="square" lIns="0" tIns="0" rIns="0" bIns="0" rtlCol="0" anchor="ctr"/>
+          <a:lstStyle/>
+          <a:p>
+            <a:pPr rtl="1" algn="r" indent="0" marL="0">
+              <a:buNone/>
+            </a:pPr>
+            <a:r>
+              <a:rPr lang="en-US" sz="1500" b="1" dirty="0">
+                <a:solidFill>
+                  <a:srgbClr val="153139"/>
+                </a:solidFill>
+                <a:latin typeface="Calibri" pitchFamily="34" charset="0"/>
+                <a:ea typeface="Calibri" pitchFamily="34" charset="-122"/>
+                <a:cs typeface="Calibri" pitchFamily="34" charset="-120"/>
+              </a:rPr>
+              <a:t>”חייבים להגיע ללשכת התעסוקה כל הזמן?“</a:t>
+            </a:r>
+            <a:endParaRPr lang="en-US" sz="1500" dirty="0"/>
+          </a:p>
+        </p:txBody>
+      </p:sp>
+      <p:sp>
+        <p:nvSpPr>
+          <p:cNvPr id="13" name="Text 10"/>
+          <p:cNvSpPr/>
+          <p:nvPr/>
+        </p:nvSpPr>
+        <p:spPr>
+          <a:xfrm>
+            <a:off x="5516575" y="2350008"/>
+            <a:ext cx="5943600" cy="594360"/>
+          </a:xfrm>
+          <a:prstGeom prst="rect">
+            <a:avLst/>
+          </a:prstGeom>
+          <a:noFill/>
+          <a:ln/>
+        </p:spPr>
+        <p:txBody>
+          <a:bodyPr wrap="square" lIns="0" tIns="0" rIns="0" bIns="0" rtlCol="0" anchor="ctr"/>
+          <a:lstStyle/>
+          <a:p>
+            <a:pPr rtl="1" algn="r" indent="0" marL="0">
+              <a:buNone/>
+            </a:pPr>
+            <a:r>
+              <a:rPr lang="en-US" sz="1250" dirty="0">
+                <a:solidFill>
+                  <a:srgbClr val="5C6B72"/>
+                </a:solidFill>
+                <a:latin typeface="Calibri" pitchFamily="34" charset="0"/>
+                <a:ea typeface="Calibri" pitchFamily="34" charset="-122"/>
+                <a:cs typeface="Calibri" pitchFamily="34" charset="-120"/>
+              </a:rPr>
+              <a:t>אמת: התייצבות בשירות התעסוקה.  אפס מילים משותפות → לקסיקלי דירוג 4, סמנטי דירוג 1.</a:t>
+            </a:r>
+            <a:endParaRPr lang="en-US" sz="1250" dirty="0"/>
+          </a:p>
+        </p:txBody>
+      </p:sp>
+      <p:sp>
+        <p:nvSpPr>
+          <p:cNvPr id="14" name="Shape 11"/>
+          <p:cNvSpPr/>
+          <p:nvPr/>
+        </p:nvSpPr>
+        <p:spPr>
+          <a:xfrm>
+            <a:off x="578815" y="3172968"/>
+            <a:ext cx="11064240" cy="1371600"/>
+          </a:xfrm>
+          <a:prstGeom prst="roundRect">
+            <a:avLst>
+              <a:gd name="adj" fmla="val 5333"/>
+            </a:avLst>
+          </a:prstGeom>
+          <a:solidFill>
+            <a:srgbClr val="F4F9F9"/>
+          </a:solidFill>
+          <a:ln w="12700">
+            <a:solidFill>
+              <a:srgbClr val="DDE8E8"/>
+            </a:solidFill>
+            <a:prstDash val="solid"/>
+          </a:ln>
+          <a:effectLst>
+            <a:outerShdw sx="100000" sy="100000" kx="0" ky="0" algn="bl" rotWithShape="0" blurRad="76200" dist="25400" dir="5400000">
+              <a:srgbClr val="000000">
+                <a:alpha val="12000"/>
+              </a:srgbClr>
+            </a:outerShdw>
+          </a:effectLst>
+        </p:spPr>
+      </p:sp>
+      <p:sp>
+        <p:nvSpPr>
+          <p:cNvPr id="15" name="Shape 12"/>
+          <p:cNvSpPr/>
+          <p:nvPr/>
+        </p:nvSpPr>
+        <p:spPr>
+          <a:xfrm>
+            <a:off x="624535" y="3538728"/>
+            <a:ext cx="640080" cy="640080"/>
+          </a:xfrm>
+          <a:prstGeom prst="ellipse">
+            <a:avLst/>
+          </a:prstGeom>
+          <a:solidFill>
+            <a:srgbClr val="E0852F"/>
+          </a:solidFill>
+          <a:ln/>
+          <a:effectLst>
+            <a:outerShdw sx="100000" sy="100000" kx="0" ky="0" algn="bl" rotWithShape="0" blurRad="76200" dist="25400" dir="5400000">
+              <a:srgbClr val="000000">
+                <a:alpha val="12000"/>
+              </a:srgbClr>
+            </a:outerShdw>
+          </a:effectLst>
+        </p:spPr>
+      </p:sp>
+      <p:pic>
+        <p:nvPicPr>
+          <p:cNvPr id="16" name="Image 1" descr="preencoded.png">    </p:cNvPr>
+          <p:cNvPicPr>
+            <a:picLocks noChangeAspect="1"/>
+          </p:cNvPicPr>
+          <p:nvPr/>
+        </p:nvPicPr>
+        <p:blipFill>
+          <a:blip r:embed="rId2"/>
+          <a:stretch>
+            <a:fillRect/>
+          </a:stretch>
+        </p:blipFill>
+        <p:spPr>
+          <a:xfrm>
+            <a:off x="797357" y="3711550"/>
+            <a:ext cx="294437" cy="294437"/>
+          </a:xfrm>
+          <a:prstGeom prst="rect">
+            <a:avLst/>
+          </a:prstGeom>
+        </p:spPr>
+      </p:pic>
+      <p:sp>
+        <p:nvSpPr>
+          <p:cNvPr id="17" name="Text 13"/>
+          <p:cNvSpPr/>
+          <p:nvPr/>
+        </p:nvSpPr>
+        <p:spPr>
+          <a:xfrm>
+            <a:off x="1630375" y="3337560"/>
+            <a:ext cx="3657600" cy="411480"/>
+          </a:xfrm>
+          <a:prstGeom prst="rect">
+            <a:avLst/>
+          </a:prstGeom>
+          <a:noFill/>
+          <a:ln/>
+        </p:spPr>
+        <p:txBody>
+          <a:bodyPr wrap="square" lIns="0" tIns="0" rIns="0" bIns="0" rtlCol="0" anchor="ctr"/>
+          <a:lstStyle/>
+          <a:p>
+            <a:pPr rtl="1" algn="r" indent="0" marL="0">
+              <a:buNone/>
+            </a:pPr>
+            <a:r>
+              <a:rPr lang="en-US" sz="1700" b="1" dirty="0">
+                <a:solidFill>
+                  <a:srgbClr val="153139"/>
+                </a:solidFill>
+                <a:latin typeface="Cambria" pitchFamily="34" charset="0"/>
+                <a:ea typeface="Cambria" pitchFamily="34" charset="-122"/>
+                <a:cs typeface="Cambria" pitchFamily="34" charset="-120"/>
+              </a:rPr>
+              <a:t>B · הלקסיקלי מנצח</a:t>
+            </a:r>
+            <a:endParaRPr lang="en-US" sz="1700" dirty="0"/>
+          </a:p>
+        </p:txBody>
+      </p:sp>
+      <p:sp>
+        <p:nvSpPr>
+          <p:cNvPr id="18" name="Text 14"/>
+          <p:cNvSpPr/>
+          <p:nvPr/>
+        </p:nvSpPr>
+        <p:spPr>
+          <a:xfrm>
+            <a:off x="1630375" y="3776472"/>
+            <a:ext cx="3657600" cy="320040"/>
+          </a:xfrm>
+          <a:prstGeom prst="rect">
+            <a:avLst/>
+          </a:prstGeom>
+          <a:noFill/>
+          <a:ln/>
+        </p:spPr>
+        <p:txBody>
+          <a:bodyPr wrap="square" lIns="0" tIns="0" rIns="0" bIns="0" rtlCol="0" anchor="ctr"/>
+          <a:lstStyle/>
+          <a:p>
+            <a:pPr rtl="1" algn="r" indent="0" marL="0">
+              <a:buNone/>
+            </a:pPr>
+            <a:r>
+              <a:rPr lang="en-US" sz="1150" b="1" dirty="0">
+                <a:solidFill>
+                  <a:srgbClr val="E0852F"/>
+                </a:solidFill>
+                <a:latin typeface="Calibri" pitchFamily="34" charset="0"/>
+                <a:ea typeface="Calibri" pitchFamily="34" charset="-122"/>
+                <a:cs typeface="Calibri" pitchFamily="34" charset="-120"/>
+              </a:rPr>
+              <a:t>5 מקרים</a:t>
+            </a:r>
+            <a:endParaRPr lang="en-US" sz="1150" dirty="0"/>
+          </a:p>
+        </p:txBody>
+      </p:sp>
+      <p:sp>
+        <p:nvSpPr>
+          <p:cNvPr id="19" name="Text 15"/>
+          <p:cNvSpPr/>
+          <p:nvPr/>
+        </p:nvSpPr>
+        <p:spPr>
+          <a:xfrm>
+            <a:off x="5516575" y="3337560"/>
+            <a:ext cx="5943600" cy="457200"/>
+          </a:xfrm>
+          <a:prstGeom prst="rect">
+            <a:avLst/>
+          </a:prstGeom>
+          <a:noFill/>
+          <a:ln/>
+        </p:spPr>
+        <p:txBody>
+          <a:bodyPr wrap="square" lIns="0" tIns="0" rIns="0" bIns="0" rtlCol="0" anchor="ctr"/>
+          <a:lstStyle/>
+          <a:p>
+            <a:pPr rtl="1" algn="r" indent="0" marL="0">
+              <a:buNone/>
+            </a:pPr>
+            <a:r>
+              <a:rPr lang="en-US" sz="1500" b="1" dirty="0">
+                <a:solidFill>
+                  <a:srgbClr val="153139"/>
+                </a:solidFill>
+                <a:latin typeface="Calibri" pitchFamily="34" charset="0"/>
+                <a:ea typeface="Calibri" pitchFamily="34" charset="-122"/>
+                <a:cs typeface="Calibri" pitchFamily="34" charset="-120"/>
+              </a:rPr>
+              <a:t>”כיסא גלגלים ומכשירי שיקום?“</a:t>
+            </a:r>
+            <a:endParaRPr lang="en-US" sz="1500" dirty="0"/>
+          </a:p>
+        </p:txBody>
+      </p:sp>
+      <p:sp>
+        <p:nvSpPr>
+          <p:cNvPr id="20" name="Text 16"/>
+          <p:cNvSpPr/>
+          <p:nvPr/>
+        </p:nvSpPr>
+        <p:spPr>
+          <a:xfrm>
+            <a:off x="5516575" y="3831336"/>
+            <a:ext cx="5943600" cy="594360"/>
+          </a:xfrm>
+          <a:prstGeom prst="rect">
+            <a:avLst/>
+          </a:prstGeom>
+          <a:noFill/>
+          <a:ln/>
+        </p:spPr>
+        <p:txBody>
+          <a:bodyPr wrap="square" lIns="0" tIns="0" rIns="0" bIns="0" rtlCol="0" anchor="ctr"/>
+          <a:lstStyle/>
+          <a:p>
+            <a:pPr rtl="1" algn="r" indent="0" marL="0">
+              <a:buNone/>
+            </a:pPr>
+            <a:r>
+              <a:rPr lang="en-US" sz="1250" dirty="0">
+                <a:solidFill>
+                  <a:srgbClr val="5C6B72"/>
+                </a:solidFill>
+                <a:latin typeface="Calibri" pitchFamily="34" charset="0"/>
+                <a:ea typeface="Calibri" pitchFamily="34" charset="-122"/>
+                <a:cs typeface="Calibri" pitchFamily="34" charset="-120"/>
+              </a:rPr>
+              <a:t>אמת: אביזרי ומכשירי שיקום.  מונח מדויק וחד → לקסיקלי דירוג 1, סמנטי מחמיץ.</a:t>
+            </a:r>
+            <a:endParaRPr lang="en-US" sz="1250" dirty="0"/>
+          </a:p>
+        </p:txBody>
+      </p:sp>
+      <p:sp>
+        <p:nvSpPr>
+          <p:cNvPr id="21" name="Shape 17"/>
+          <p:cNvSpPr/>
+          <p:nvPr/>
+        </p:nvSpPr>
+        <p:spPr>
+          <a:xfrm>
+            <a:off x="578815" y="4654296"/>
+            <a:ext cx="11064240" cy="1371600"/>
+          </a:xfrm>
+          <a:prstGeom prst="roundRect">
+            <a:avLst>
+              <a:gd name="adj" fmla="val 5333"/>
+            </a:avLst>
+          </a:prstGeom>
+          <a:solidFill>
+            <a:srgbClr val="F4F9F9"/>
+          </a:solidFill>
+          <a:ln w="12700">
+            <a:solidFill>
+              <a:srgbClr val="DDE8E8"/>
+            </a:solidFill>
+            <a:prstDash val="solid"/>
+          </a:ln>
+          <a:effectLst>
+            <a:outerShdw sx="100000" sy="100000" kx="0" ky="0" algn="bl" rotWithShape="0" blurRad="76200" dist="25400" dir="5400000">
+              <a:srgbClr val="000000">
+                <a:alpha val="12000"/>
+              </a:srgbClr>
+            </a:outerShdw>
+          </a:effectLst>
+        </p:spPr>
+      </p:sp>
+      <p:sp>
+        <p:nvSpPr>
+          <p:cNvPr id="22" name="Shape 18"/>
+          <p:cNvSpPr/>
+          <p:nvPr/>
+        </p:nvSpPr>
+        <p:spPr>
+          <a:xfrm>
+            <a:off x="624535" y="5020056"/>
+            <a:ext cx="640080" cy="640080"/>
+          </a:xfrm>
+          <a:prstGeom prst="ellipse">
+            <a:avLst/>
+          </a:prstGeom>
+          <a:solidFill>
+            <a:srgbClr val="8A8F94"/>
+          </a:solidFill>
+          <a:ln/>
+          <a:effectLst>
+            <a:outerShdw sx="100000" sy="100000" kx="0" ky="0" algn="bl" rotWithShape="0" blurRad="76200" dist="25400" dir="5400000">
+              <a:srgbClr val="000000">
+                <a:alpha val="12000"/>
+              </a:srgbClr>
+            </a:outerShdw>
+          </a:effectLst>
+        </p:spPr>
+      </p:sp>
+      <p:pic>
+        <p:nvPicPr>
+          <p:cNvPr id="23" name="Image 2" descr="preencoded.png">    </p:cNvPr>
+          <p:cNvPicPr>
+            <a:picLocks noChangeAspect="1"/>
+          </p:cNvPicPr>
+          <p:nvPr/>
+        </p:nvPicPr>
+        <p:blipFill>
+          <a:blip r:embed="rId3"/>
+          <a:stretch>
+            <a:fillRect/>
+          </a:stretch>
+        </p:blipFill>
+        <p:spPr>
+          <a:xfrm>
+            <a:off x="797357" y="5192878"/>
+            <a:ext cx="294437" cy="294437"/>
+          </a:xfrm>
+          <a:prstGeom prst="rect">
+            <a:avLst/>
+          </a:prstGeom>
+        </p:spPr>
+      </p:pic>
+      <p:sp>
+        <p:nvSpPr>
+          <p:cNvPr id="24" name="Text 19"/>
+          <p:cNvSpPr/>
+          <p:nvPr/>
+        </p:nvSpPr>
+        <p:spPr>
+          <a:xfrm>
+            <a:off x="1630375" y="4818888"/>
+            <a:ext cx="3657600" cy="411480"/>
+          </a:xfrm>
+          <a:prstGeom prst="rect">
+            <a:avLst/>
+          </a:prstGeom>
+          <a:noFill/>
+          <a:ln/>
+        </p:spPr>
+        <p:txBody>
+          <a:bodyPr wrap="square" lIns="0" tIns="0" rIns="0" bIns="0" rtlCol="0" anchor="ctr"/>
+          <a:lstStyle/>
+          <a:p>
+            <a:pPr rtl="1" algn="r" indent="0" marL="0">
+              <a:buNone/>
+            </a:pPr>
+            <a:r>
+              <a:rPr lang="en-US" sz="1700" b="1" dirty="0">
+                <a:solidFill>
+                  <a:srgbClr val="153139"/>
+                </a:solidFill>
+                <a:latin typeface="Cambria" pitchFamily="34" charset="0"/>
+                <a:ea typeface="Cambria" pitchFamily="34" charset="-122"/>
+                <a:cs typeface="Cambria" pitchFamily="34" charset="-120"/>
+              </a:rPr>
+              <a:t>C · שניהם נכשלים</a:t>
+            </a:r>
+            <a:endParaRPr lang="en-US" sz="1700" dirty="0"/>
+          </a:p>
+        </p:txBody>
+      </p:sp>
+      <p:sp>
+        <p:nvSpPr>
+          <p:cNvPr id="25" name="Text 20"/>
+          <p:cNvSpPr/>
+          <p:nvPr/>
+        </p:nvSpPr>
+        <p:spPr>
+          <a:xfrm>
+            <a:off x="1630375" y="5257800"/>
+            <a:ext cx="3657600" cy="320040"/>
+          </a:xfrm>
+          <a:prstGeom prst="rect">
+            <a:avLst/>
+          </a:prstGeom>
+          <a:noFill/>
+          <a:ln/>
+        </p:spPr>
+        <p:txBody>
+          <a:bodyPr wrap="square" lIns="0" tIns="0" rIns="0" bIns="0" rtlCol="0" anchor="ctr"/>
+          <a:lstStyle/>
+          <a:p>
+            <a:pPr rtl="1" algn="r" indent="0" marL="0">
+              <a:buNone/>
+            </a:pPr>
+            <a:r>
+              <a:rPr lang="en-US" sz="1150" b="1" dirty="0">
+                <a:solidFill>
+                  <a:srgbClr val="5C6B72"/>
+                </a:solidFill>
+                <a:latin typeface="Calibri" pitchFamily="34" charset="0"/>
+                <a:ea typeface="Calibri" pitchFamily="34" charset="-122"/>
+                <a:cs typeface="Calibri" pitchFamily="34" charset="-120"/>
+              </a:rPr>
+              <a:t>7 מקרים</a:t>
+            </a:r>
+            <a:endParaRPr lang="en-US" sz="1150" dirty="0"/>
+          </a:p>
+        </p:txBody>
+      </p:sp>
+      <p:sp>
+        <p:nvSpPr>
+          <p:cNvPr id="26" name="Text 21"/>
+          <p:cNvSpPr/>
+          <p:nvPr/>
+        </p:nvSpPr>
+        <p:spPr>
+          <a:xfrm>
+            <a:off x="5516575" y="4818888"/>
+            <a:ext cx="5943600" cy="457200"/>
+          </a:xfrm>
+          <a:prstGeom prst="rect">
+            <a:avLst/>
+          </a:prstGeom>
+          <a:noFill/>
+          <a:ln/>
+        </p:spPr>
+        <p:txBody>
+          <a:bodyPr wrap="square" lIns="0" tIns="0" rIns="0" bIns="0" rtlCol="0" anchor="ctr"/>
+          <a:lstStyle/>
+          <a:p>
+            <a:pPr rtl="1" algn="r" indent="0" marL="0">
+              <a:buNone/>
+            </a:pPr>
+            <a:r>
+              <a:rPr lang="en-US" sz="1500" b="1" dirty="0">
+                <a:solidFill>
+                  <a:srgbClr val="153139"/>
+                </a:solidFill>
+                <a:latin typeface="Calibri" pitchFamily="34" charset="0"/>
+                <a:ea typeface="Calibri" pitchFamily="34" charset="-122"/>
+                <a:cs typeface="Calibri" pitchFamily="34" charset="-120"/>
+              </a:rPr>
+              <a:t>”איך מקבלים קצבת נכות?“</a:t>
+            </a:r>
+            <a:endParaRPr lang="en-US" sz="1500" dirty="0"/>
+          </a:p>
+        </p:txBody>
+      </p:sp>
+      <p:sp>
+        <p:nvSpPr>
+          <p:cNvPr id="27" name="Text 22"/>
+          <p:cNvSpPr/>
+          <p:nvPr/>
+        </p:nvSpPr>
+        <p:spPr>
+          <a:xfrm>
+            <a:off x="5516575" y="5312664"/>
+            <a:ext cx="5943600" cy="594360"/>
+          </a:xfrm>
+          <a:prstGeom prst="rect">
+            <a:avLst/>
+          </a:prstGeom>
+          <a:noFill/>
+          <a:ln/>
+        </p:spPr>
+        <p:txBody>
+          <a:bodyPr wrap="square" lIns="0" tIns="0" rIns="0" bIns="0" rtlCol="0" anchor="ctr"/>
+          <a:lstStyle/>
+          <a:p>
+            <a:pPr rtl="1" algn="r" indent="0" marL="0">
+              <a:buNone/>
+            </a:pPr>
+            <a:r>
+              <a:rPr lang="en-US" sz="1250" dirty="0">
+                <a:solidFill>
+                  <a:srgbClr val="5C6B72"/>
+                </a:solidFill>
+                <a:latin typeface="Calibri" pitchFamily="34" charset="0"/>
+                <a:ea typeface="Calibri" pitchFamily="34" charset="-122"/>
+                <a:cs typeface="Calibri" pitchFamily="34" charset="-120"/>
+              </a:rPr>
+              <a:t>הדף הקרוב ביותר הוא קצרמר של ביטוח לאומי, מוצף בדפי ”קביעת נכות“ ספציפיים.</a:t>
+            </a:r>
+            <a:endParaRPr lang="en-US" sz="1250" dirty="0"/>
+          </a:p>
+        </p:txBody>
+      </p:sp>
+    </p:spTree>
+  </p:cSld>
+  <p:clrMapOvr>
+    <a:masterClrMapping/>
+  </p:clrMapOvr>
+</p:sld>
+</file>
+
+<file path=ppt/slides/slide18.xml><?xml version="1.0" encoding="utf-8"?>
+<p:sld xmlns:a="http://schemas.openxmlformats.org/drawingml/2006/main" xmlns:r="http://schemas.openxmlformats.org/officeDocument/2006/relationships" xmlns:p="http://schemas.openxmlformats.org/presentationml/2006/main">
+  <p:cSld name="Slide 18">
+    <p:bg>
+      <p:bgPr>
+        <a:solidFill>
+          <a:srgbClr val="FFFFFF"/>
+        </a:solidFill>
+      </p:bgPr>
+    </p:bg>
+    <p:spTree>
+      <p:nvGrpSpPr>
+        <p:cNvPr id="1" name=""/>
+        <p:cNvGrpSpPr/>
+        <p:nvPr/>
+      </p:nvGrpSpPr>
+      <p:grpSpPr>
+        <a:xfrm>
+          <a:off x="0" y="0"/>
+          <a:ext cx="0" cy="0"/>
+          <a:chOff x="0" y="0"/>
+          <a:chExt cx="0" cy="0"/>
+        </a:xfrm>
+      </p:grpSpPr>
+      <p:sp>
+        <p:nvSpPr>
+          <p:cNvPr id="2" name="Shape 0"/>
+          <p:cNvSpPr/>
+          <p:nvPr/>
+        </p:nvSpPr>
+        <p:spPr>
+          <a:xfrm>
+            <a:off x="11313871" y="457200"/>
+            <a:ext cx="310896" cy="310896"/>
+          </a:xfrm>
+          <a:prstGeom prst="ellipse">
+            <a:avLst/>
+          </a:prstGeom>
+          <a:ln w="25400">
+            <a:solidFill>
+              <a:srgbClr val="0E8A8F"/>
+            </a:solidFill>
+            <a:prstDash val="solid"/>
+          </a:ln>
+        </p:spPr>
+      </p:sp>
+      <p:sp>
+        <p:nvSpPr>
+          <p:cNvPr id="3" name="Shape 1"/>
+          <p:cNvSpPr/>
+          <p:nvPr/>
+        </p:nvSpPr>
+        <p:spPr>
+          <a:xfrm>
+            <a:off x="11414455" y="557784"/>
+            <a:ext cx="109728" cy="109728"/>
+          </a:xfrm>
+          <a:prstGeom prst="ellipse">
+            <a:avLst/>
+          </a:prstGeom>
+          <a:solidFill>
+            <a:srgbClr val="0E8A8F"/>
+          </a:solidFill>
+          <a:ln/>
+        </p:spPr>
+      </p:sp>
+      <p:sp>
+        <p:nvSpPr>
+          <p:cNvPr id="4" name="Text 2"/>
+          <p:cNvSpPr/>
+          <p:nvPr/>
+        </p:nvSpPr>
+        <p:spPr>
+          <a:xfrm>
+            <a:off x="2060143" y="420624"/>
+            <a:ext cx="9144000" cy="274320"/>
+          </a:xfrm>
+          <a:prstGeom prst="rect">
+            <a:avLst/>
+          </a:prstGeom>
+          <a:noFill/>
+          <a:ln/>
+        </p:spPr>
+        <p:txBody>
+          <a:bodyPr wrap="square" lIns="0" tIns="0" rIns="0" bIns="0" rtlCol="0" anchor="ctr"/>
+          <a:lstStyle/>
+          <a:p>
+            <a:pPr rtl="1" algn="r" indent="0" marL="0">
+              <a:buNone/>
+            </a:pPr>
+            <a:r>
+              <a:rPr lang="en-US" sz="1200" b="1" spc="100" kern="0" dirty="0">
+                <a:solidFill>
+                  <a:srgbClr val="0E8A8F"/>
+                </a:solidFill>
+                <a:latin typeface="Calibri" pitchFamily="34" charset="0"/>
+                <a:ea typeface="Calibri" pitchFamily="34" charset="-122"/>
+                <a:cs typeface="Calibri" pitchFamily="34" charset="-120"/>
+              </a:rPr>
+              <a:t>בתוך המודל</a:t>
+            </a:r>
+            <a:endParaRPr lang="en-US" sz="1200" dirty="0"/>
+          </a:p>
+        </p:txBody>
+      </p:sp>
+      <p:sp>
+        <p:nvSpPr>
+          <p:cNvPr id="5" name="Text 3"/>
+          <p:cNvSpPr/>
+          <p:nvPr/>
+        </p:nvSpPr>
+        <p:spPr>
+          <a:xfrm>
+            <a:off x="578815" y="713232"/>
+            <a:ext cx="11064240" cy="640080"/>
+          </a:xfrm>
+          <a:prstGeom prst="rect">
+            <a:avLst/>
+          </a:prstGeom>
+          <a:noFill/>
+          <a:ln/>
+        </p:spPr>
+        <p:txBody>
+          <a:bodyPr wrap="square" lIns="0" tIns="0" rIns="0" bIns="0" rtlCol="0" anchor="ctr"/>
+          <a:lstStyle/>
+          <a:p>
+            <a:pPr rtl="1" algn="r" indent="0" marL="0">
+              <a:buNone/>
+            </a:pPr>
+            <a:r>
+              <a:rPr lang="en-US" sz="3000" b="1" dirty="0">
+                <a:solidFill>
+                  <a:srgbClr val="153139"/>
+                </a:solidFill>
+                <a:latin typeface="Cambria" pitchFamily="34" charset="0"/>
+                <a:ea typeface="Cambria" pitchFamily="34" charset="-122"/>
+                <a:cs typeface="Cambria" pitchFamily="34" charset="-120"/>
+              </a:rPr>
+              <a:t>כך נראה מרחב ההטמעות</a:t>
+            </a:r>
+            <a:endParaRPr lang="en-US" sz="3000" dirty="0"/>
+          </a:p>
+        </p:txBody>
+      </p:sp>
+      <p:sp>
+        <p:nvSpPr>
+          <p:cNvPr id="6" name="Text 4"/>
+          <p:cNvSpPr/>
+          <p:nvPr/>
+        </p:nvSpPr>
+        <p:spPr>
+          <a:xfrm>
+            <a:off x="121615" y="6400800"/>
+            <a:ext cx="457200" cy="274320"/>
+          </a:xfrm>
+          <a:prstGeom prst="rect">
+            <a:avLst/>
+          </a:prstGeom>
+          <a:noFill/>
+          <a:ln/>
+        </p:spPr>
+        <p:txBody>
+          <a:bodyPr wrap="square" lIns="0" tIns="0" rIns="0" bIns="0" rtlCol="0" anchor="ctr"/>
+          <a:lstStyle/>
+          <a:p>
+            <a:pPr rtl="1" algn="r" indent="0" marL="0">
+              <a:buNone/>
+            </a:pPr>
+            <a:r>
+              <a:rPr lang="en-US" sz="1000" dirty="0">
+                <a:solidFill>
+                  <a:srgbClr val="5C6B72"/>
+                </a:solidFill>
+                <a:latin typeface="Calibri" pitchFamily="34" charset="0"/>
+                <a:ea typeface="Calibri" pitchFamily="34" charset="-122"/>
+                <a:cs typeface="Calibri" pitchFamily="34" charset="-120"/>
+              </a:rPr>
+              <a:t>16</a:t>
             </a:r>
             <a:endParaRPr lang="en-US" sz="1000" dirty="0"/>
           </a:p>
@@ -13174,9 +14266,9 @@
 </p:sld>
 </file>
 
-<file path=ppt/slides/slide18.xml><?xml version="1.0" encoding="utf-8"?>
+<file path=ppt/slides/slide19.xml><?xml version="1.0" encoding="utf-8"?>
 <p:sld xmlns:a="http://schemas.openxmlformats.org/drawingml/2006/main" xmlns:r="http://schemas.openxmlformats.org/officeDocument/2006/relationships" xmlns:p="http://schemas.openxmlformats.org/presentationml/2006/main">
-  <p:cSld name="Slide 18">
+  <p:cSld name="Slide 19">
     <p:bg>
       <p:bgPr>
         <a:solidFill>
@@ -14015,864 +15107,9 @@
                 <a:ea typeface="Calibri" pitchFamily="34" charset="-122"/>
                 <a:cs typeface="Calibri" pitchFamily="34" charset="-120"/>
               </a:rPr>
-              <a:t>16</a:t>
+              <a:t>17</a:t>
             </a:r>
             <a:endParaRPr lang="en-US" sz="1000" dirty="0"/>
-          </a:p>
-        </p:txBody>
-      </p:sp>
-    </p:spTree>
-  </p:cSld>
-  <p:clrMapOvr>
-    <a:masterClrMapping/>
-  </p:clrMapOvr>
-</p:sld>
-</file>
-
-<file path=ppt/slides/slide19.xml><?xml version="1.0" encoding="utf-8"?>
-<p:sld xmlns:a="http://schemas.openxmlformats.org/drawingml/2006/main" xmlns:r="http://schemas.openxmlformats.org/officeDocument/2006/relationships" xmlns:p="http://schemas.openxmlformats.org/presentationml/2006/main">
-  <p:cSld name="Slide 19">
-    <p:bg>
-      <p:bgPr>
-        <a:solidFill>
-          <a:srgbClr val="FFFFFF"/>
-        </a:solidFill>
-      </p:bgPr>
-    </p:bg>
-    <p:spTree>
-      <p:nvGrpSpPr>
-        <p:cNvPr id="1" name=""/>
-        <p:cNvGrpSpPr/>
-        <p:nvPr/>
-      </p:nvGrpSpPr>
-      <p:grpSpPr>
-        <a:xfrm>
-          <a:off x="0" y="0"/>
-          <a:ext cx="0" cy="0"/>
-          <a:chOff x="0" y="0"/>
-          <a:chExt cx="0" cy="0"/>
-        </a:xfrm>
-      </p:grpSpPr>
-      <p:sp>
-        <p:nvSpPr>
-          <p:cNvPr id="2" name="Shape 0"/>
-          <p:cNvSpPr/>
-          <p:nvPr/>
-        </p:nvSpPr>
-        <p:spPr>
-          <a:xfrm>
-            <a:off x="11313871" y="457200"/>
-            <a:ext cx="310896" cy="310896"/>
-          </a:xfrm>
-          <a:prstGeom prst="ellipse">
-            <a:avLst/>
-          </a:prstGeom>
-          <a:ln w="25400">
-            <a:solidFill>
-              <a:srgbClr val="0E8A8F"/>
-            </a:solidFill>
-            <a:prstDash val="solid"/>
-          </a:ln>
-        </p:spPr>
-      </p:sp>
-      <p:sp>
-        <p:nvSpPr>
-          <p:cNvPr id="3" name="Shape 1"/>
-          <p:cNvSpPr/>
-          <p:nvPr/>
-        </p:nvSpPr>
-        <p:spPr>
-          <a:xfrm>
-            <a:off x="11414455" y="557784"/>
-            <a:ext cx="109728" cy="109728"/>
-          </a:xfrm>
-          <a:prstGeom prst="ellipse">
-            <a:avLst/>
-          </a:prstGeom>
-          <a:solidFill>
-            <a:srgbClr val="0E8A8F"/>
-          </a:solidFill>
-          <a:ln/>
-        </p:spPr>
-      </p:sp>
-      <p:sp>
-        <p:nvSpPr>
-          <p:cNvPr id="4" name="Text 2"/>
-          <p:cNvSpPr/>
-          <p:nvPr/>
-        </p:nvSpPr>
-        <p:spPr>
-          <a:xfrm>
-            <a:off x="2060143" y="420624"/>
-            <a:ext cx="9144000" cy="274320"/>
-          </a:xfrm>
-          <a:prstGeom prst="rect">
-            <a:avLst/>
-          </a:prstGeom>
-          <a:noFill/>
-          <a:ln/>
-        </p:spPr>
-        <p:txBody>
-          <a:bodyPr wrap="square" lIns="0" tIns="0" rIns="0" bIns="0" rtlCol="0" anchor="ctr"/>
-          <a:lstStyle/>
-          <a:p>
-            <a:pPr rtl="1" algn="r" indent="0" marL="0">
-              <a:buNone/>
-            </a:pPr>
-            <a:r>
-              <a:rPr lang="en-US" sz="1200" b="1" spc="100" kern="0" dirty="0">
-                <a:solidFill>
-                  <a:srgbClr val="0E8A8F"/>
-                </a:solidFill>
-                <a:latin typeface="Calibri" pitchFamily="34" charset="0"/>
-                <a:ea typeface="Calibri" pitchFamily="34" charset="-122"/>
-                <a:cs typeface="Calibri" pitchFamily="34" charset="-120"/>
-              </a:rPr>
-              <a:t>NLP אחראי</a:t>
-            </a:r>
-            <a:endParaRPr lang="en-US" sz="1200" dirty="0"/>
-          </a:p>
-        </p:txBody>
-      </p:sp>
-      <p:sp>
-        <p:nvSpPr>
-          <p:cNvPr id="5" name="Text 3"/>
-          <p:cNvSpPr/>
-          <p:nvPr/>
-        </p:nvSpPr>
-        <p:spPr>
-          <a:xfrm>
-            <a:off x="578815" y="713232"/>
-            <a:ext cx="11064240" cy="640080"/>
-          </a:xfrm>
-          <a:prstGeom prst="rect">
-            <a:avLst/>
-          </a:prstGeom>
-          <a:noFill/>
-          <a:ln/>
-        </p:spPr>
-        <p:txBody>
-          <a:bodyPr wrap="square" lIns="0" tIns="0" rIns="0" bIns="0" rtlCol="0" anchor="ctr"/>
-          <a:lstStyle/>
-          <a:p>
-            <a:pPr rtl="1" algn="r" indent="0" marL="0">
-              <a:buNone/>
-            </a:pPr>
-            <a:r>
-              <a:rPr lang="en-US" sz="3000" b="1" dirty="0">
-                <a:solidFill>
-                  <a:srgbClr val="153139"/>
-                </a:solidFill>
-                <a:latin typeface="Cambria" pitchFamily="34" charset="0"/>
-                <a:ea typeface="Cambria" pitchFamily="34" charset="-122"/>
-                <a:cs typeface="Cambria" pitchFamily="34" charset="-120"/>
-              </a:rPr>
-              <a:t>אתיקה ומגבלות</a:t>
-            </a:r>
-            <a:endParaRPr lang="en-US" sz="3000" dirty="0"/>
-          </a:p>
-        </p:txBody>
-      </p:sp>
-      <p:sp>
-        <p:nvSpPr>
-          <p:cNvPr id="6" name="Text 4"/>
-          <p:cNvSpPr/>
-          <p:nvPr/>
-        </p:nvSpPr>
-        <p:spPr>
-          <a:xfrm>
-            <a:off x="121615" y="6400800"/>
-            <a:ext cx="457200" cy="274320"/>
-          </a:xfrm>
-          <a:prstGeom prst="rect">
-            <a:avLst/>
-          </a:prstGeom>
-          <a:noFill/>
-          <a:ln/>
-        </p:spPr>
-        <p:txBody>
-          <a:bodyPr wrap="square" lIns="0" tIns="0" rIns="0" bIns="0" rtlCol="0" anchor="ctr"/>
-          <a:lstStyle/>
-          <a:p>
-            <a:pPr rtl="1" algn="r" indent="0" marL="0">
-              <a:buNone/>
-            </a:pPr>
-            <a:r>
-              <a:rPr lang="en-US" sz="1000" dirty="0">
-                <a:solidFill>
-                  <a:srgbClr val="5C6B72"/>
-                </a:solidFill>
-                <a:latin typeface="Calibri" pitchFamily="34" charset="0"/>
-                <a:ea typeface="Calibri" pitchFamily="34" charset="-122"/>
-                <a:cs typeface="Calibri" pitchFamily="34" charset="-120"/>
-              </a:rPr>
-              <a:t>17</a:t>
-            </a:r>
-            <a:endParaRPr lang="en-US" sz="1000" dirty="0"/>
-          </a:p>
-        </p:txBody>
-      </p:sp>
-      <p:sp>
-        <p:nvSpPr>
-          <p:cNvPr id="7" name="Shape 5"/>
-          <p:cNvSpPr/>
-          <p:nvPr/>
-        </p:nvSpPr>
-        <p:spPr>
-          <a:xfrm>
-            <a:off x="578815" y="1783080"/>
-            <a:ext cx="5440680" cy="1874520"/>
-          </a:xfrm>
-          <a:prstGeom prst="roundRect">
-            <a:avLst>
-              <a:gd name="adj" fmla="val 3902"/>
-            </a:avLst>
-          </a:prstGeom>
-          <a:solidFill>
-            <a:srgbClr val="EAF4F4"/>
-          </a:solidFill>
-          <a:ln w="12700">
-            <a:solidFill>
-              <a:srgbClr val="DDE8E8"/>
-            </a:solidFill>
-            <a:prstDash val="solid"/>
-          </a:ln>
-          <a:effectLst>
-            <a:outerShdw sx="100000" sy="100000" kx="0" ky="0" algn="bl" rotWithShape="0" blurRad="76200" dist="25400" dir="5400000">
-              <a:srgbClr val="000000">
-                <a:alpha val="12000"/>
-              </a:srgbClr>
-            </a:outerShdw>
-          </a:effectLst>
-        </p:spPr>
-      </p:sp>
-      <p:sp>
-        <p:nvSpPr>
-          <p:cNvPr id="8" name="Shape 6"/>
-          <p:cNvSpPr/>
-          <p:nvPr/>
-        </p:nvSpPr>
-        <p:spPr>
-          <a:xfrm>
-            <a:off x="789127" y="2103120"/>
-            <a:ext cx="658368" cy="658368"/>
-          </a:xfrm>
-          <a:prstGeom prst="ellipse">
-            <a:avLst/>
-          </a:prstGeom>
-          <a:solidFill>
-            <a:srgbClr val="0E8A8F"/>
-          </a:solidFill>
-          <a:ln/>
-          <a:effectLst>
-            <a:outerShdw sx="100000" sy="100000" kx="0" ky="0" algn="bl" rotWithShape="0" blurRad="76200" dist="25400" dir="5400000">
-              <a:srgbClr val="000000">
-                <a:alpha val="12000"/>
-              </a:srgbClr>
-            </a:outerShdw>
-          </a:effectLst>
-        </p:spPr>
-      </p:sp>
-      <p:pic>
-        <p:nvPicPr>
-          <p:cNvPr id="9" name="Image 0" descr="preencoded.png">    </p:cNvPr>
-          <p:cNvPicPr>
-            <a:picLocks noChangeAspect="1"/>
-          </p:cNvPicPr>
-          <p:nvPr/>
-        </p:nvPicPr>
-        <p:blipFill>
-          <a:blip r:embed="rId1"/>
-          <a:stretch>
-            <a:fillRect/>
-          </a:stretch>
-        </p:blipFill>
-        <p:spPr>
-          <a:xfrm>
-            <a:off x="966887" y="2280879"/>
-            <a:ext cx="302849" cy="302849"/>
-          </a:xfrm>
-          <a:prstGeom prst="rect">
-            <a:avLst/>
-          </a:prstGeom>
-        </p:spPr>
-      </p:pic>
-      <p:sp>
-        <p:nvSpPr>
-          <p:cNvPr id="10" name="Text 7"/>
-          <p:cNvSpPr/>
-          <p:nvPr/>
-        </p:nvSpPr>
-        <p:spPr>
-          <a:xfrm>
-            <a:off x="1584655" y="2057400"/>
-            <a:ext cx="4160520" cy="685800"/>
-          </a:xfrm>
-          <a:prstGeom prst="rect">
-            <a:avLst/>
-          </a:prstGeom>
-          <a:noFill/>
-          <a:ln/>
-        </p:spPr>
-        <p:txBody>
-          <a:bodyPr wrap="square" lIns="0" tIns="0" rIns="0" bIns="0" rtlCol="0" anchor="ctr"/>
-          <a:lstStyle/>
-          <a:p>
-            <a:pPr rtl="1" algn="r" indent="0" marL="0">
-              <a:buNone/>
-            </a:pPr>
-            <a:r>
-              <a:rPr lang="en-US" sz="1700" b="1" dirty="0">
-                <a:solidFill>
-                  <a:srgbClr val="153139"/>
-                </a:solidFill>
-                <a:latin typeface="Cambria" pitchFamily="34" charset="0"/>
-                <a:ea typeface="Cambria" pitchFamily="34" charset="-122"/>
-                <a:cs typeface="Cambria" pitchFamily="34" charset="-120"/>
-              </a:rPr>
-              <a:t>נתונים ציבוריים ומורשים</a:t>
-            </a:r>
-            <a:endParaRPr lang="en-US" sz="1700" dirty="0"/>
-          </a:p>
-        </p:txBody>
-      </p:sp>
-      <p:sp>
-        <p:nvSpPr>
-          <p:cNvPr id="11" name="Text 8"/>
-          <p:cNvSpPr/>
-          <p:nvPr/>
-        </p:nvSpPr>
-        <p:spPr>
-          <a:xfrm>
-            <a:off x="816559" y="2788920"/>
-            <a:ext cx="4892040" cy="777240"/>
-          </a:xfrm>
-          <a:prstGeom prst="rect">
-            <a:avLst/>
-          </a:prstGeom>
-          <a:noFill/>
-          <a:ln/>
-        </p:spPr>
-        <p:txBody>
-          <a:bodyPr wrap="square" lIns="0" tIns="0" rIns="0" bIns="0" rtlCol="0" anchor="ctr"/>
-          <a:lstStyle/>
-          <a:p>
-            <a:pPr rtl="1" algn="r" indent="0" marL="0">
-              <a:lnSpc>
-                <a:spcPct val="115000"/>
-              </a:lnSpc>
-              <a:buNone/>
-            </a:pPr>
-            <a:r>
-              <a:rPr lang="en-US" sz="1250" dirty="0">
-                <a:solidFill>
-                  <a:srgbClr val="5C6B72"/>
-                </a:solidFill>
-                <a:latin typeface="Calibri" pitchFamily="34" charset="0"/>
-                <a:ea typeface="Calibri" pitchFamily="34" charset="-122"/>
-                <a:cs typeface="Calibri" pitchFamily="34" charset="-120"/>
-              </a:rPr>
-              <a:t>כל-זכות (CC-BY-SA) + מידע ציבורי של ביטוח לאומי. ללא מידע אישי, ללא סריקת תוכן משתמשים.</a:t>
-            </a:r>
-            <a:endParaRPr lang="en-US" sz="1250" dirty="0"/>
-          </a:p>
-        </p:txBody>
-      </p:sp>
-      <p:sp>
-        <p:nvSpPr>
-          <p:cNvPr id="12" name="Shape 9"/>
-          <p:cNvSpPr/>
-          <p:nvPr/>
-        </p:nvSpPr>
-        <p:spPr>
-          <a:xfrm>
-            <a:off x="6202375" y="1783080"/>
-            <a:ext cx="5440680" cy="1874520"/>
-          </a:xfrm>
-          <a:prstGeom prst="roundRect">
-            <a:avLst>
-              <a:gd name="adj" fmla="val 3902"/>
-            </a:avLst>
-          </a:prstGeom>
-          <a:solidFill>
-            <a:srgbClr val="EAF4F4"/>
-          </a:solidFill>
-          <a:ln w="12700">
-            <a:solidFill>
-              <a:srgbClr val="DDE8E8"/>
-            </a:solidFill>
-            <a:prstDash val="solid"/>
-          </a:ln>
-          <a:effectLst>
-            <a:outerShdw sx="100000" sy="100000" kx="0" ky="0" algn="bl" rotWithShape="0" blurRad="76200" dist="25400" dir="5400000">
-              <a:srgbClr val="000000">
-                <a:alpha val="12000"/>
-              </a:srgbClr>
-            </a:outerShdw>
-          </a:effectLst>
-        </p:spPr>
-      </p:sp>
-      <p:sp>
-        <p:nvSpPr>
-          <p:cNvPr id="13" name="Shape 10"/>
-          <p:cNvSpPr/>
-          <p:nvPr/>
-        </p:nvSpPr>
-        <p:spPr>
-          <a:xfrm>
-            <a:off x="6412687" y="2103120"/>
-            <a:ext cx="658368" cy="658368"/>
-          </a:xfrm>
-          <a:prstGeom prst="ellipse">
-            <a:avLst/>
-          </a:prstGeom>
-          <a:solidFill>
-            <a:srgbClr val="E0852F"/>
-          </a:solidFill>
-          <a:ln/>
-          <a:effectLst>
-            <a:outerShdw sx="100000" sy="100000" kx="0" ky="0" algn="bl" rotWithShape="0" blurRad="76200" dist="25400" dir="5400000">
-              <a:srgbClr val="000000">
-                <a:alpha val="12000"/>
-              </a:srgbClr>
-            </a:outerShdw>
-          </a:effectLst>
-        </p:spPr>
-      </p:sp>
-      <p:pic>
-        <p:nvPicPr>
-          <p:cNvPr id="14" name="Image 1" descr="preencoded.png">    </p:cNvPr>
-          <p:cNvPicPr>
-            <a:picLocks noChangeAspect="1"/>
-          </p:cNvPicPr>
-          <p:nvPr/>
-        </p:nvPicPr>
-        <p:blipFill>
-          <a:blip r:embed="rId2"/>
-          <a:stretch>
-            <a:fillRect/>
-          </a:stretch>
-        </p:blipFill>
-        <p:spPr>
-          <a:xfrm>
-            <a:off x="6590447" y="2280879"/>
-            <a:ext cx="302849" cy="302849"/>
-          </a:xfrm>
-          <a:prstGeom prst="rect">
-            <a:avLst/>
-          </a:prstGeom>
-        </p:spPr>
-      </p:pic>
-      <p:sp>
-        <p:nvSpPr>
-          <p:cNvPr id="15" name="Text 11"/>
-          <p:cNvSpPr/>
-          <p:nvPr/>
-        </p:nvSpPr>
-        <p:spPr>
-          <a:xfrm>
-            <a:off x="7208215" y="2057400"/>
-            <a:ext cx="4160520" cy="685800"/>
-          </a:xfrm>
-          <a:prstGeom prst="rect">
-            <a:avLst/>
-          </a:prstGeom>
-          <a:noFill/>
-          <a:ln/>
-        </p:spPr>
-        <p:txBody>
-          <a:bodyPr wrap="square" lIns="0" tIns="0" rIns="0" bIns="0" rtlCol="0" anchor="ctr"/>
-          <a:lstStyle/>
-          <a:p>
-            <a:pPr rtl="1" algn="r" indent="0" marL="0">
-              <a:buNone/>
-            </a:pPr>
-            <a:r>
-              <a:rPr lang="en-US" sz="1700" b="1" dirty="0">
-                <a:solidFill>
-                  <a:srgbClr val="153139"/>
-                </a:solidFill>
-                <a:latin typeface="Cambria" pitchFamily="34" charset="0"/>
-                <a:ea typeface="Cambria" pitchFamily="34" charset="-122"/>
-                <a:cs typeface="Cambria" pitchFamily="34" charset="-120"/>
-              </a:rPr>
-              <a:t>אינו ייעוץ משפטי</a:t>
-            </a:r>
-            <a:endParaRPr lang="en-US" sz="1700" dirty="0"/>
-          </a:p>
-        </p:txBody>
-      </p:sp>
-      <p:sp>
-        <p:nvSpPr>
-          <p:cNvPr id="16" name="Text 12"/>
-          <p:cNvSpPr/>
-          <p:nvPr/>
-        </p:nvSpPr>
-        <p:spPr>
-          <a:xfrm>
-            <a:off x="6440119" y="2788920"/>
-            <a:ext cx="4892040" cy="777240"/>
-          </a:xfrm>
-          <a:prstGeom prst="rect">
-            <a:avLst/>
-          </a:prstGeom>
-          <a:noFill/>
-          <a:ln/>
-        </p:spPr>
-        <p:txBody>
-          <a:bodyPr wrap="square" lIns="0" tIns="0" rIns="0" bIns="0" rtlCol="0" anchor="ctr"/>
-          <a:lstStyle/>
-          <a:p>
-            <a:pPr rtl="1" algn="r" indent="0" marL="0">
-              <a:lnSpc>
-                <a:spcPct val="115000"/>
-              </a:lnSpc>
-              <a:buNone/>
-            </a:pPr>
-            <a:r>
-              <a:rPr lang="en-US" sz="1250" dirty="0">
-                <a:solidFill>
-                  <a:srgbClr val="5C6B72"/>
-                </a:solidFill>
-                <a:latin typeface="Calibri" pitchFamily="34" charset="0"/>
-                <a:ea typeface="Calibri" pitchFamily="34" charset="-122"/>
-                <a:cs typeface="Calibri" pitchFamily="34" charset="-120"/>
-              </a:rPr>
-              <a:t>אב-טיפוס מחקרי. שימוש אמיתי חייב להציג קישורי מקור ולהפנות לרשות המוסמכת.</a:t>
-            </a:r>
-            <a:endParaRPr lang="en-US" sz="1250" dirty="0"/>
-          </a:p>
-        </p:txBody>
-      </p:sp>
-      <p:sp>
-        <p:nvSpPr>
-          <p:cNvPr id="17" name="Shape 13"/>
-          <p:cNvSpPr/>
-          <p:nvPr/>
-        </p:nvSpPr>
-        <p:spPr>
-          <a:xfrm>
-            <a:off x="578815" y="3931920"/>
-            <a:ext cx="5440680" cy="1874520"/>
-          </a:xfrm>
-          <a:prstGeom prst="roundRect">
-            <a:avLst>
-              <a:gd name="adj" fmla="val 3902"/>
-            </a:avLst>
-          </a:prstGeom>
-          <a:solidFill>
-            <a:srgbClr val="F4F9F9"/>
-          </a:solidFill>
-          <a:ln w="12700">
-            <a:solidFill>
-              <a:srgbClr val="DDE8E8"/>
-            </a:solidFill>
-            <a:prstDash val="solid"/>
-          </a:ln>
-          <a:effectLst>
-            <a:outerShdw sx="100000" sy="100000" kx="0" ky="0" algn="bl" rotWithShape="0" blurRad="76200" dist="25400" dir="5400000">
-              <a:srgbClr val="000000">
-                <a:alpha val="12000"/>
-              </a:srgbClr>
-            </a:outerShdw>
-          </a:effectLst>
-        </p:spPr>
-      </p:sp>
-      <p:sp>
-        <p:nvSpPr>
-          <p:cNvPr id="18" name="Shape 14"/>
-          <p:cNvSpPr/>
-          <p:nvPr/>
-        </p:nvSpPr>
-        <p:spPr>
-          <a:xfrm>
-            <a:off x="789127" y="4251960"/>
-            <a:ext cx="658368" cy="658368"/>
-          </a:xfrm>
-          <a:prstGeom prst="ellipse">
-            <a:avLst/>
-          </a:prstGeom>
-          <a:solidFill>
-            <a:srgbClr val="0E8A8F"/>
-          </a:solidFill>
-          <a:ln/>
-          <a:effectLst>
-            <a:outerShdw sx="100000" sy="100000" kx="0" ky="0" algn="bl" rotWithShape="0" blurRad="76200" dist="25400" dir="5400000">
-              <a:srgbClr val="000000">
-                <a:alpha val="12000"/>
-              </a:srgbClr>
-            </a:outerShdw>
-          </a:effectLst>
-        </p:spPr>
-      </p:sp>
-      <p:pic>
-        <p:nvPicPr>
-          <p:cNvPr id="19" name="Image 2" descr="preencoded.png">    </p:cNvPr>
-          <p:cNvPicPr>
-            <a:picLocks noChangeAspect="1"/>
-          </p:cNvPicPr>
-          <p:nvPr/>
-        </p:nvPicPr>
-        <p:blipFill>
-          <a:blip r:embed="rId3"/>
-          <a:stretch>
-            <a:fillRect/>
-          </a:stretch>
-        </p:blipFill>
-        <p:spPr>
-          <a:xfrm>
-            <a:off x="966887" y="4429719"/>
-            <a:ext cx="302849" cy="302849"/>
-          </a:xfrm>
-          <a:prstGeom prst="rect">
-            <a:avLst/>
-          </a:prstGeom>
-        </p:spPr>
-      </p:pic>
-      <p:sp>
-        <p:nvSpPr>
-          <p:cNvPr id="20" name="Text 15"/>
-          <p:cNvSpPr/>
-          <p:nvPr/>
-        </p:nvSpPr>
-        <p:spPr>
-          <a:xfrm>
-            <a:off x="1584655" y="4206240"/>
-            <a:ext cx="4160520" cy="685800"/>
-          </a:xfrm>
-          <a:prstGeom prst="rect">
-            <a:avLst/>
-          </a:prstGeom>
-          <a:noFill/>
-          <a:ln/>
-        </p:spPr>
-        <p:txBody>
-          <a:bodyPr wrap="square" lIns="0" tIns="0" rIns="0" bIns="0" rtlCol="0" anchor="ctr"/>
-          <a:lstStyle/>
-          <a:p>
-            <a:pPr rtl="1" algn="r" indent="0" marL="0">
-              <a:buNone/>
-            </a:pPr>
-            <a:r>
-              <a:rPr lang="en-US" sz="1700" b="1" dirty="0">
-                <a:solidFill>
-                  <a:srgbClr val="153139"/>
-                </a:solidFill>
-                <a:latin typeface="Cambria" pitchFamily="34" charset="0"/>
-                <a:ea typeface="Cambria" pitchFamily="34" charset="-122"/>
-                <a:cs typeface="Cambria" pitchFamily="34" charset="-120"/>
-              </a:rPr>
-              <a:t>הטיה וכיסוי</a:t>
-            </a:r>
-            <a:endParaRPr lang="en-US" sz="1700" dirty="0"/>
-          </a:p>
-        </p:txBody>
-      </p:sp>
-      <p:sp>
-        <p:nvSpPr>
-          <p:cNvPr id="21" name="Text 16"/>
-          <p:cNvSpPr/>
-          <p:nvPr/>
-        </p:nvSpPr>
-        <p:spPr>
-          <a:xfrm>
-            <a:off x="816559" y="4937760"/>
-            <a:ext cx="4892040" cy="777240"/>
-          </a:xfrm>
-          <a:prstGeom prst="rect">
-            <a:avLst/>
-          </a:prstGeom>
-          <a:noFill/>
-          <a:ln/>
-        </p:spPr>
-        <p:txBody>
-          <a:bodyPr wrap="square" lIns="0" tIns="0" rIns="0" bIns="0" rtlCol="0" anchor="ctr"/>
-          <a:lstStyle/>
-          <a:p>
-            <a:pPr rtl="1" algn="r" indent="0" marL="0">
-              <a:lnSpc>
-                <a:spcPct val="115000"/>
-              </a:lnSpc>
-              <a:buNone/>
-            </a:pPr>
-            <a:r>
-              <a:rPr lang="en-US" sz="1250" dirty="0">
-                <a:solidFill>
-                  <a:srgbClr val="5C6B72"/>
-                </a:solidFill>
-                <a:latin typeface="Calibri" pitchFamily="34" charset="0"/>
-                <a:ea typeface="Calibri" pitchFamily="34" charset="-122"/>
-                <a:cs typeface="Calibri" pitchFamily="34" charset="-120"/>
-              </a:rPr>
-              <a:t>שישה תחומים בלבד; המורפולוגיה העברית פוגעת בלקסיקלי; ל-AlephBERT ייתכנו הטיות מקדם-אימון.</a:t>
-            </a:r>
-            <a:endParaRPr lang="en-US" sz="1250" dirty="0"/>
-          </a:p>
-        </p:txBody>
-      </p:sp>
-      <p:sp>
-        <p:nvSpPr>
-          <p:cNvPr id="22" name="Shape 17"/>
-          <p:cNvSpPr/>
-          <p:nvPr/>
-        </p:nvSpPr>
-        <p:spPr>
-          <a:xfrm>
-            <a:off x="6202375" y="3931920"/>
-            <a:ext cx="5440680" cy="1874520"/>
-          </a:xfrm>
-          <a:prstGeom prst="roundRect">
-            <a:avLst>
-              <a:gd name="adj" fmla="val 3902"/>
-            </a:avLst>
-          </a:prstGeom>
-          <a:solidFill>
-            <a:srgbClr val="F4F9F9"/>
-          </a:solidFill>
-          <a:ln w="12700">
-            <a:solidFill>
-              <a:srgbClr val="DDE8E8"/>
-            </a:solidFill>
-            <a:prstDash val="solid"/>
-          </a:ln>
-          <a:effectLst>
-            <a:outerShdw sx="100000" sy="100000" kx="0" ky="0" algn="bl" rotWithShape="0" blurRad="76200" dist="25400" dir="5400000">
-              <a:srgbClr val="000000">
-                <a:alpha val="12000"/>
-              </a:srgbClr>
-            </a:outerShdw>
-          </a:effectLst>
-        </p:spPr>
-      </p:sp>
-      <p:sp>
-        <p:nvSpPr>
-          <p:cNvPr id="23" name="Shape 18"/>
-          <p:cNvSpPr/>
-          <p:nvPr/>
-        </p:nvSpPr>
-        <p:spPr>
-          <a:xfrm>
-            <a:off x="6412687" y="4251960"/>
-            <a:ext cx="658368" cy="658368"/>
-          </a:xfrm>
-          <a:prstGeom prst="ellipse">
-            <a:avLst/>
-          </a:prstGeom>
-          <a:solidFill>
-            <a:srgbClr val="0E8A8F"/>
-          </a:solidFill>
-          <a:ln/>
-          <a:effectLst>
-            <a:outerShdw sx="100000" sy="100000" kx="0" ky="0" algn="bl" rotWithShape="0" blurRad="76200" dist="25400" dir="5400000">
-              <a:srgbClr val="000000">
-                <a:alpha val="12000"/>
-              </a:srgbClr>
-            </a:outerShdw>
-          </a:effectLst>
-        </p:spPr>
-      </p:sp>
-      <p:pic>
-        <p:nvPicPr>
-          <p:cNvPr id="24" name="Image 3" descr="preencoded.png">    </p:cNvPr>
-          <p:cNvPicPr>
-            <a:picLocks noChangeAspect="1"/>
-          </p:cNvPicPr>
-          <p:nvPr/>
-        </p:nvPicPr>
-        <p:blipFill>
-          <a:blip r:embed="rId4"/>
-          <a:stretch>
-            <a:fillRect/>
-          </a:stretch>
-        </p:blipFill>
-        <p:spPr>
-          <a:xfrm>
-            <a:off x="6590447" y="4429719"/>
-            <a:ext cx="302849" cy="302849"/>
-          </a:xfrm>
-          <a:prstGeom prst="rect">
-            <a:avLst/>
-          </a:prstGeom>
-        </p:spPr>
-      </p:pic>
-      <p:sp>
-        <p:nvSpPr>
-          <p:cNvPr id="25" name="Text 19"/>
-          <p:cNvSpPr/>
-          <p:nvPr/>
-        </p:nvSpPr>
-        <p:spPr>
-          <a:xfrm>
-            <a:off x="7208215" y="4206240"/>
-            <a:ext cx="4160520" cy="685800"/>
-          </a:xfrm>
-          <a:prstGeom prst="rect">
-            <a:avLst/>
-          </a:prstGeom>
-          <a:noFill/>
-          <a:ln/>
-        </p:spPr>
-        <p:txBody>
-          <a:bodyPr wrap="square" lIns="0" tIns="0" rIns="0" bIns="0" rtlCol="0" anchor="ctr"/>
-          <a:lstStyle/>
-          <a:p>
-            <a:pPr rtl="1" algn="r" indent="0" marL="0">
-              <a:buNone/>
-            </a:pPr>
-            <a:r>
-              <a:rPr lang="en-US" sz="1700" b="1" dirty="0">
-                <a:solidFill>
-                  <a:srgbClr val="153139"/>
-                </a:solidFill>
-                <a:latin typeface="Cambria" pitchFamily="34" charset="0"/>
-                <a:ea typeface="Cambria" pitchFamily="34" charset="-122"/>
-                <a:cs typeface="Cambria" pitchFamily="34" charset="-120"/>
-              </a:rPr>
-              <a:t>סט הערכה קטן</a:t>
-            </a:r>
-            <a:endParaRPr lang="en-US" sz="1700" dirty="0"/>
-          </a:p>
-        </p:txBody>
-      </p:sp>
-      <p:sp>
-        <p:nvSpPr>
-          <p:cNvPr id="26" name="Text 20"/>
-          <p:cNvSpPr/>
-          <p:nvPr/>
-        </p:nvSpPr>
-        <p:spPr>
-          <a:xfrm>
-            <a:off x="6440119" y="4937760"/>
-            <a:ext cx="4892040" cy="777240"/>
-          </a:xfrm>
-          <a:prstGeom prst="rect">
-            <a:avLst/>
-          </a:prstGeom>
-          <a:noFill/>
-          <a:ln/>
-        </p:spPr>
-        <p:txBody>
-          <a:bodyPr wrap="square" lIns="0" tIns="0" rIns="0" bIns="0" rtlCol="0" anchor="ctr"/>
-          <a:lstStyle/>
-          <a:p>
-            <a:pPr rtl="1" algn="r" indent="0" marL="0">
-              <a:lnSpc>
-                <a:spcPct val="115000"/>
-              </a:lnSpc>
-              <a:buNone/>
-            </a:pPr>
-            <a:r>
-              <a:rPr lang="en-US" sz="1250" dirty="0">
-                <a:solidFill>
-                  <a:srgbClr val="5C6B72"/>
-                </a:solidFill>
-                <a:latin typeface="Calibri" pitchFamily="34" charset="0"/>
-                <a:ea typeface="Calibri" pitchFamily="34" charset="-122"/>
-                <a:cs typeface="Calibri" pitchFamily="34" charset="-120"/>
-              </a:rPr>
-              <a:t>40 שאלות, מתייג יחיד: מצביע על מגמה, אך אינו מובהק סטטיסטית.</a:t>
-            </a:r>
-            <a:endParaRPr lang="en-US" sz="1250" dirty="0"/>
           </a:p>
         </p:txBody>
       </p:sp>
@@ -15568,6 +15805,861 @@
 <file path=ppt/slides/slide20.xml><?xml version="1.0" encoding="utf-8"?>
 <p:sld xmlns:a="http://schemas.openxmlformats.org/drawingml/2006/main" xmlns:r="http://schemas.openxmlformats.org/officeDocument/2006/relationships" xmlns:p="http://schemas.openxmlformats.org/presentationml/2006/main">
   <p:cSld name="Slide 20">
+    <p:bg>
+      <p:bgPr>
+        <a:solidFill>
+          <a:srgbClr val="FFFFFF"/>
+        </a:solidFill>
+      </p:bgPr>
+    </p:bg>
+    <p:spTree>
+      <p:nvGrpSpPr>
+        <p:cNvPr id="1" name=""/>
+        <p:cNvGrpSpPr/>
+        <p:nvPr/>
+      </p:nvGrpSpPr>
+      <p:grpSpPr>
+        <a:xfrm>
+          <a:off x="0" y="0"/>
+          <a:ext cx="0" cy="0"/>
+          <a:chOff x="0" y="0"/>
+          <a:chExt cx="0" cy="0"/>
+        </a:xfrm>
+      </p:grpSpPr>
+      <p:sp>
+        <p:nvSpPr>
+          <p:cNvPr id="2" name="Shape 0"/>
+          <p:cNvSpPr/>
+          <p:nvPr/>
+        </p:nvSpPr>
+        <p:spPr>
+          <a:xfrm>
+            <a:off x="11313871" y="457200"/>
+            <a:ext cx="310896" cy="310896"/>
+          </a:xfrm>
+          <a:prstGeom prst="ellipse">
+            <a:avLst/>
+          </a:prstGeom>
+          <a:ln w="25400">
+            <a:solidFill>
+              <a:srgbClr val="0E8A8F"/>
+            </a:solidFill>
+            <a:prstDash val="solid"/>
+          </a:ln>
+        </p:spPr>
+      </p:sp>
+      <p:sp>
+        <p:nvSpPr>
+          <p:cNvPr id="3" name="Shape 1"/>
+          <p:cNvSpPr/>
+          <p:nvPr/>
+        </p:nvSpPr>
+        <p:spPr>
+          <a:xfrm>
+            <a:off x="11414455" y="557784"/>
+            <a:ext cx="109728" cy="109728"/>
+          </a:xfrm>
+          <a:prstGeom prst="ellipse">
+            <a:avLst/>
+          </a:prstGeom>
+          <a:solidFill>
+            <a:srgbClr val="0E8A8F"/>
+          </a:solidFill>
+          <a:ln/>
+        </p:spPr>
+      </p:sp>
+      <p:sp>
+        <p:nvSpPr>
+          <p:cNvPr id="4" name="Text 2"/>
+          <p:cNvSpPr/>
+          <p:nvPr/>
+        </p:nvSpPr>
+        <p:spPr>
+          <a:xfrm>
+            <a:off x="2060143" y="420624"/>
+            <a:ext cx="9144000" cy="274320"/>
+          </a:xfrm>
+          <a:prstGeom prst="rect">
+            <a:avLst/>
+          </a:prstGeom>
+          <a:noFill/>
+          <a:ln/>
+        </p:spPr>
+        <p:txBody>
+          <a:bodyPr wrap="square" lIns="0" tIns="0" rIns="0" bIns="0" rtlCol="0" anchor="ctr"/>
+          <a:lstStyle/>
+          <a:p>
+            <a:pPr rtl="1" algn="r" indent="0" marL="0">
+              <a:buNone/>
+            </a:pPr>
+            <a:r>
+              <a:rPr lang="en-US" sz="1200" b="1" spc="100" kern="0" dirty="0">
+                <a:solidFill>
+                  <a:srgbClr val="0E8A8F"/>
+                </a:solidFill>
+                <a:latin typeface="Calibri" pitchFamily="34" charset="0"/>
+                <a:ea typeface="Calibri" pitchFamily="34" charset="-122"/>
+                <a:cs typeface="Calibri" pitchFamily="34" charset="-120"/>
+              </a:rPr>
+              <a:t>NLP אחראי</a:t>
+            </a:r>
+            <a:endParaRPr lang="en-US" sz="1200" dirty="0"/>
+          </a:p>
+        </p:txBody>
+      </p:sp>
+      <p:sp>
+        <p:nvSpPr>
+          <p:cNvPr id="5" name="Text 3"/>
+          <p:cNvSpPr/>
+          <p:nvPr/>
+        </p:nvSpPr>
+        <p:spPr>
+          <a:xfrm>
+            <a:off x="578815" y="713232"/>
+            <a:ext cx="11064240" cy="640080"/>
+          </a:xfrm>
+          <a:prstGeom prst="rect">
+            <a:avLst/>
+          </a:prstGeom>
+          <a:noFill/>
+          <a:ln/>
+        </p:spPr>
+        <p:txBody>
+          <a:bodyPr wrap="square" lIns="0" tIns="0" rIns="0" bIns="0" rtlCol="0" anchor="ctr"/>
+          <a:lstStyle/>
+          <a:p>
+            <a:pPr rtl="1" algn="r" indent="0" marL="0">
+              <a:buNone/>
+            </a:pPr>
+            <a:r>
+              <a:rPr lang="en-US" sz="3000" b="1" dirty="0">
+                <a:solidFill>
+                  <a:srgbClr val="153139"/>
+                </a:solidFill>
+                <a:latin typeface="Cambria" pitchFamily="34" charset="0"/>
+                <a:ea typeface="Cambria" pitchFamily="34" charset="-122"/>
+                <a:cs typeface="Cambria" pitchFamily="34" charset="-120"/>
+              </a:rPr>
+              <a:t>אתיקה ומגבלות</a:t>
+            </a:r>
+            <a:endParaRPr lang="en-US" sz="3000" dirty="0"/>
+          </a:p>
+        </p:txBody>
+      </p:sp>
+      <p:sp>
+        <p:nvSpPr>
+          <p:cNvPr id="6" name="Text 4"/>
+          <p:cNvSpPr/>
+          <p:nvPr/>
+        </p:nvSpPr>
+        <p:spPr>
+          <a:xfrm>
+            <a:off x="121615" y="6400800"/>
+            <a:ext cx="457200" cy="274320"/>
+          </a:xfrm>
+          <a:prstGeom prst="rect">
+            <a:avLst/>
+          </a:prstGeom>
+          <a:noFill/>
+          <a:ln/>
+        </p:spPr>
+        <p:txBody>
+          <a:bodyPr wrap="square" lIns="0" tIns="0" rIns="0" bIns="0" rtlCol="0" anchor="ctr"/>
+          <a:lstStyle/>
+          <a:p>
+            <a:pPr rtl="1" algn="r" indent="0" marL="0">
+              <a:buNone/>
+            </a:pPr>
+            <a:r>
+              <a:rPr lang="en-US" sz="1000" dirty="0">
+                <a:solidFill>
+                  <a:srgbClr val="5C6B72"/>
+                </a:solidFill>
+                <a:latin typeface="Calibri" pitchFamily="34" charset="0"/>
+                <a:ea typeface="Calibri" pitchFamily="34" charset="-122"/>
+                <a:cs typeface="Calibri" pitchFamily="34" charset="-120"/>
+              </a:rPr>
+              <a:t>18</a:t>
+            </a:r>
+            <a:endParaRPr lang="en-US" sz="1000" dirty="0"/>
+          </a:p>
+        </p:txBody>
+      </p:sp>
+      <p:sp>
+        <p:nvSpPr>
+          <p:cNvPr id="7" name="Shape 5"/>
+          <p:cNvSpPr/>
+          <p:nvPr/>
+        </p:nvSpPr>
+        <p:spPr>
+          <a:xfrm>
+            <a:off x="578815" y="1783080"/>
+            <a:ext cx="5440680" cy="1874520"/>
+          </a:xfrm>
+          <a:prstGeom prst="roundRect">
+            <a:avLst>
+              <a:gd name="adj" fmla="val 3902"/>
+            </a:avLst>
+          </a:prstGeom>
+          <a:solidFill>
+            <a:srgbClr val="EAF4F4"/>
+          </a:solidFill>
+          <a:ln w="12700">
+            <a:solidFill>
+              <a:srgbClr val="DDE8E8"/>
+            </a:solidFill>
+            <a:prstDash val="solid"/>
+          </a:ln>
+          <a:effectLst>
+            <a:outerShdw sx="100000" sy="100000" kx="0" ky="0" algn="bl" rotWithShape="0" blurRad="76200" dist="25400" dir="5400000">
+              <a:srgbClr val="000000">
+                <a:alpha val="12000"/>
+              </a:srgbClr>
+            </a:outerShdw>
+          </a:effectLst>
+        </p:spPr>
+      </p:sp>
+      <p:sp>
+        <p:nvSpPr>
+          <p:cNvPr id="8" name="Shape 6"/>
+          <p:cNvSpPr/>
+          <p:nvPr/>
+        </p:nvSpPr>
+        <p:spPr>
+          <a:xfrm>
+            <a:off x="789127" y="2103120"/>
+            <a:ext cx="658368" cy="658368"/>
+          </a:xfrm>
+          <a:prstGeom prst="ellipse">
+            <a:avLst/>
+          </a:prstGeom>
+          <a:solidFill>
+            <a:srgbClr val="0E8A8F"/>
+          </a:solidFill>
+          <a:ln/>
+          <a:effectLst>
+            <a:outerShdw sx="100000" sy="100000" kx="0" ky="0" algn="bl" rotWithShape="0" blurRad="76200" dist="25400" dir="5400000">
+              <a:srgbClr val="000000">
+                <a:alpha val="12000"/>
+              </a:srgbClr>
+            </a:outerShdw>
+          </a:effectLst>
+        </p:spPr>
+      </p:sp>
+      <p:pic>
+        <p:nvPicPr>
+          <p:cNvPr id="9" name="Image 0" descr="preencoded.png">    </p:cNvPr>
+          <p:cNvPicPr>
+            <a:picLocks noChangeAspect="1"/>
+          </p:cNvPicPr>
+          <p:nvPr/>
+        </p:nvPicPr>
+        <p:blipFill>
+          <a:blip r:embed="rId1"/>
+          <a:stretch>
+            <a:fillRect/>
+          </a:stretch>
+        </p:blipFill>
+        <p:spPr>
+          <a:xfrm>
+            <a:off x="966887" y="2280879"/>
+            <a:ext cx="302849" cy="302849"/>
+          </a:xfrm>
+          <a:prstGeom prst="rect">
+            <a:avLst/>
+          </a:prstGeom>
+        </p:spPr>
+      </p:pic>
+      <p:sp>
+        <p:nvSpPr>
+          <p:cNvPr id="10" name="Text 7"/>
+          <p:cNvSpPr/>
+          <p:nvPr/>
+        </p:nvSpPr>
+        <p:spPr>
+          <a:xfrm>
+            <a:off x="1584655" y="2057400"/>
+            <a:ext cx="4160520" cy="685800"/>
+          </a:xfrm>
+          <a:prstGeom prst="rect">
+            <a:avLst/>
+          </a:prstGeom>
+          <a:noFill/>
+          <a:ln/>
+        </p:spPr>
+        <p:txBody>
+          <a:bodyPr wrap="square" lIns="0" tIns="0" rIns="0" bIns="0" rtlCol="0" anchor="ctr"/>
+          <a:lstStyle/>
+          <a:p>
+            <a:pPr rtl="1" algn="r" indent="0" marL="0">
+              <a:buNone/>
+            </a:pPr>
+            <a:r>
+              <a:rPr lang="en-US" sz="1700" b="1" dirty="0">
+                <a:solidFill>
+                  <a:srgbClr val="153139"/>
+                </a:solidFill>
+                <a:latin typeface="Cambria" pitchFamily="34" charset="0"/>
+                <a:ea typeface="Cambria" pitchFamily="34" charset="-122"/>
+                <a:cs typeface="Cambria" pitchFamily="34" charset="-120"/>
+              </a:rPr>
+              <a:t>נתונים ציבוריים ומורשים</a:t>
+            </a:r>
+            <a:endParaRPr lang="en-US" sz="1700" dirty="0"/>
+          </a:p>
+        </p:txBody>
+      </p:sp>
+      <p:sp>
+        <p:nvSpPr>
+          <p:cNvPr id="11" name="Text 8"/>
+          <p:cNvSpPr/>
+          <p:nvPr/>
+        </p:nvSpPr>
+        <p:spPr>
+          <a:xfrm>
+            <a:off x="816559" y="2788920"/>
+            <a:ext cx="4892040" cy="777240"/>
+          </a:xfrm>
+          <a:prstGeom prst="rect">
+            <a:avLst/>
+          </a:prstGeom>
+          <a:noFill/>
+          <a:ln/>
+        </p:spPr>
+        <p:txBody>
+          <a:bodyPr wrap="square" lIns="0" tIns="0" rIns="0" bIns="0" rtlCol="0" anchor="ctr"/>
+          <a:lstStyle/>
+          <a:p>
+            <a:pPr rtl="1" algn="r" indent="0" marL="0">
+              <a:lnSpc>
+                <a:spcPct val="115000"/>
+              </a:lnSpc>
+              <a:buNone/>
+            </a:pPr>
+            <a:r>
+              <a:rPr lang="en-US" sz="1250" dirty="0">
+                <a:solidFill>
+                  <a:srgbClr val="5C6B72"/>
+                </a:solidFill>
+                <a:latin typeface="Calibri" pitchFamily="34" charset="0"/>
+                <a:ea typeface="Calibri" pitchFamily="34" charset="-122"/>
+                <a:cs typeface="Calibri" pitchFamily="34" charset="-120"/>
+              </a:rPr>
+              <a:t>כל-זכות (CC-BY-SA) + מידע ציבורי של ביטוח לאומי. ללא מידע אישי, ללא סריקת תוכן משתמשים.</a:t>
+            </a:r>
+            <a:endParaRPr lang="en-US" sz="1250" dirty="0"/>
+          </a:p>
+        </p:txBody>
+      </p:sp>
+      <p:sp>
+        <p:nvSpPr>
+          <p:cNvPr id="12" name="Shape 9"/>
+          <p:cNvSpPr/>
+          <p:nvPr/>
+        </p:nvSpPr>
+        <p:spPr>
+          <a:xfrm>
+            <a:off x="6202375" y="1783080"/>
+            <a:ext cx="5440680" cy="1874520"/>
+          </a:xfrm>
+          <a:prstGeom prst="roundRect">
+            <a:avLst>
+              <a:gd name="adj" fmla="val 3902"/>
+            </a:avLst>
+          </a:prstGeom>
+          <a:solidFill>
+            <a:srgbClr val="EAF4F4"/>
+          </a:solidFill>
+          <a:ln w="12700">
+            <a:solidFill>
+              <a:srgbClr val="DDE8E8"/>
+            </a:solidFill>
+            <a:prstDash val="solid"/>
+          </a:ln>
+          <a:effectLst>
+            <a:outerShdw sx="100000" sy="100000" kx="0" ky="0" algn="bl" rotWithShape="0" blurRad="76200" dist="25400" dir="5400000">
+              <a:srgbClr val="000000">
+                <a:alpha val="12000"/>
+              </a:srgbClr>
+            </a:outerShdw>
+          </a:effectLst>
+        </p:spPr>
+      </p:sp>
+      <p:sp>
+        <p:nvSpPr>
+          <p:cNvPr id="13" name="Shape 10"/>
+          <p:cNvSpPr/>
+          <p:nvPr/>
+        </p:nvSpPr>
+        <p:spPr>
+          <a:xfrm>
+            <a:off x="6412687" y="2103120"/>
+            <a:ext cx="658368" cy="658368"/>
+          </a:xfrm>
+          <a:prstGeom prst="ellipse">
+            <a:avLst/>
+          </a:prstGeom>
+          <a:solidFill>
+            <a:srgbClr val="E0852F"/>
+          </a:solidFill>
+          <a:ln/>
+          <a:effectLst>
+            <a:outerShdw sx="100000" sy="100000" kx="0" ky="0" algn="bl" rotWithShape="0" blurRad="76200" dist="25400" dir="5400000">
+              <a:srgbClr val="000000">
+                <a:alpha val="12000"/>
+              </a:srgbClr>
+            </a:outerShdw>
+          </a:effectLst>
+        </p:spPr>
+      </p:sp>
+      <p:pic>
+        <p:nvPicPr>
+          <p:cNvPr id="14" name="Image 1" descr="preencoded.png">    </p:cNvPr>
+          <p:cNvPicPr>
+            <a:picLocks noChangeAspect="1"/>
+          </p:cNvPicPr>
+          <p:nvPr/>
+        </p:nvPicPr>
+        <p:blipFill>
+          <a:blip r:embed="rId2"/>
+          <a:stretch>
+            <a:fillRect/>
+          </a:stretch>
+        </p:blipFill>
+        <p:spPr>
+          <a:xfrm>
+            <a:off x="6590447" y="2280879"/>
+            <a:ext cx="302849" cy="302849"/>
+          </a:xfrm>
+          <a:prstGeom prst="rect">
+            <a:avLst/>
+          </a:prstGeom>
+        </p:spPr>
+      </p:pic>
+      <p:sp>
+        <p:nvSpPr>
+          <p:cNvPr id="15" name="Text 11"/>
+          <p:cNvSpPr/>
+          <p:nvPr/>
+        </p:nvSpPr>
+        <p:spPr>
+          <a:xfrm>
+            <a:off x="7208215" y="2057400"/>
+            <a:ext cx="4160520" cy="685800"/>
+          </a:xfrm>
+          <a:prstGeom prst="rect">
+            <a:avLst/>
+          </a:prstGeom>
+          <a:noFill/>
+          <a:ln/>
+        </p:spPr>
+        <p:txBody>
+          <a:bodyPr wrap="square" lIns="0" tIns="0" rIns="0" bIns="0" rtlCol="0" anchor="ctr"/>
+          <a:lstStyle/>
+          <a:p>
+            <a:pPr rtl="1" algn="r" indent="0" marL="0">
+              <a:buNone/>
+            </a:pPr>
+            <a:r>
+              <a:rPr lang="en-US" sz="1700" b="1" dirty="0">
+                <a:solidFill>
+                  <a:srgbClr val="153139"/>
+                </a:solidFill>
+                <a:latin typeface="Cambria" pitchFamily="34" charset="0"/>
+                <a:ea typeface="Cambria" pitchFamily="34" charset="-122"/>
+                <a:cs typeface="Cambria" pitchFamily="34" charset="-120"/>
+              </a:rPr>
+              <a:t>אינו ייעוץ משפטי</a:t>
+            </a:r>
+            <a:endParaRPr lang="en-US" sz="1700" dirty="0"/>
+          </a:p>
+        </p:txBody>
+      </p:sp>
+      <p:sp>
+        <p:nvSpPr>
+          <p:cNvPr id="16" name="Text 12"/>
+          <p:cNvSpPr/>
+          <p:nvPr/>
+        </p:nvSpPr>
+        <p:spPr>
+          <a:xfrm>
+            <a:off x="6440119" y="2788920"/>
+            <a:ext cx="4892040" cy="777240"/>
+          </a:xfrm>
+          <a:prstGeom prst="rect">
+            <a:avLst/>
+          </a:prstGeom>
+          <a:noFill/>
+          <a:ln/>
+        </p:spPr>
+        <p:txBody>
+          <a:bodyPr wrap="square" lIns="0" tIns="0" rIns="0" bIns="0" rtlCol="0" anchor="ctr"/>
+          <a:lstStyle/>
+          <a:p>
+            <a:pPr rtl="1" algn="r" indent="0" marL="0">
+              <a:lnSpc>
+                <a:spcPct val="115000"/>
+              </a:lnSpc>
+              <a:buNone/>
+            </a:pPr>
+            <a:r>
+              <a:rPr lang="en-US" sz="1250" dirty="0">
+                <a:solidFill>
+                  <a:srgbClr val="5C6B72"/>
+                </a:solidFill>
+                <a:latin typeface="Calibri" pitchFamily="34" charset="0"/>
+                <a:ea typeface="Calibri" pitchFamily="34" charset="-122"/>
+                <a:cs typeface="Calibri" pitchFamily="34" charset="-120"/>
+              </a:rPr>
+              <a:t>אב-טיפוס מחקרי. שימוש אמיתי חייב להציג קישורי מקור ולהפנות לרשות המוסמכת.</a:t>
+            </a:r>
+            <a:endParaRPr lang="en-US" sz="1250" dirty="0"/>
+          </a:p>
+        </p:txBody>
+      </p:sp>
+      <p:sp>
+        <p:nvSpPr>
+          <p:cNvPr id="17" name="Shape 13"/>
+          <p:cNvSpPr/>
+          <p:nvPr/>
+        </p:nvSpPr>
+        <p:spPr>
+          <a:xfrm>
+            <a:off x="578815" y="3931920"/>
+            <a:ext cx="5440680" cy="1874520"/>
+          </a:xfrm>
+          <a:prstGeom prst="roundRect">
+            <a:avLst>
+              <a:gd name="adj" fmla="val 3902"/>
+            </a:avLst>
+          </a:prstGeom>
+          <a:solidFill>
+            <a:srgbClr val="F4F9F9"/>
+          </a:solidFill>
+          <a:ln w="12700">
+            <a:solidFill>
+              <a:srgbClr val="DDE8E8"/>
+            </a:solidFill>
+            <a:prstDash val="solid"/>
+          </a:ln>
+          <a:effectLst>
+            <a:outerShdw sx="100000" sy="100000" kx="0" ky="0" algn="bl" rotWithShape="0" blurRad="76200" dist="25400" dir="5400000">
+              <a:srgbClr val="000000">
+                <a:alpha val="12000"/>
+              </a:srgbClr>
+            </a:outerShdw>
+          </a:effectLst>
+        </p:spPr>
+      </p:sp>
+      <p:sp>
+        <p:nvSpPr>
+          <p:cNvPr id="18" name="Shape 14"/>
+          <p:cNvSpPr/>
+          <p:nvPr/>
+        </p:nvSpPr>
+        <p:spPr>
+          <a:xfrm>
+            <a:off x="789127" y="4251960"/>
+            <a:ext cx="658368" cy="658368"/>
+          </a:xfrm>
+          <a:prstGeom prst="ellipse">
+            <a:avLst/>
+          </a:prstGeom>
+          <a:solidFill>
+            <a:srgbClr val="0E8A8F"/>
+          </a:solidFill>
+          <a:ln/>
+          <a:effectLst>
+            <a:outerShdw sx="100000" sy="100000" kx="0" ky="0" algn="bl" rotWithShape="0" blurRad="76200" dist="25400" dir="5400000">
+              <a:srgbClr val="000000">
+                <a:alpha val="12000"/>
+              </a:srgbClr>
+            </a:outerShdw>
+          </a:effectLst>
+        </p:spPr>
+      </p:sp>
+      <p:pic>
+        <p:nvPicPr>
+          <p:cNvPr id="19" name="Image 2" descr="preencoded.png">    </p:cNvPr>
+          <p:cNvPicPr>
+            <a:picLocks noChangeAspect="1"/>
+          </p:cNvPicPr>
+          <p:nvPr/>
+        </p:nvPicPr>
+        <p:blipFill>
+          <a:blip r:embed="rId3"/>
+          <a:stretch>
+            <a:fillRect/>
+          </a:stretch>
+        </p:blipFill>
+        <p:spPr>
+          <a:xfrm>
+            <a:off x="966887" y="4429719"/>
+            <a:ext cx="302849" cy="302849"/>
+          </a:xfrm>
+          <a:prstGeom prst="rect">
+            <a:avLst/>
+          </a:prstGeom>
+        </p:spPr>
+      </p:pic>
+      <p:sp>
+        <p:nvSpPr>
+          <p:cNvPr id="20" name="Text 15"/>
+          <p:cNvSpPr/>
+          <p:nvPr/>
+        </p:nvSpPr>
+        <p:spPr>
+          <a:xfrm>
+            <a:off x="1584655" y="4206240"/>
+            <a:ext cx="4160520" cy="685800"/>
+          </a:xfrm>
+          <a:prstGeom prst="rect">
+            <a:avLst/>
+          </a:prstGeom>
+          <a:noFill/>
+          <a:ln/>
+        </p:spPr>
+        <p:txBody>
+          <a:bodyPr wrap="square" lIns="0" tIns="0" rIns="0" bIns="0" rtlCol="0" anchor="ctr"/>
+          <a:lstStyle/>
+          <a:p>
+            <a:pPr rtl="1" algn="r" indent="0" marL="0">
+              <a:buNone/>
+            </a:pPr>
+            <a:r>
+              <a:rPr lang="en-US" sz="1700" b="1" dirty="0">
+                <a:solidFill>
+                  <a:srgbClr val="153139"/>
+                </a:solidFill>
+                <a:latin typeface="Cambria" pitchFamily="34" charset="0"/>
+                <a:ea typeface="Cambria" pitchFamily="34" charset="-122"/>
+                <a:cs typeface="Cambria" pitchFamily="34" charset="-120"/>
+              </a:rPr>
+              <a:t>הטיה וכיסוי</a:t>
+            </a:r>
+            <a:endParaRPr lang="en-US" sz="1700" dirty="0"/>
+          </a:p>
+        </p:txBody>
+      </p:sp>
+      <p:sp>
+        <p:nvSpPr>
+          <p:cNvPr id="21" name="Text 16"/>
+          <p:cNvSpPr/>
+          <p:nvPr/>
+        </p:nvSpPr>
+        <p:spPr>
+          <a:xfrm>
+            <a:off x="816559" y="4937760"/>
+            <a:ext cx="4892040" cy="777240"/>
+          </a:xfrm>
+          <a:prstGeom prst="rect">
+            <a:avLst/>
+          </a:prstGeom>
+          <a:noFill/>
+          <a:ln/>
+        </p:spPr>
+        <p:txBody>
+          <a:bodyPr wrap="square" lIns="0" tIns="0" rIns="0" bIns="0" rtlCol="0" anchor="ctr"/>
+          <a:lstStyle/>
+          <a:p>
+            <a:pPr rtl="1" algn="r" indent="0" marL="0">
+              <a:lnSpc>
+                <a:spcPct val="115000"/>
+              </a:lnSpc>
+              <a:buNone/>
+            </a:pPr>
+            <a:r>
+              <a:rPr lang="en-US" sz="1250" dirty="0">
+                <a:solidFill>
+                  <a:srgbClr val="5C6B72"/>
+                </a:solidFill>
+                <a:latin typeface="Calibri" pitchFamily="34" charset="0"/>
+                <a:ea typeface="Calibri" pitchFamily="34" charset="-122"/>
+                <a:cs typeface="Calibri" pitchFamily="34" charset="-120"/>
+              </a:rPr>
+              <a:t>שישה תחומים בלבד; המורפולוגיה העברית פוגעת בלקסיקלי; ל-AlephBERT ייתכנו הטיות מקדם-אימון.</a:t>
+            </a:r>
+            <a:endParaRPr lang="en-US" sz="1250" dirty="0"/>
+          </a:p>
+        </p:txBody>
+      </p:sp>
+      <p:sp>
+        <p:nvSpPr>
+          <p:cNvPr id="22" name="Shape 17"/>
+          <p:cNvSpPr/>
+          <p:nvPr/>
+        </p:nvSpPr>
+        <p:spPr>
+          <a:xfrm>
+            <a:off x="6202375" y="3931920"/>
+            <a:ext cx="5440680" cy="1874520"/>
+          </a:xfrm>
+          <a:prstGeom prst="roundRect">
+            <a:avLst>
+              <a:gd name="adj" fmla="val 3902"/>
+            </a:avLst>
+          </a:prstGeom>
+          <a:solidFill>
+            <a:srgbClr val="F4F9F9"/>
+          </a:solidFill>
+          <a:ln w="12700">
+            <a:solidFill>
+              <a:srgbClr val="DDE8E8"/>
+            </a:solidFill>
+            <a:prstDash val="solid"/>
+          </a:ln>
+          <a:effectLst>
+            <a:outerShdw sx="100000" sy="100000" kx="0" ky="0" algn="bl" rotWithShape="0" blurRad="76200" dist="25400" dir="5400000">
+              <a:srgbClr val="000000">
+                <a:alpha val="12000"/>
+              </a:srgbClr>
+            </a:outerShdw>
+          </a:effectLst>
+        </p:spPr>
+      </p:sp>
+      <p:sp>
+        <p:nvSpPr>
+          <p:cNvPr id="23" name="Shape 18"/>
+          <p:cNvSpPr/>
+          <p:nvPr/>
+        </p:nvSpPr>
+        <p:spPr>
+          <a:xfrm>
+            <a:off x="6412687" y="4251960"/>
+            <a:ext cx="658368" cy="658368"/>
+          </a:xfrm>
+          <a:prstGeom prst="ellipse">
+            <a:avLst/>
+          </a:prstGeom>
+          <a:solidFill>
+            <a:srgbClr val="0E8A8F"/>
+          </a:solidFill>
+          <a:ln/>
+          <a:effectLst>
+            <a:outerShdw sx="100000" sy="100000" kx="0" ky="0" algn="bl" rotWithShape="0" blurRad="76200" dist="25400" dir="5400000">
+              <a:srgbClr val="000000">
+                <a:alpha val="12000"/>
+              </a:srgbClr>
+            </a:outerShdw>
+          </a:effectLst>
+        </p:spPr>
+      </p:sp>
+      <p:pic>
+        <p:nvPicPr>
+          <p:cNvPr id="24" name="Image 3" descr="preencoded.png">    </p:cNvPr>
+          <p:cNvPicPr>
+            <a:picLocks noChangeAspect="1"/>
+          </p:cNvPicPr>
+          <p:nvPr/>
+        </p:nvPicPr>
+        <p:blipFill>
+          <a:blip r:embed="rId4"/>
+          <a:stretch>
+            <a:fillRect/>
+          </a:stretch>
+        </p:blipFill>
+        <p:spPr>
+          <a:xfrm>
+            <a:off x="6590447" y="4429719"/>
+            <a:ext cx="302849" cy="302849"/>
+          </a:xfrm>
+          <a:prstGeom prst="rect">
+            <a:avLst/>
+          </a:prstGeom>
+        </p:spPr>
+      </p:pic>
+      <p:sp>
+        <p:nvSpPr>
+          <p:cNvPr id="25" name="Text 19"/>
+          <p:cNvSpPr/>
+          <p:nvPr/>
+        </p:nvSpPr>
+        <p:spPr>
+          <a:xfrm>
+            <a:off x="7208215" y="4206240"/>
+            <a:ext cx="4160520" cy="685800"/>
+          </a:xfrm>
+          <a:prstGeom prst="rect">
+            <a:avLst/>
+          </a:prstGeom>
+          <a:noFill/>
+          <a:ln/>
+        </p:spPr>
+        <p:txBody>
+          <a:bodyPr wrap="square" lIns="0" tIns="0" rIns="0" bIns="0" rtlCol="0" anchor="ctr"/>
+          <a:lstStyle/>
+          <a:p>
+            <a:pPr rtl="1" algn="r" indent="0" marL="0">
+              <a:buNone/>
+            </a:pPr>
+            <a:r>
+              <a:rPr lang="en-US" sz="1700" b="1" dirty="0">
+                <a:solidFill>
+                  <a:srgbClr val="153139"/>
+                </a:solidFill>
+                <a:latin typeface="Cambria" pitchFamily="34" charset="0"/>
+                <a:ea typeface="Cambria" pitchFamily="34" charset="-122"/>
+                <a:cs typeface="Cambria" pitchFamily="34" charset="-120"/>
+              </a:rPr>
+              <a:t>סט הערכה קטן</a:t>
+            </a:r>
+            <a:endParaRPr lang="en-US" sz="1700" dirty="0"/>
+          </a:p>
+        </p:txBody>
+      </p:sp>
+      <p:sp>
+        <p:nvSpPr>
+          <p:cNvPr id="26" name="Text 20"/>
+          <p:cNvSpPr/>
+          <p:nvPr/>
+        </p:nvSpPr>
+        <p:spPr>
+          <a:xfrm>
+            <a:off x="6440119" y="4937760"/>
+            <a:ext cx="4892040" cy="777240"/>
+          </a:xfrm>
+          <a:prstGeom prst="rect">
+            <a:avLst/>
+          </a:prstGeom>
+          <a:noFill/>
+          <a:ln/>
+        </p:spPr>
+        <p:txBody>
+          <a:bodyPr wrap="square" lIns="0" tIns="0" rIns="0" bIns="0" rtlCol="0" anchor="ctr"/>
+          <a:lstStyle/>
+          <a:p>
+            <a:pPr rtl="1" algn="r" indent="0" marL="0">
+              <a:lnSpc>
+                <a:spcPct val="115000"/>
+              </a:lnSpc>
+              <a:buNone/>
+            </a:pPr>
+            <a:r>
+              <a:rPr lang="en-US" sz="1250" dirty="0">
+                <a:solidFill>
+                  <a:srgbClr val="5C6B72"/>
+                </a:solidFill>
+                <a:latin typeface="Calibri" pitchFamily="34" charset="0"/>
+                <a:ea typeface="Calibri" pitchFamily="34" charset="-122"/>
+                <a:cs typeface="Calibri" pitchFamily="34" charset="-120"/>
+              </a:rPr>
+              <a:t>40 שאלות, מתייג יחיד: מצביע על מגמה, אך אינו מובהק סטטיסטית.</a:t>
+            </a:r>
+            <a:endParaRPr lang="en-US" sz="1250" dirty="0"/>
+          </a:p>
+        </p:txBody>
+      </p:sp>
+    </p:spTree>
+  </p:cSld>
+  <p:clrMapOvr>
+    <a:masterClrMapping/>
+  </p:clrMapOvr>
+</p:sld>
+</file>
+
+<file path=ppt/slides/slide21.xml><?xml version="1.0" encoding="utf-8"?>
+<p:sld xmlns:a="http://schemas.openxmlformats.org/drawingml/2006/main" xmlns:r="http://schemas.openxmlformats.org/officeDocument/2006/relationships" xmlns:p="http://schemas.openxmlformats.org/presentationml/2006/main">
+  <p:cSld name="Slide 21">
     <p:bg>
       <p:bgPr>
         <a:solidFill>

--- a/reports/presentation.pptx
+++ b/reports/presentation.pptx
@@ -1351,7 +1351,7 @@
           <a:p>
             <a:r>
               <a:rPr lang="en-US" dirty="0"/>
-              <a:t/>
+              <a:t>פתיחה: הציגו את עצמכם ואת הנושא במשפט — מערכת אחזור מידע בעברית שמגשרת בין שפת היומיום של אזרחים לבין הניסוח הרשמי של זכויות. שאלת-העל: האם חיפוש מבוסס-משמעות מנצח חיפוש מבוסס-מילים, והאם שילוב מנצח את שניהם. מסלול 3 — פרויקט מונחה-נתונים.</a:t>
             </a:r>
             <a:endParaRPr lang="en-US" dirty="0"/>
           </a:p>
@@ -1439,7 +1439,7 @@
           <a:p>
             <a:r>
               <a:rPr lang="en-US" dirty="0"/>
-              <a:t/>
+              <a:t>הדגמה חיה על שאלה אחת. ”פיטרו אותי“: הלקסיקלי מחמיץ לגמרי (אפס מילים משותפות), הסמנטי מדרג ”דמי אבטלה“ ראשון. שימו לב להגינות — ההיברידי כאן רק במקום 4. הוא לא תמיד ראשון לכל שאלה; יתרונו הוא במצטבר. (תשובה מצוינת לשאלת הגנה.)</a:t>
             </a:r>
             <a:endParaRPr lang="en-US" dirty="0"/>
           </a:p>
@@ -1527,7 +1527,7 @@
           <a:p>
             <a:r>
               <a:rPr lang="en-US" dirty="0"/>
-              <a:t/>
+              <a:t>RRF — נוסחה מבוססת-דירוג, ללא צורך בכיול ציונים, ולכן יציבה. המדדים: Recall@k (האם יש תשובה ב-top-k), MRR (דירוג התשובה הנכונה הראשונה), nDCG ו-MAP. המדידה היא ברמת המסמך — פסקה נחשבת עבור הדף שלה.</a:t>
             </a:r>
             <a:endParaRPr lang="en-US" dirty="0"/>
           </a:p>
@@ -1615,7 +1615,7 @@
           <a:p>
             <a:r>
               <a:rPr lang="en-US" dirty="0"/>
-              <a:t/>
+              <a:t>השקופית שעונה על ”איפה החלוקה לטסט/ולידציה“: זו בעיית אחזור ולכן החלוקה ברמת השאילתה. הקורפוס משמש כאינדקס (ללא תוויות); 40 השאלות מחולקות dev=14 / test=26, stratified לפי תחום, seed 42. לא כיווננו על השאלות ⇒ הטסט בלתי-מוטה. על הטסט המוחזק ההיברידי מוביל (MRR 0.690).</a:t>
             </a:r>
             <a:endParaRPr lang="en-US" dirty="0"/>
           </a:p>
@@ -1703,7 +1703,7 @@
           <a:p>
             <a:r>
               <a:rPr lang="en-US" dirty="0"/>
-              <a:t/>
+              <a:t>הטבלה והגרף: Hybrid-RRF מוביל בכל מדדי הדירוג (MRR 0.668, nDCG 0.704, MAP 0.652). שימו לב ש-AlephBERT לבדו (בכתום) הוא דווקא המודל החלש ביותר.</a:t>
             </a:r>
             <a:endParaRPr lang="en-US" dirty="0"/>
           </a:p>
@@ -1791,7 +1791,7 @@
           <a:p>
             <a:r>
               <a:rPr lang="en-US" dirty="0"/>
-              <a:t/>
+              <a:t>שני משפטים: H1 נדחתה — הסמנטי לבדו הכי חלש ואינו מנצח אפילו בשאלות עם פער-ניסוח גבוה. H2 אושרה — ההיברידי מוביל. מדוע? המודלים טועים במקומות שונים, והשילוב משלים. המסר: משלימים, לא עדיפים.</a:t>
             </a:r>
             <a:endParaRPr lang="en-US" dirty="0"/>
           </a:p>
@@ -1879,7 +1879,7 @@
           <a:p>
             <a:r>
               <a:rPr lang="en-US" dirty="0"/>
-              <a:t/>
+              <a:t>עקומת Recall@k וטבלת Recall@1 לפי פער-ניסוח. הנקודה: אפילו בפער גבוה הסמנטי אינו מקדים (0.44 מול 0.48) — מפריך את האינטואיציה. הסיבה: AlephBERT אינו מכוונן-אחזור (נגזר מ-masked-LM).</a:t>
             </a:r>
             <a:endParaRPr lang="en-US" dirty="0"/>
           </a:p>
@@ -1967,7 +1967,7 @@
           <a:p>
             <a:r>
               <a:rPr lang="en-US" dirty="0"/>
-              <a:t/>
+              <a:t>כל שורה היא שאלה; הצבע = דירוג התשובה הנכונה הראשונה. ירוקים ואפורים מתחלפים בין העמודות — המודלים נכשלים בשאלות שונות. אי-ההסכמה הזו היא בדיוק מה שהופך את השילוב למשתלם. החטאות: TF-IDF 6, AlephBERT 9, היברידי 5.</a:t>
             </a:r>
             <a:endParaRPr lang="en-US" dirty="0"/>
           </a:p>
@@ -2055,7 +2055,7 @@
           <a:p>
             <a:r>
               <a:rPr lang="en-US" dirty="0"/>
-              <a:t/>
+              <a:t>ניתוח שגיאות (דרישה: ≥10 דוגמאות; לנו 16): שלוש תבניות — A הסמנטי מנצח (סינונימיה/פער-ניסוח), B הלקסיקלי מנצח (מונח מדויק וחד), C שניהם נכשלים (כיסוי דל/אמביגואיות). הציגו דוגמה אחת מכל תבנית.</a:t>
             </a:r>
             <a:endParaRPr lang="en-US" dirty="0"/>
           </a:p>
@@ -2143,7 +2143,7 @@
           <a:p>
             <a:r>
               <a:rPr lang="en-US" dirty="0"/>
-              <a:t/>
+              <a:t>מרחב ההטמעות של AlephBERT בהיטל דו-ממדי: התחומים יוצרים אשכולות — המודל אכן לוכד משמעות נושאית — אך האשכולות חופפים, ולכן דירוג עדין עדיין זקוק לאות הלקסיקלי. זה ממחיש למה השילוב עוזר.</a:t>
             </a:r>
             <a:endParaRPr lang="en-US" dirty="0"/>
           </a:p>
@@ -2231,7 +2231,7 @@
           <a:p>
             <a:r>
               <a:rPr lang="en-US" dirty="0"/>
-              <a:t/>
+              <a:t>מסקנות: בנינו צינור IR עברי מלא וניתן לשחזור; ההיברידי הוא ההמלצה המעשית; מודל עברי מהמדף אינו ניצחון חינם לאחזור — אלא משלים. המשך: מודל מכוון-אחזור (E5), למטיזציה עברית, וסט הערכה גדול ומדורג יותר.</a:t>
             </a:r>
             <a:endParaRPr lang="en-US" dirty="0"/>
           </a:p>
@@ -2319,7 +2319,7 @@
           <a:p>
             <a:r>
               <a:rPr lang="en-US" dirty="0"/>
-              <a:t/>
+              <a:t>הסבירו את הפער: אזרח כותב ”פיטרו אותי, מה מגיע לי?“ אך הדף נקרא ”זכאות לדמי אבטלה“ — לרוב אפס מילים משותפות. כאן בדיוק חיפוש מילולי נכשל. זו בעיה חברתית אמיתית: זכויות לא ממומשות כי אנשים לא מוצאים את המידע.</a:t>
             </a:r>
             <a:endParaRPr lang="en-US" dirty="0"/>
           </a:p>
@@ -2407,7 +2407,7 @@
           <a:p>
             <a:r>
               <a:rPr lang="en-US" dirty="0"/>
-              <a:t/>
+              <a:t>אתיקה: נתונים ציבוריים ומורשים (CC-BY-SA), ללא מידע אישי; המערכת אינה ייעוץ משפטי — אב-טיפוס מחקרי שחייב להפנות לרשות; הטיות אפשריות וכיסוי מוגבל לשישה תחומים; סט הערכה קטן (מצביע ולא מובהק).</a:t>
             </a:r>
             <a:endParaRPr lang="en-US" dirty="0"/>
           </a:p>
@@ -2495,7 +2495,7 @@
           <a:p>
             <a:r>
               <a:rPr lang="en-US" dirty="0"/>
-              <a:t/>
+              <a:t>סיכום ותודה. גילוי נאות: נעשה שימוש בעוזר AI ככלי לכתיבת קוד בלבד; תכנון המחקר, הנתונים, סט ההערכה והמסקנות הם שלי, וכל הקוד נבדק והובן. הזמינו שאלות להגנה.</a:t>
             </a:r>
             <a:endParaRPr lang="en-US" dirty="0"/>
           </a:p>
@@ -2583,7 +2583,7 @@
           <a:p>
             <a:r>
               <a:rPr lang="en-US" dirty="0"/>
-              <a:t/>
+              <a:t>שתי השערות: H1 — הסמנטי (AlephBERT) ינצח את הלקסיקלי, במיוחד בשאלות מנוסחות-רחוק. H2 — שילוב ינצח את שניהם. ספוילר: H2 התאשרה, H1 נדחתה — והניגוד הזה הוא הממצא המעניין של הפרויקט.</a:t>
             </a:r>
             <a:endParaRPr lang="en-US" dirty="0"/>
           </a:p>
@@ -2671,7 +2671,7 @@
           <a:p>
             <a:r>
               <a:rPr lang="en-US" dirty="0"/>
-              <a:t/>
+              <a:t>סקירת ה-Pipeline המלא (דרישת מסלול 3): איסוף ← עיבוד מקדים ← אינדוקס ← שילוב ← הערכה. הכול רץ בפקודה אחת וניתן לשחזור מלא. הקריאה היא מימין לשמאל — איסוף ראשון.</a:t>
             </a:r>
             <a:endParaRPr lang="en-US" dirty="0"/>
           </a:p>
@@ -2759,7 +2759,7 @@
           <a:p>
             <a:r>
               <a:rPr lang="en-US" dirty="0"/>
-              <a:t/>
+              <a:t>קורפוס שנאסף עצמאית (ללא Kaggle): 296 מסמכים, 1,602 פסקאות. מקור עיקרי — כל-זכות דרך MediaWiki API (טקסט נקי, רישיון CC-BY-SA); משלים — ביטוח לאומי. סט הערכה: 40 שאלות יומיומיות שכתבנו ידנית עם מסמכי אמת. הזכירו שכיבדנו robots.txt.</a:t>
             </a:r>
             <a:endParaRPr lang="en-US" dirty="0"/>
           </a:p>
@@ -2847,7 +2847,7 @@
           <a:p>
             <a:r>
               <a:rPr lang="en-US" dirty="0"/>
-              <a:t/>
+              <a:t>כאן ה-NLP הבסיסי שנלמד בקורס: נרמול (הסרת ניקוד, פיסוק), טוקניזציה, והסרת 94 מילות עצירה. דוגמה: פסקה של 33 טוקנים יורדת ל-26 טוקני תוכן. זה הזרם שמזין את המודלים הלקסיקליים.</a:t>
             </a:r>
             <a:endParaRPr lang="en-US" dirty="0"/>
           </a:p>
@@ -2935,7 +2935,7 @@
           <a:p>
             <a:r>
               <a:rPr lang="en-US" dirty="0"/>
-              <a:t/>
+              <a:t>הקורפוס הופך למטריצת מסמך-מונח בגודל 1,602×20,981, דלילה ב-99.58%. מימין — דוגמה לפסקה כוקטור דליל: רק מספר מונחים מקבלים משקל. הדירוג מחושב כדמיון קוסינוס בין וקטור השאילתה לפסקאות. זהו ה-baseline הלקסיקלי.</a:t>
             </a:r>
             <a:endParaRPr lang="en-US" dirty="0"/>
           </a:p>
@@ -3023,7 +3023,7 @@
           <a:p>
             <a:r>
               <a:rPr lang="en-US" dirty="0"/>
-              <a:t/>
+              <a:t>אתגר העברית: מיליות (ב/ל/מ/ה/ו/ש/כ) נדבקות למילים ומנפחות את אוצר המילים. ניסוי הסרת תחילית מצמצם 13,415→8,963 סוגי מילים (−33%). זה מסביר למה הלקסיקלי מתקשה; למטיזציה מלאה היא עבודה עתידית.</a:t>
             </a:r>
             <a:endParaRPr lang="en-US" dirty="0"/>
           </a:p>
@@ -3111,7 +3111,7 @@
           <a:p>
             <a:r>
               <a:rPr lang="en-US" dirty="0"/>
-              <a:t/>
+              <a:t>חמישה מאחזרים בממשק אחד: TF-IDF ו-BM25 (לקסיקליים), AlephBERT (סמנטי), ושני היברידים — RRF ומשוקלל. ההנחיות דרשו לפחות שתי גישות; לנו יש חמש.</a:t>
             </a:r>
             <a:endParaRPr lang="en-US" dirty="0"/>
           </a:p>
